--- a/Cafe_Marketing_Proposal.pptx
+++ b/Cafe_Marketing_Proposal.pptx
@@ -117,37 +117,37 @@
   <p:extLst>
     <p:ext uri="{521415D9-36F7-43E2-AB2F-B90AF26B5E84}">
       <p14:sectionLst xmlns:p14="http://schemas.microsoft.com/office/powerpoint/2010/main">
-        <p14:section name="Introduction" id="{2cac4cc6-226d-a040-991d-7b9f3558ee06}">
+        <p14:section name="Introduction" id="{e2b1dd3d-62ba-4e62-df16-e882d4886722}">
           <p14:sldIdLst>
             <p14:sldId id="256"/>
             <p14:sldId id="257"/>
           </p14:sldIdLst>
         </p14:section>
-        <p14:section name="Problem" id="{a181fbc2-5aac-f660-50fb-c920461791d3}">
+        <p14:section name="Problem" id="{49f65fef-79c9-ef57-eb77-9c9846c35fab}">
           <p14:sldIdLst>
             <p14:sldId id="258"/>
           </p14:sldIdLst>
         </p14:section>
-        <p14:section name="Solution" id="{a9f5ac3e-b809-3083-4eb9-9b970a444f75}">
+        <p14:section name="Solution" id="{1dd3e3ab-358d-cdff-2b0c-54b83b9ab916}">
           <p14:sldIdLst>
             <p14:sldId id="259"/>
             <p14:sldId id="260"/>
           </p14:sldIdLst>
         </p14:section>
-        <p14:section name="Budget and Timeline" id="{7ca85335-c341-6ff8-b9c3-0ecd7e18976f}">
+        <p14:section name="Budget and Timeline" id="{da5e3706-3aa2-8250-fd5d-62c22d81ef7c}">
           <p14:sldIdLst>
             <p14:sldId id="261"/>
             <p14:sldId id="262"/>
           </p14:sldIdLst>
         </p14:section>
-        <p14:section name="Results" id="{bcdd1cc8-5f15-f240-e602-12d4f17a2aea}">
+        <p14:section name="Results" id="{acff62f4-050c-9ce2-49a1-737b1cc3ff45}">
           <p14:sldIdLst>
             <p14:sldId id="263"/>
             <p14:sldId id="264"/>
             <p14:sldId id="265"/>
           </p14:sldIdLst>
         </p14:section>
-        <p14:section name="Conclusion" id="{05914f7c-f170-4f98-caaf-cde19a5bad77}">
+        <p14:section name="Conclusion" id="{79dde2e4-27d2-468c-c1c0-15917b20f069}">
           <p14:sldIdLst>
             <p14:sldId id="266"/>
           </p14:sldIdLst>
@@ -237,7 +237,7 @@
             <c:bubble3D val="0"/>
             <c:spPr>
               <a:solidFill>
-                <a:srgbClr val="6F4E37"/>
+                <a:srgbClr val="5B7F5E"/>
               </a:solidFill>
               <a:ln w="25400" cap="flat">
                 <a:solidFill>
@@ -399,7 +399,7 @@
                   <c:v>Social media management</c:v>
                 </c:pt>
                 <c:pt idx="1">
-                  <c:v>Paid advertising budget</c:v>
+                  <c:v>Paid advertising</c:v>
                 </c:pt>
                 <c:pt idx="2">
                   <c:v>Content creation</c:v>
@@ -853,8 +853,8 @@
           <a:p>
             <a:r>
               <a:rPr lang="en-US" dirty="0"/>
-              <a:t>Introduce the team and the agency.
-"Today we'll show you how digital marketing can help [Café Name] increase brand awareness, attract more customers and grow sales."</a:t>
+              <a:t>Introduce yourselves and BrandBrew Marketing.
+"Today we'll show you how we can help The Daily Cup reach more customers and grow its business."</a:t>
             </a:r>
             <a:endParaRPr lang="en-US" dirty="0"/>
           </a:p>
@@ -943,11 +943,11 @@
             <a:r>
               <a:rPr lang="en-US" dirty="0"/>
               <a:t>After the first month, we plan to:
-- Expand the advertising campaigns that work best.
-- Collaborate with local food influencers.
-- Introduce customer loyalty and referral programs.
-- Develop seasonal campaigns and special offers (for example Ramadan, summer, back to school).
-- Use performance data to build a long-term marketing strategy.</a:t>
+- Work with local food influencers.
+- Launch loyalty programs for regular customers.
+- Create seasonal offers.
+- Expand successful advertising campaigns.
+- Develop a long-term marketing strategy.</a:t>
             </a:r>
             <a:endParaRPr lang="en-US" dirty="0"/>
           </a:p>
@@ -1035,9 +1035,9 @@
           <a:p>
             <a:r>
               <a:rPr lang="en-US" dirty="0"/>
-              <a:t>We believe the right marketing strategy can help the café reach more customers and grow its business.
-Our agency is ready to turn this plan into action and build a strong digital presence for your brand.
-Let's grow your business together! Then open for questions.</a:t>
+              <a:t>Our agency is ready to help The Daily Cup grow and reach more customers.
+We believe that a good marketing strategy can improve the café's online presence and support its business growth.
+Let's grow together! Then thank the owner and open for questions.</a:t>
             </a:r>
             <a:endParaRPr lang="en-US" dirty="0"/>
           </a:p>
@@ -1125,9 +1125,13 @@
           <a:p>
             <a:r>
               <a:rPr lang="en-US" dirty="0"/>
-              <a:t>Our agency aims to help the café grow its business through a targeted digital marketing strategy.
-We will improve its online presence, attract new customers, and encourage existing customers to return.
-Our strategy focuses on three things (shown on the left): social media marketing, paid advertising, and engaging content.</a:t>
+              <a:t>Our marketing agency wants to help The Daily Cup grow its business.
+Our goals are to:
+- Increase brand awareness.
+- Attract more customers.
+- Increase sales.
+- Improve social media presence.
+We will use social media, online advertising, and creative content to achieve these goals (shown in the picture).</a:t>
             </a:r>
             <a:endParaRPr lang="en-US" dirty="0"/>
           </a:p>
@@ -1215,13 +1219,12 @@
           <a:p>
             <a:r>
               <a:rPr lang="en-US" dirty="0"/>
-              <a:t>The café may face several marketing challenges:
-- Low brand awareness: many people nearby don't know the café exists.
-- Limited reach on social media: posts are seen by very few people.
-- Strong competition from other cafés in the area.
-- Few new customers and limited customer engagement.
-- No clear digital marketing strategy: posting is random, with no plan or goals.
-(These are proposed challenges for the presentation scenario, not verified facts about a real café.)</a:t>
+              <a:t>The café may face some challenges:
+- Low brand awareness.
+- Few followers and low engagement on social media.
+- Strong competition from other cafés.
+- Difficulty attracting new customers.
+- Low sales during some periods.</a:t>
             </a:r>
             <a:endParaRPr lang="en-US" dirty="0"/>
           </a:p>
@@ -1309,11 +1312,11 @@
           <a:p>
             <a:r>
               <a:rPr lang="en-US" dirty="0"/>
-              <a:t>Our agency proposes a complete digital marketing plan with four parts:
-1. Social Media Management: attractive posts, reels and stories, with a consistent posting schedule.
-2. Paid Advertising: targeted Facebook and Instagram ads that reach potential customers near the café.
-3. Content Creation: high-quality photos and videos showing the drinks, food, offers and the café experience.
-4. Customer Engagement: replying to comments and messages, and introducing promotions and loyalty campaigns.</a:t>
+              <a:t>Our agency offers four main services:
+- Social Media Management: create regular posts, reels, and stories.
+- Paid Advertising: run Facebook and Instagram ads.
+- Content Creation: take attractive photos and videos of products.
+- Promotions: offer discounts and special deals to attract customers.</a:t>
             </a:r>
             <a:endParaRPr lang="en-US" dirty="0"/>
           </a:p>
@@ -1401,12 +1404,12 @@
           <a:p>
             <a:r>
               <a:rPr lang="en-US" dirty="0"/>
-              <a:t>1. Research: analyze the target audience and competitors.
-2. Planning: develop a content calendar and an advertising strategy.
-3. Execution: publish content and launch advertising campaigns.
-4. Monitoring: track engagement, reach, leads and sales.
-5. Optimization: improve campaigns based on performance data.
-Steps 3 to 5 are a continuous cycle.</a:t>
+              <a:t>We will follow five simple steps:
+1. Research the market and competitors.
+2. Identify the target audience.
+3. Create a monthly content plan.
+4. Publish content and launch advertisements.
+5. Measure results and improve the campaign.</a:t>
             </a:r>
             <a:endParaRPr lang="en-US" dirty="0"/>
           </a:p>
@@ -1494,13 +1497,13 @@
           <a:p>
             <a:r>
               <a:rPr lang="en-US" dirty="0"/>
-              <a:t>Illustrative budget for a one-month campaign (amounts are proposed for the presentation, not supplier quotes):
+              <a:t>Monthly budget:
 - Social media management: 5,000 EGP
-- Paid advertising budget: 4,000 EGP
+- Paid advertising: 4,000 EGP
 - Content creation: 3,000 EGP
-- Campaign reporting and optimization: 1,000 EGP
+- Reporting and optimization: 1,000 EGP
 Total: 13,000 EGP per month.
-The final quote should clarify whether taxes, photography expenses and other production costs are included.</a:t>
+This is a proposed budget for the presentation.</a:t>
             </a:r>
             <a:endParaRPr lang="en-US" dirty="0"/>
           </a:p>
@@ -1588,10 +1591,10 @@
           <a:p>
             <a:r>
               <a:rPr lang="en-US" dirty="0"/>
-              <a:t>Week 1 - Research and Planning: study the market, competitors and target audience.
-Week 2 - Content Creation: prepare posts, videos and advertising materials.
-Week 3 - Campaign Launch: publish content and start paid ads.
-Week 4 - Evaluation and Improvement: analyze performance and recommend improvements.</a:t>
+              <a:t>Week 1: Research and planning.
+Week 2: Content creation.
+Week 3: Launch marketing campaigns.
+Week 4: Measure results and improve.</a:t>
             </a:r>
             <a:endParaRPr lang="en-US" dirty="0"/>
           </a:p>
@@ -1679,12 +1682,12 @@
           <a:p>
             <a:r>
               <a:rPr lang="en-US" dirty="0"/>
-              <a:t>Working with our agency can help the café:
-- Increase brand awareness and online visibility.
-- Reach more potential customers.
-- Build stronger customer relationships.
-- Promote new products and special offers.
-- Make better marketing decisions using data.</a:t>
+              <a:t>Working with our agency will help the café:
+- Reach more people.
+- Attract new customers.
+- Build a strong brand.
+- Improve customer engagement.
+- Increase the chance of higher sales.</a:t>
             </a:r>
             <a:endParaRPr lang="en-US" dirty="0"/>
           </a:p>
@@ -1773,12 +1776,12 @@
             <a:r>
               <a:rPr lang="en-US" dirty="0"/>
               <a:t>During the first month, we aim to achieve:
-- Higher social media reach and engagement.
-- More profile visits, inquiries and direction requests.
-- More awareness of the café's products and offers.
-- More visits and sales that can be linked to the campaign.
-How we measure success: reach, engagement rate, cost per inquiry, customer visits, and sales where data is available.
-Targets should be set after reviewing the café's current performance. Results are not guaranteed.</a:t>
+- More social media followers and engagement.
+- More customer inquiries.
+- Greater awareness of the café.
+- More visits from potential customers.
+- Improved sales performance.
+We will track the results to understand what works best.</a:t>
             </a:r>
             <a:endParaRPr lang="en-US" dirty="0"/>
           </a:p>
@@ -2137,7 +2140,7 @@
                   <a:schemeClr val="accent5"/>
                 </a:solidFill>
               </a:rPr>
-              <a:t>[Agency Name]  |  Digital Marketing Proposal for [Café Name]</a:t>
+              <a:t>BrandBrew Marketing  |  Digital Marketing Proposal for The Daily Cup</a:t>
             </a:r>
             <a:endParaRPr lang="en-US" sz="1000" dirty="0"/>
           </a:p>
@@ -2569,7 +2572,7 @@
                   <a:schemeClr val="accent2"/>
                 </a:solidFill>
               </a:rPr>
-              <a:t>PRESENTED BY [AGENCY NAME]</a:t>
+              <a:t>PRESENTED BY BRANDBREW MARKETING</a:t>
             </a:r>
             <a:endParaRPr lang="en-US" sz="1200" dirty="0"/>
           </a:p>
@@ -2648,7 +2651,7 @@
                   <a:schemeClr val="accent2"/>
                 </a:solidFill>
               </a:rPr>
-              <a:t>Helping [Café Name] get discovered, attract more customers and grow sales.</a:t>
+              <a:t>For The Daily Cup Café</a:t>
             </a:r>
             <a:endParaRPr lang="en-US" sz="1500" dirty="0"/>
           </a:p>
@@ -2776,7 +2779,7 @@
                 <a:ea typeface="Cambria" pitchFamily="34" charset="-122"/>
                 <a:cs typeface="Cambria" pitchFamily="34" charset="-120"/>
               </a:rPr>
-              <a:t>After Month One: Keep Growing</a:t>
+              <a:t>After the First Month</a:t>
             </a:r>
             <a:endParaRPr lang="en-US" sz="3200" dirty="0"/>
           </a:p>
@@ -2806,7 +2809,7 @@
       </p:sp>
       <p:sp>
         <p:nvSpPr>
-          <p:cNvPr id="5" name="Scale the best ads circle"/>
+          <p:cNvPr id="5" name="Food influencers circle"/>
           <p:cNvSpPr/>
           <p:nvPr/>
         </p:nvSpPr>
@@ -2826,7 +2829,7 @@
       </p:sp>
       <p:pic>
         <p:nvPicPr>
-          <p:cNvPr id="6" name="Scale the best ads icon" descr="Scale the best ads">    </p:cNvPr>
+          <p:cNvPr id="6" name="Food influencers icon" descr="Food influencers">    </p:cNvPr>
           <p:cNvPicPr>
             <a:picLocks noChangeAspect="1"/>
           </p:cNvPicPr>
@@ -2873,14 +2876,14 @@
               <a:buNone/>
             </a:pPr>
             <a:r>
-              <a:rPr lang="en-US" sz="1300" b="1" dirty="0">
+              <a:rPr lang="en-US" sz="1400" b="1" dirty="0">
                 <a:solidFill>
                   <a:schemeClr val="tx2"/>
                 </a:solidFill>
               </a:rPr>
-              <a:t>Scale the best ads</a:t>
-            </a:r>
-            <a:endParaRPr lang="en-US" sz="1300" dirty="0"/>
+              <a:t>Food influencers</a:t>
+            </a:r>
+            <a:endParaRPr lang="en-US" sz="1400" dirty="0"/>
           </a:p>
         </p:txBody>
       </p:sp>
@@ -2908,7 +2911,7 @@
       </p:sp>
       <p:sp>
         <p:nvSpPr>
-          <p:cNvPr id="9" name="Food influencer collabs circle"/>
+          <p:cNvPr id="9" name="Loyalty programs circle"/>
           <p:cNvSpPr/>
           <p:nvPr/>
         </p:nvSpPr>
@@ -2928,7 +2931,7 @@
       </p:sp>
       <p:pic>
         <p:nvPicPr>
-          <p:cNvPr id="10" name="Food influencer collabs icon" descr="Food influencer collabs">    </p:cNvPr>
+          <p:cNvPr id="10" name="Loyalty programs icon" descr="Loyalty programs">    </p:cNvPr>
           <p:cNvPicPr>
             <a:picLocks noChangeAspect="1"/>
           </p:cNvPicPr>
@@ -2975,14 +2978,14 @@
               <a:buNone/>
             </a:pPr>
             <a:r>
-              <a:rPr lang="en-US" sz="1300" b="1" dirty="0">
+              <a:rPr lang="en-US" sz="1400" b="1" dirty="0">
                 <a:solidFill>
                   <a:schemeClr val="tx2"/>
                 </a:solidFill>
               </a:rPr>
-              <a:t>Food influencer collabs</a:t>
-            </a:r>
-            <a:endParaRPr lang="en-US" sz="1300" dirty="0"/>
+              <a:t>Loyalty programs</a:t>
+            </a:r>
+            <a:endParaRPr lang="en-US" sz="1400" dirty="0"/>
           </a:p>
         </p:txBody>
       </p:sp>
@@ -3003,14 +3006,14 @@
             </a:avLst>
           </a:prstGeom>
           <a:solidFill>
-            <a:schemeClr val="accent1"/>
+            <a:schemeClr val="accent4"/>
           </a:solidFill>
           <a:ln/>
         </p:spPr>
       </p:sp>
       <p:sp>
         <p:nvSpPr>
-          <p:cNvPr id="13" name="Loyalty and referral programs circle"/>
+          <p:cNvPr id="13" name="Seasonal offers circle"/>
           <p:cNvSpPr/>
           <p:nvPr/>
         </p:nvSpPr>
@@ -3030,7 +3033,7 @@
       </p:sp>
       <p:pic>
         <p:nvPicPr>
-          <p:cNvPr id="14" name="Loyalty and referral programs icon" descr="Loyalty and referral programs">    </p:cNvPr>
+          <p:cNvPr id="14" name="Seasonal offers icon" descr="Seasonal offers">    </p:cNvPr>
           <p:cNvPicPr>
             <a:picLocks noChangeAspect="1"/>
           </p:cNvPicPr>
@@ -3077,14 +3080,14 @@
               <a:buNone/>
             </a:pPr>
             <a:r>
-              <a:rPr lang="en-US" sz="1300" b="1" dirty="0">
+              <a:rPr lang="en-US" sz="1400" b="1" dirty="0">
                 <a:solidFill>
                   <a:schemeClr val="bg1"/>
                 </a:solidFill>
               </a:rPr>
-              <a:t>Loyalty and referral programs</a:t>
-            </a:r>
-            <a:endParaRPr lang="en-US" sz="1300" dirty="0"/>
+              <a:t>Seasonal offers</a:t>
+            </a:r>
+            <a:endParaRPr lang="en-US" sz="1400" dirty="0"/>
           </a:p>
         </p:txBody>
       </p:sp>
@@ -3112,7 +3115,7 @@
       </p:sp>
       <p:sp>
         <p:nvSpPr>
-          <p:cNvPr id="17" name="Seasonal campaigns and offers circle"/>
+          <p:cNvPr id="17" name="Expand the best ads circle"/>
           <p:cNvSpPr/>
           <p:nvPr/>
         </p:nvSpPr>
@@ -3132,7 +3135,7 @@
       </p:sp>
       <p:pic>
         <p:nvPicPr>
-          <p:cNvPr id="18" name="Seasonal campaigns and offers icon" descr="Seasonal campaigns and offers">    </p:cNvPr>
+          <p:cNvPr id="18" name="Expand the best ads icon" descr="Expand the best ads">    </p:cNvPr>
           <p:cNvPicPr>
             <a:picLocks noChangeAspect="1"/>
           </p:cNvPicPr>
@@ -3179,14 +3182,14 @@
               <a:buNone/>
             </a:pPr>
             <a:r>
-              <a:rPr lang="en-US" sz="1300" b="1" dirty="0">
+              <a:rPr lang="en-US" sz="1400" b="1" dirty="0">
                 <a:solidFill>
                   <a:schemeClr val="bg1"/>
                 </a:solidFill>
               </a:rPr>
-              <a:t>Seasonal campaigns and offers</a:t>
-            </a:r>
-            <a:endParaRPr lang="en-US" sz="1300" dirty="0"/>
+              <a:t>Expand the best ads</a:t>
+            </a:r>
+            <a:endParaRPr lang="en-US" sz="1400" dirty="0"/>
           </a:p>
         </p:txBody>
       </p:sp>
@@ -3214,7 +3217,7 @@
       </p:sp>
       <p:sp>
         <p:nvSpPr>
-          <p:cNvPr id="21" name="Long-term marketing strategy circle"/>
+          <p:cNvPr id="21" name="Long-term strategy circle"/>
           <p:cNvSpPr/>
           <p:nvPr/>
         </p:nvSpPr>
@@ -3234,7 +3237,7 @@
       </p:sp>
       <p:pic>
         <p:nvPicPr>
-          <p:cNvPr id="22" name="Long-term marketing strategy icon" descr="Long-term marketing strategy">    </p:cNvPr>
+          <p:cNvPr id="22" name="Long-term strategy icon" descr="Long-term strategy">    </p:cNvPr>
           <p:cNvPicPr>
             <a:picLocks noChangeAspect="1"/>
           </p:cNvPicPr>
@@ -3281,14 +3284,14 @@
               <a:buNone/>
             </a:pPr>
             <a:r>
-              <a:rPr lang="en-US" sz="1300" b="1" dirty="0">
+              <a:rPr lang="en-US" sz="1400" b="1" dirty="0">
                 <a:solidFill>
                   <a:schemeClr val="bg1"/>
                 </a:solidFill>
               </a:rPr>
-              <a:t>Long-term marketing strategy</a:t>
-            </a:r>
-            <a:endParaRPr lang="en-US" sz="1300" dirty="0"/>
+              <a:t>Long-term strategy</a:t>
+            </a:r>
+            <a:endParaRPr lang="en-US" sz="1400" dirty="0"/>
           </a:p>
         </p:txBody>
       </p:sp>
@@ -3394,7 +3397,7 @@
                   <a:schemeClr val="accent2"/>
                 </a:solidFill>
               </a:rPr>
-              <a:t>CONCLUSION</a:t>
+              <a:t>10  CONCLUSION</a:t>
             </a:r>
             <a:endParaRPr lang="en-US" sz="1200" dirty="0"/>
           </a:p>
@@ -3435,7 +3438,7 @@
                 <a:ea typeface="Cambria" pitchFamily="34" charset="-122"/>
                 <a:cs typeface="Cambria" pitchFamily="34" charset="-120"/>
               </a:rPr>
-              <a:t>Let's Grow Your Business Together!</a:t>
+              <a:t>Let's Grow Together!</a:t>
             </a:r>
             <a:endParaRPr lang="en-US" sz="4000" dirty="0"/>
           </a:p>
@@ -3473,7 +3476,7 @@
                   <a:schemeClr val="accent2"/>
                 </a:solidFill>
               </a:rPr>
-              <a:t>We're ready to turn this plan into action.</a:t>
+              <a:t>We're ready to help The Daily Cup grow and reach more customers.</a:t>
             </a:r>
             <a:endParaRPr lang="en-US" sz="1500" dirty="0"/>
           </a:p>
@@ -3509,7 +3512,7 @@
                   <a:schemeClr val="accent2"/>
                 </a:solidFill>
               </a:rPr>
-              <a:t>[Agency Name]   |   [Phone]   |   [Email]</a:t>
+              <a:t>BrandBrew Marketing   |   [Phone]   |   [Email]</a:t>
             </a:r>
             <a:endParaRPr lang="en-US" sz="1300" dirty="0"/>
           </a:p>
@@ -3645,7 +3648,7 @@
       </p:sp>
       <p:pic>
         <p:nvPicPr>
-          <p:cNvPr id="4" name="Strategy focus illustration" descr="Strategy focus illustration">    </p:cNvPr>
+          <p:cNvPr id="4" name="Social media, online ads and content illustration" descr="Social media, online ads and content illustration">    </p:cNvPr>
           <p:cNvPicPr>
             <a:picLocks noChangeAspect="1"/>
           </p:cNvPicPr>
@@ -3676,7 +3679,7 @@
         <p:spPr>
           <a:xfrm>
             <a:off x="4389120" y="1325880"/>
-            <a:ext cx="4297680" cy="868680"/>
+            <a:ext cx="4297680" cy="457200"/>
           </a:xfrm>
           <a:prstGeom prst="rect">
             <a:avLst/>
@@ -3700,7 +3703,7 @@
                 <a:ea typeface="Cambria" pitchFamily="34" charset="-122"/>
                 <a:cs typeface="Cambria" pitchFamily="34" charset="-120"/>
               </a:rPr>
-              <a:t>More people discover, visit and come back to [Café Name].</a:t>
+              <a:t>Our goal: help The Daily Cup grow</a:t>
             </a:r>
             <a:endParaRPr lang="en-US" sz="2000" dirty="0"/>
           </a:p>
@@ -3708,13 +3711,13 @@
       </p:sp>
       <p:sp>
         <p:nvSpPr>
-          <p:cNvPr id="6" name="Stronger online presence circle"/>
-          <p:cNvSpPr/>
-          <p:nvPr/>
-        </p:nvSpPr>
-        <p:spPr>
-          <a:xfrm>
-            <a:off x="4389120" y="2377440"/>
+          <p:cNvPr id="6" name="Increase brand awareness circle"/>
+          <p:cNvSpPr/>
+          <p:nvPr/>
+        </p:nvSpPr>
+        <p:spPr>
+          <a:xfrm>
+            <a:off x="4389120" y="2011680"/>
             <a:ext cx="457200" cy="457200"/>
           </a:xfrm>
           <a:prstGeom prst="ellipse">
@@ -3728,7 +3731,7 @@
       </p:sp>
       <p:pic>
         <p:nvPicPr>
-          <p:cNvPr id="7" name="Stronger online presence icon" descr="Stronger online presence">    </p:cNvPr>
+          <p:cNvPr id="7" name="Increase brand awareness icon" descr="Increase brand awareness">    </p:cNvPr>
           <p:cNvPicPr>
             <a:picLocks noChangeAspect="1"/>
           </p:cNvPicPr>
@@ -3742,7 +3745,7 @@
         </p:blipFill>
         <p:spPr>
           <a:xfrm>
-            <a:off x="4512564" y="2500884"/>
+            <a:off x="4512564" y="2135124"/>
             <a:ext cx="210312" cy="210312"/>
           </a:xfrm>
           <a:prstGeom prst="rect">
@@ -3758,7 +3761,7 @@
         </p:nvSpPr>
         <p:spPr>
           <a:xfrm>
-            <a:off x="5029200" y="2377440"/>
+            <a:off x="5029200" y="2011680"/>
             <a:ext cx="3657600" cy="457200"/>
           </a:xfrm>
           <a:prstGeom prst="rect">
@@ -3780,7 +3783,7 @@
                   <a:schemeClr val="tx2"/>
                 </a:solidFill>
               </a:rPr>
-              <a:t>Stronger online presence</a:t>
+              <a:t>Increase brand awareness</a:t>
             </a:r>
             <a:endParaRPr lang="en-US" sz="1600" dirty="0"/>
           </a:p>
@@ -3788,13 +3791,13 @@
       </p:sp>
       <p:sp>
         <p:nvSpPr>
-          <p:cNvPr id="9" name="New customers circle"/>
-          <p:cNvSpPr/>
-          <p:nvPr/>
-        </p:nvSpPr>
-        <p:spPr>
-          <a:xfrm>
-            <a:off x="4389120" y="3108960"/>
+          <p:cNvPr id="9" name="Attract more customers circle"/>
+          <p:cNvSpPr/>
+          <p:nvPr/>
+        </p:nvSpPr>
+        <p:spPr>
+          <a:xfrm>
+            <a:off x="4389120" y="2670048"/>
             <a:ext cx="457200" cy="457200"/>
           </a:xfrm>
           <a:prstGeom prst="ellipse">
@@ -3808,7 +3811,7 @@
       </p:sp>
       <p:pic>
         <p:nvPicPr>
-          <p:cNvPr id="10" name="New customers icon" descr="New customers">    </p:cNvPr>
+          <p:cNvPr id="10" name="Attract more customers icon" descr="Attract more customers">    </p:cNvPr>
           <p:cNvPicPr>
             <a:picLocks noChangeAspect="1"/>
           </p:cNvPicPr>
@@ -3822,7 +3825,7 @@
         </p:blipFill>
         <p:spPr>
           <a:xfrm>
-            <a:off x="4512564" y="3232404"/>
+            <a:off x="4512564" y="2793492"/>
             <a:ext cx="210312" cy="210312"/>
           </a:xfrm>
           <a:prstGeom prst="rect">
@@ -3838,7 +3841,7 @@
         </p:nvSpPr>
         <p:spPr>
           <a:xfrm>
-            <a:off x="5029200" y="3108960"/>
+            <a:off x="5029200" y="2670048"/>
             <a:ext cx="3657600" cy="457200"/>
           </a:xfrm>
           <a:prstGeom prst="rect">
@@ -3860,7 +3863,7 @@
                   <a:schemeClr val="tx2"/>
                 </a:solidFill>
               </a:rPr>
-              <a:t>New customers</a:t>
+              <a:t>Attract more customers</a:t>
             </a:r>
             <a:endParaRPr lang="en-US" sz="1600" dirty="0"/>
           </a:p>
@@ -3868,13 +3871,13 @@
       </p:sp>
       <p:sp>
         <p:nvSpPr>
-          <p:cNvPr id="12" name="Customers who return circle"/>
-          <p:cNvSpPr/>
-          <p:nvPr/>
-        </p:nvSpPr>
-        <p:spPr>
-          <a:xfrm>
-            <a:off x="4389120" y="3840480"/>
+          <p:cNvPr id="12" name="Increase sales circle"/>
+          <p:cNvSpPr/>
+          <p:nvPr/>
+        </p:nvSpPr>
+        <p:spPr>
+          <a:xfrm>
+            <a:off x="4389120" y="3328416"/>
             <a:ext cx="457200" cy="457200"/>
           </a:xfrm>
           <a:prstGeom prst="ellipse">
@@ -3888,7 +3891,7 @@
       </p:sp>
       <p:pic>
         <p:nvPicPr>
-          <p:cNvPr id="13" name="Customers who return icon" descr="Customers who return">    </p:cNvPr>
+          <p:cNvPr id="13" name="Increase sales icon" descr="Increase sales">    </p:cNvPr>
           <p:cNvPicPr>
             <a:picLocks noChangeAspect="1"/>
           </p:cNvPicPr>
@@ -3902,7 +3905,7 @@
         </p:blipFill>
         <p:spPr>
           <a:xfrm>
-            <a:off x="4512564" y="3963924"/>
+            <a:off x="4512564" y="3451860"/>
             <a:ext cx="210312" cy="210312"/>
           </a:xfrm>
           <a:prstGeom prst="rect">
@@ -3918,7 +3921,7 @@
         </p:nvSpPr>
         <p:spPr>
           <a:xfrm>
-            <a:off x="5029200" y="3840480"/>
+            <a:off x="5029200" y="3328416"/>
             <a:ext cx="3657600" cy="457200"/>
           </a:xfrm>
           <a:prstGeom prst="rect">
@@ -3940,7 +3943,87 @@
                   <a:schemeClr val="tx2"/>
                 </a:solidFill>
               </a:rPr>
-              <a:t>Customers who return</a:t>
+              <a:t>Increase sales</a:t>
+            </a:r>
+            <a:endParaRPr lang="en-US" sz="1600" dirty="0"/>
+          </a:p>
+        </p:txBody>
+      </p:sp>
+      <p:sp>
+        <p:nvSpPr>
+          <p:cNvPr id="15" name="Improve social media presence circle"/>
+          <p:cNvSpPr/>
+          <p:nvPr/>
+        </p:nvSpPr>
+        <p:spPr>
+          <a:xfrm>
+            <a:off x="4389120" y="3986784"/>
+            <a:ext cx="457200" cy="457200"/>
+          </a:xfrm>
+          <a:prstGeom prst="ellipse">
+            <a:avLst/>
+          </a:prstGeom>
+          <a:solidFill>
+            <a:schemeClr val="accent1"/>
+          </a:solidFill>
+          <a:ln/>
+        </p:spPr>
+      </p:sp>
+      <p:pic>
+        <p:nvPicPr>
+          <p:cNvPr id="16" name="Improve social media presence icon" descr="Improve social media presence">    </p:cNvPr>
+          <p:cNvPicPr>
+            <a:picLocks noChangeAspect="1"/>
+          </p:cNvPicPr>
+          <p:nvPr/>
+        </p:nvPicPr>
+        <p:blipFill>
+          <a:blip r:embed="rId5"/>
+          <a:stretch>
+            <a:fillRect/>
+          </a:stretch>
+        </p:blipFill>
+        <p:spPr>
+          <a:xfrm>
+            <a:off x="4512564" y="4110228"/>
+            <a:ext cx="210312" cy="210312"/>
+          </a:xfrm>
+          <a:prstGeom prst="rect">
+            <a:avLst/>
+          </a:prstGeom>
+        </p:spPr>
+      </p:pic>
+      <p:sp>
+        <p:nvSpPr>
+          <p:cNvPr id="17" name="Row text 4"/>
+          <p:cNvSpPr txBox="1"/>
+          <p:nvPr/>
+        </p:nvSpPr>
+        <p:spPr>
+          <a:xfrm>
+            <a:off x="5029200" y="3986784"/>
+            <a:ext cx="3657600" cy="457200"/>
+          </a:xfrm>
+          <a:prstGeom prst="rect">
+            <a:avLst/>
+          </a:prstGeom>
+          <a:noFill/>
+          <a:ln/>
+        </p:spPr>
+        <p:txBody>
+          <a:bodyPr wrap="square" lIns="0" tIns="0" rIns="0" bIns="0" rtlCol="0" anchor="ctr"/>
+          <a:lstStyle/>
+          <a:p>
+            <a:pPr indent="0" marL="0">
+              <a:buNone/>
+            </a:pPr>
+            <a:r>
+              <a:rPr lang="en-US" sz="1600" b="1" dirty="0">
+                <a:solidFill>
+                  <a:schemeClr val="tx2"/>
+                </a:solidFill>
+              </a:rPr>
+              <a:t>Improve social media presence</a:t>
             </a:r>
             <a:endParaRPr lang="en-US" sz="1600" dirty="0"/>
           </a:p>
@@ -4089,7 +4172,7 @@
                 <a:ea typeface="Cambria" pitchFamily="34" charset="-122"/>
                 <a:cs typeface="Cambria" pitchFamily="34" charset="-120"/>
               </a:rPr>
-              <a:t>What's Holding the Café Back</a:t>
+              <a:t>The Challenges</a:t>
             </a:r>
             <a:endParaRPr lang="en-US" sz="3200" dirty="0"/>
           </a:p>
@@ -4177,7 +4260,7 @@
       </p:sp>
       <p:sp>
         <p:nvSpPr>
-          <p:cNvPr id="7" name="Limited reach on social media circle"/>
+          <p:cNvPr id="7" name="Few followers, low engagement circle"/>
           <p:cNvSpPr/>
           <p:nvPr/>
         </p:nvSpPr>
@@ -4197,7 +4280,7 @@
       </p:sp>
       <p:pic>
         <p:nvPicPr>
-          <p:cNvPr id="8" name="Limited reach on social media icon" descr="Limited reach on social media">    </p:cNvPr>
+          <p:cNvPr id="8" name="Few followers, low engagement icon" descr="Few followers, low engagement">    </p:cNvPr>
           <p:cNvPicPr>
             <a:picLocks noChangeAspect="1"/>
           </p:cNvPicPr>
@@ -4249,7 +4332,7 @@
                   <a:schemeClr val="tx2"/>
                 </a:solidFill>
               </a:rPr>
-              <a:t>Limited reach on social media</a:t>
+              <a:t>Few followers, low engagement</a:t>
             </a:r>
             <a:endParaRPr lang="en-US" sz="1600" dirty="0"/>
           </a:p>
@@ -4337,7 +4420,7 @@
       </p:sp>
       <p:sp>
         <p:nvSpPr>
-          <p:cNvPr id="13" name="Few new customers, low engagement circle"/>
+          <p:cNvPr id="13" name="Hard to attract new customers circle"/>
           <p:cNvSpPr/>
           <p:nvPr/>
         </p:nvSpPr>
@@ -4357,7 +4440,7 @@
       </p:sp>
       <p:pic>
         <p:nvPicPr>
-          <p:cNvPr id="14" name="Few new customers, low engagement icon" descr="Few new customers, low engagement">    </p:cNvPr>
+          <p:cNvPr id="14" name="Hard to attract new customers icon" descr="Hard to attract new customers">    </p:cNvPr>
           <p:cNvPicPr>
             <a:picLocks noChangeAspect="1"/>
           </p:cNvPicPr>
@@ -4409,7 +4492,7 @@
                   <a:schemeClr val="tx2"/>
                 </a:solidFill>
               </a:rPr>
-              <a:t>Few new customers, low engagement</a:t>
+              <a:t>Hard to attract new customers</a:t>
             </a:r>
             <a:endParaRPr lang="en-US" sz="1600" dirty="0"/>
           </a:p>
@@ -4417,7 +4500,7 @@
       </p:sp>
       <p:sp>
         <p:nvSpPr>
-          <p:cNvPr id="16" name="No clear digital marketing strategy circle"/>
+          <p:cNvPr id="16" name="Low sales in some periods circle"/>
           <p:cNvSpPr/>
           <p:nvPr/>
         </p:nvSpPr>
@@ -4437,7 +4520,7 @@
       </p:sp>
       <p:pic>
         <p:nvPicPr>
-          <p:cNvPr id="17" name="No clear digital marketing strategy icon" descr="No clear digital marketing strategy">    </p:cNvPr>
+          <p:cNvPr id="17" name="Low sales in some periods icon" descr="Low sales in some periods">    </p:cNvPr>
           <p:cNvPicPr>
             <a:picLocks noChangeAspect="1"/>
           </p:cNvPicPr>
@@ -4489,7 +4572,7 @@
                   <a:schemeClr val="tx2"/>
                 </a:solidFill>
               </a:rPr>
-              <a:t>No clear digital marketing strategy</a:t>
+              <a:t>Low sales in some periods</a:t>
             </a:r>
             <a:endParaRPr lang="en-US" sz="1600" dirty="0"/>
           </a:p>
@@ -4662,7 +4745,7 @@
                 <a:ea typeface="Cambria" pitchFamily="34" charset="-122"/>
                 <a:cs typeface="Cambria" pitchFamily="34" charset="-120"/>
               </a:rPr>
-              <a:t>Our 4-Part Marketing Plan</a:t>
+              <a:t>Our Four Main Services</a:t>
             </a:r>
             <a:endParaRPr lang="en-US" sz="3200" dirty="0"/>
           </a:p>
@@ -4670,7 +4753,7 @@
       </p:sp>
       <p:sp>
         <p:nvSpPr>
-          <p:cNvPr id="4" name="Solution card 1"/>
+          <p:cNvPr id="4" name="Service card 1"/>
           <p:cNvSpPr/>
           <p:nvPr/>
         </p:nvSpPr>
@@ -4716,7 +4799,7 @@
       </p:pic>
       <p:sp>
         <p:nvSpPr>
-          <p:cNvPr id="6" name="Solution title 1"/>
+          <p:cNvPr id="6" name="Service title 1"/>
           <p:cNvSpPr txBox="1"/>
           <p:nvPr/>
         </p:nvSpPr>
@@ -4752,7 +4835,7 @@
       </p:sp>
       <p:sp>
         <p:nvSpPr>
-          <p:cNvPr id="7" name="Solution text 1"/>
+          <p:cNvPr id="7" name="Service text 1"/>
           <p:cNvSpPr txBox="1"/>
           <p:nvPr/>
         </p:nvSpPr>
@@ -4775,20 +4858,20 @@
               <a:buNone/>
             </a:pPr>
             <a:r>
-              <a:rPr lang="en-US" sz="1200" dirty="0">
+              <a:rPr lang="en-US" sz="1300" dirty="0">
                 <a:solidFill>
                   <a:schemeClr val="tx1"/>
                 </a:solidFill>
               </a:rPr>
-              <a:t>Posts, reels and stories on a steady schedule</a:t>
-            </a:r>
-            <a:endParaRPr lang="en-US" sz="1200" dirty="0"/>
-          </a:p>
-        </p:txBody>
-      </p:sp>
-      <p:sp>
-        <p:nvSpPr>
-          <p:cNvPr id="8" name="Solution card 2"/>
+              <a:t>Regular posts, reels and stories</a:t>
+            </a:r>
+            <a:endParaRPr lang="en-US" sz="1300" dirty="0"/>
+          </a:p>
+        </p:txBody>
+      </p:sp>
+      <p:sp>
+        <p:nvSpPr>
+          <p:cNvPr id="8" name="Service card 2"/>
           <p:cNvSpPr/>
           <p:nvPr/>
         </p:nvSpPr>
@@ -4834,7 +4917,7 @@
       </p:pic>
       <p:sp>
         <p:nvSpPr>
-          <p:cNvPr id="10" name="Solution title 2"/>
+          <p:cNvPr id="10" name="Service title 2"/>
           <p:cNvSpPr txBox="1"/>
           <p:nvPr/>
         </p:nvSpPr>
@@ -4870,7 +4953,7 @@
       </p:sp>
       <p:sp>
         <p:nvSpPr>
-          <p:cNvPr id="11" name="Solution text 2"/>
+          <p:cNvPr id="11" name="Service text 2"/>
           <p:cNvSpPr txBox="1"/>
           <p:nvPr/>
         </p:nvSpPr>
@@ -4893,20 +4976,20 @@
               <a:buNone/>
             </a:pPr>
             <a:r>
-              <a:rPr lang="en-US" sz="1200" dirty="0">
+              <a:rPr lang="en-US" sz="1300" dirty="0">
                 <a:solidFill>
                   <a:schemeClr val="tx1"/>
                 </a:solidFill>
               </a:rPr>
-              <a:t>Facebook and Instagram ads for people nearby</a:t>
-            </a:r>
-            <a:endParaRPr lang="en-US" sz="1200" dirty="0"/>
-          </a:p>
-        </p:txBody>
-      </p:sp>
-      <p:sp>
-        <p:nvSpPr>
-          <p:cNvPr id="12" name="Solution card 3"/>
+              <a:t>Facebook and Instagram ads</a:t>
+            </a:r>
+            <a:endParaRPr lang="en-US" sz="1300" dirty="0"/>
+          </a:p>
+        </p:txBody>
+      </p:sp>
+      <p:sp>
+        <p:nvSpPr>
+          <p:cNvPr id="12" name="Service card 3"/>
           <p:cNvSpPr/>
           <p:nvPr/>
         </p:nvSpPr>
@@ -4952,7 +5035,7 @@
       </p:pic>
       <p:sp>
         <p:nvSpPr>
-          <p:cNvPr id="14" name="Solution title 3"/>
+          <p:cNvPr id="14" name="Service title 3"/>
           <p:cNvSpPr txBox="1"/>
           <p:nvPr/>
         </p:nvSpPr>
@@ -4988,7 +5071,7 @@
       </p:sp>
       <p:sp>
         <p:nvSpPr>
-          <p:cNvPr id="15" name="Solution text 3"/>
+          <p:cNvPr id="15" name="Service text 3"/>
           <p:cNvSpPr txBox="1"/>
           <p:nvPr/>
         </p:nvSpPr>
@@ -5011,20 +5094,20 @@
               <a:buNone/>
             </a:pPr>
             <a:r>
-              <a:rPr lang="en-US" sz="1200" dirty="0">
+              <a:rPr lang="en-US" sz="1300" dirty="0">
                 <a:solidFill>
                   <a:schemeClr val="tx1"/>
                 </a:solidFill>
               </a:rPr>
-              <a:t>Photos and videos of drinks, food and the vibe</a:t>
-            </a:r>
-            <a:endParaRPr lang="en-US" sz="1200" dirty="0"/>
-          </a:p>
-        </p:txBody>
-      </p:sp>
-      <p:sp>
-        <p:nvSpPr>
-          <p:cNvPr id="16" name="Solution card 4"/>
+              <a:t>Attractive photos and videos of products</a:t>
+            </a:r>
+            <a:endParaRPr lang="en-US" sz="1300" dirty="0"/>
+          </a:p>
+        </p:txBody>
+      </p:sp>
+      <p:sp>
+        <p:nvSpPr>
+          <p:cNvPr id="16" name="Service card 4"/>
           <p:cNvSpPr/>
           <p:nvPr/>
         </p:nvSpPr>
@@ -5046,7 +5129,7 @@
       </p:sp>
       <p:pic>
         <p:nvPicPr>
-          <p:cNvPr id="17" name="Customer Engagement illustration" descr="Customer Engagement illustration">    </p:cNvPr>
+          <p:cNvPr id="17" name="Promotions illustration" descr="Promotions illustration">    </p:cNvPr>
           <p:cNvPicPr>
             <a:picLocks noChangeAspect="1"/>
           </p:cNvPicPr>
@@ -5070,7 +5153,7 @@
       </p:pic>
       <p:sp>
         <p:nvSpPr>
-          <p:cNvPr id="18" name="Solution title 4"/>
+          <p:cNvPr id="18" name="Service title 4"/>
           <p:cNvSpPr txBox="1"/>
           <p:nvPr/>
         </p:nvSpPr>
@@ -5098,7 +5181,7 @@
                   <a:schemeClr val="tx2"/>
                 </a:solidFill>
               </a:rPr>
-              <a:t>Customer Engagement</a:t>
+              <a:t>Promotions</a:t>
             </a:r>
             <a:endParaRPr lang="en-US" sz="1500" dirty="0"/>
           </a:p>
@@ -5106,7 +5189,7 @@
       </p:sp>
       <p:sp>
         <p:nvSpPr>
-          <p:cNvPr id="19" name="Solution text 4"/>
+          <p:cNvPr id="19" name="Service text 4"/>
           <p:cNvSpPr txBox="1"/>
           <p:nvPr/>
         </p:nvSpPr>
@@ -5129,14 +5212,14 @@
               <a:buNone/>
             </a:pPr>
             <a:r>
-              <a:rPr lang="en-US" sz="1200" dirty="0">
+              <a:rPr lang="en-US" sz="1300" dirty="0">
                 <a:solidFill>
                   <a:schemeClr val="tx1"/>
                 </a:solidFill>
               </a:rPr>
-              <a:t>Replies, offers and loyalty rewards</a:t>
-            </a:r>
-            <a:endParaRPr lang="en-US" sz="1200" dirty="0"/>
+              <a:t>Discounts and special deals</a:t>
+            </a:r>
+            <a:endParaRPr lang="en-US" sz="1300" dirty="0"/>
           </a:p>
         </p:txBody>
       </p:sp>
@@ -5283,7 +5366,7 @@
                 <a:ea typeface="Cambria" pitchFamily="34" charset="-122"/>
                 <a:cs typeface="Cambria" pitchFamily="34" charset="-120"/>
               </a:rPr>
-              <a:t>How We'll Do It: 5 Steps</a:t>
+              <a:t>Five Simple Steps</a:t>
             </a:r>
             <a:endParaRPr lang="en-US" sz="3200" dirty="0"/>
           </a:p>
@@ -5478,20 +5561,20 @@
               <a:buNone/>
             </a:pPr>
             <a:r>
-              <a:rPr lang="en-US" sz="1200" dirty="0">
+              <a:rPr lang="en-US" sz="1300" dirty="0">
                 <a:solidFill>
                   <a:schemeClr val="tx1"/>
                 </a:solidFill>
               </a:rPr>
-              <a:t>Audience and competitors</a:t>
-            </a:r>
-            <a:endParaRPr lang="en-US" sz="1200" dirty="0"/>
-          </a:p>
-        </p:txBody>
-      </p:sp>
-      <p:sp>
-        <p:nvSpPr>
-          <p:cNvPr id="11" name="Planning circle"/>
+              <a:t>Market and competitors</a:t>
+            </a:r>
+            <a:endParaRPr lang="en-US" sz="1300" dirty="0"/>
+          </a:p>
+        </p:txBody>
+      </p:sp>
+      <p:sp>
+        <p:nvSpPr>
+          <p:cNvPr id="11" name="Audience circle"/>
           <p:cNvSpPr/>
           <p:nvPr/>
         </p:nvSpPr>
@@ -5511,7 +5594,7 @@
       </p:sp>
       <p:pic>
         <p:nvPicPr>
-          <p:cNvPr id="12" name="Planning icon" descr="Planning">    </p:cNvPr>
+          <p:cNvPr id="12" name="Audience icon" descr="Audience">    </p:cNvPr>
           <p:cNvPicPr>
             <a:picLocks noChangeAspect="1"/>
           </p:cNvPicPr>
@@ -5624,7 +5707,7 @@
                   <a:schemeClr val="tx2"/>
                 </a:solidFill>
               </a:rPr>
-              <a:t>Planning</a:t>
+              <a:t>Audience</a:t>
             </a:r>
             <a:endParaRPr lang="en-US" sz="1600" dirty="0"/>
           </a:p>
@@ -5655,20 +5738,20 @@
               <a:buNone/>
             </a:pPr>
             <a:r>
-              <a:rPr lang="en-US" sz="1200" dirty="0">
+              <a:rPr lang="en-US" sz="1300" dirty="0">
                 <a:solidFill>
                   <a:schemeClr val="tx1"/>
                 </a:solidFill>
               </a:rPr>
-              <a:t>Content calendar and ad strategy</a:t>
-            </a:r>
-            <a:endParaRPr lang="en-US" sz="1200" dirty="0"/>
-          </a:p>
-        </p:txBody>
-      </p:sp>
-      <p:sp>
-        <p:nvSpPr>
-          <p:cNvPr id="17" name="Execution circle"/>
+              <a:t>Identify who to target</a:t>
+            </a:r>
+            <a:endParaRPr lang="en-US" sz="1300" dirty="0"/>
+          </a:p>
+        </p:txBody>
+      </p:sp>
+      <p:sp>
+        <p:nvSpPr>
+          <p:cNvPr id="17" name="Content Plan circle"/>
           <p:cNvSpPr/>
           <p:nvPr/>
         </p:nvSpPr>
@@ -5681,14 +5764,14 @@
             <a:avLst/>
           </a:prstGeom>
           <a:solidFill>
-            <a:schemeClr val="accent1"/>
+            <a:schemeClr val="tx2"/>
           </a:solidFill>
           <a:ln/>
         </p:spPr>
       </p:sp>
       <p:pic>
         <p:nvPicPr>
-          <p:cNvPr id="18" name="Execution icon" descr="Execution">    </p:cNvPr>
+          <p:cNvPr id="18" name="Content Plan icon" descr="Content Plan">    </p:cNvPr>
           <p:cNvPicPr>
             <a:picLocks noChangeAspect="1"/>
           </p:cNvPicPr>
@@ -5801,7 +5884,7 @@
                   <a:schemeClr val="tx2"/>
                 </a:solidFill>
               </a:rPr>
-              <a:t>Execution</a:t>
+              <a:t>Content Plan</a:t>
             </a:r>
             <a:endParaRPr lang="en-US" sz="1600" dirty="0"/>
           </a:p>
@@ -5832,20 +5915,20 @@
               <a:buNone/>
             </a:pPr>
             <a:r>
-              <a:rPr lang="en-US" sz="1200" dirty="0">
+              <a:rPr lang="en-US" sz="1300" dirty="0">
                 <a:solidFill>
                   <a:schemeClr val="tx1"/>
                 </a:solidFill>
               </a:rPr>
-              <a:t>Publish content, launch ads</a:t>
-            </a:r>
-            <a:endParaRPr lang="en-US" sz="1200" dirty="0"/>
-          </a:p>
-        </p:txBody>
-      </p:sp>
-      <p:sp>
-        <p:nvSpPr>
-          <p:cNvPr id="23" name="Monitoring circle"/>
+              <a:t>A plan for the month</a:t>
+            </a:r>
+            <a:endParaRPr lang="en-US" sz="1300" dirty="0"/>
+          </a:p>
+        </p:txBody>
+      </p:sp>
+      <p:sp>
+        <p:nvSpPr>
+          <p:cNvPr id="23" name="Launch circle"/>
           <p:cNvSpPr/>
           <p:nvPr/>
         </p:nvSpPr>
@@ -5858,14 +5941,14 @@
             <a:avLst/>
           </a:prstGeom>
           <a:solidFill>
-            <a:schemeClr val="tx2"/>
+            <a:schemeClr val="accent1"/>
           </a:solidFill>
           <a:ln/>
         </p:spPr>
       </p:sp>
       <p:pic>
         <p:nvPicPr>
-          <p:cNvPr id="24" name="Monitoring icon" descr="Monitoring">    </p:cNvPr>
+          <p:cNvPr id="24" name="Launch icon" descr="Launch">    </p:cNvPr>
           <p:cNvPicPr>
             <a:picLocks noChangeAspect="1"/>
           </p:cNvPicPr>
@@ -5978,7 +6061,7 @@
                   <a:schemeClr val="tx2"/>
                 </a:solidFill>
               </a:rPr>
-              <a:t>Monitoring</a:t>
+              <a:t>Launch</a:t>
             </a:r>
             <a:endParaRPr lang="en-US" sz="1600" dirty="0"/>
           </a:p>
@@ -6009,20 +6092,20 @@
               <a:buNone/>
             </a:pPr>
             <a:r>
-              <a:rPr lang="en-US" sz="1200" dirty="0">
+              <a:rPr lang="en-US" sz="1300" dirty="0">
                 <a:solidFill>
                   <a:schemeClr val="tx1"/>
                 </a:solidFill>
               </a:rPr>
-              <a:t>Track reach, leads and sales</a:t>
-            </a:r>
-            <a:endParaRPr lang="en-US" sz="1200" dirty="0"/>
-          </a:p>
-        </p:txBody>
-      </p:sp>
-      <p:sp>
-        <p:nvSpPr>
-          <p:cNvPr id="29" name="Optimization circle"/>
+              <a:t>Publish content and ads</a:t>
+            </a:r>
+            <a:endParaRPr lang="en-US" sz="1300" dirty="0"/>
+          </a:p>
+        </p:txBody>
+      </p:sp>
+      <p:sp>
+        <p:nvSpPr>
+          <p:cNvPr id="29" name="Measure circle"/>
           <p:cNvSpPr/>
           <p:nvPr/>
         </p:nvSpPr>
@@ -6035,14 +6118,14 @@
             <a:avLst/>
           </a:prstGeom>
           <a:solidFill>
-            <a:schemeClr val="tx2"/>
+            <a:schemeClr val="accent4"/>
           </a:solidFill>
           <a:ln/>
         </p:spPr>
       </p:sp>
       <p:pic>
         <p:nvPicPr>
-          <p:cNvPr id="30" name="Optimization icon" descr="Optimization">    </p:cNvPr>
+          <p:cNvPr id="30" name="Measure icon" descr="Measure">    </p:cNvPr>
           <p:cNvPicPr>
             <a:picLocks noChangeAspect="1"/>
           </p:cNvPicPr>
@@ -6155,7 +6238,7 @@
                   <a:schemeClr val="tx2"/>
                 </a:solidFill>
               </a:rPr>
-              <a:t>Optimization</a:t>
+              <a:t>Measure</a:t>
             </a:r>
             <a:endParaRPr lang="en-US" sz="1600" dirty="0"/>
           </a:p>
@@ -6186,14 +6269,14 @@
               <a:buNone/>
             </a:pPr>
             <a:r>
-              <a:rPr lang="en-US" sz="1200" dirty="0">
+              <a:rPr lang="en-US" sz="1300" dirty="0">
                 <a:solidFill>
                   <a:schemeClr val="tx1"/>
                 </a:solidFill>
               </a:rPr>
-              <a:t>Improve using the data</a:t>
-            </a:r>
-            <a:endParaRPr lang="en-US" sz="1200" dirty="0"/>
+              <a:t>Track results and improve</a:t>
+            </a:r>
+            <a:endParaRPr lang="en-US" sz="1300" dirty="0"/>
           </a:p>
         </p:txBody>
       </p:sp>
@@ -6273,7 +6356,7 @@
                   <a:schemeClr val="tx2"/>
                 </a:solidFill>
               </a:rPr>
-              <a:t>Steps 3 to 5 repeat every week to keep improving</a:t>
+              <a:t>What we learn in step 5 improves next month's plan</a:t>
             </a:r>
             <a:endParaRPr lang="en-US" sz="1400" dirty="0"/>
           </a:p>
@@ -6422,7 +6505,7 @@
                 <a:ea typeface="Cambria" pitchFamily="34" charset="-122"/>
                 <a:cs typeface="Cambria" pitchFamily="34" charset="-120"/>
               </a:rPr>
-              <a:t>Monthly Investment</a:t>
+              <a:t>Monthly Budget</a:t>
             </a:r>
             <a:endParaRPr lang="en-US" sz="3200" dirty="0"/>
           </a:p>
@@ -6561,8 +6644,8 @@
         </p:nvSpPr>
         <p:spPr>
           <a:xfrm>
-            <a:off x="7406640" y="1463040"/>
-            <a:ext cx="1280160" cy="475488"/>
+            <a:off x="7223760" y="1463040"/>
+            <a:ext cx="1463040" cy="475488"/>
           </a:xfrm>
           <a:prstGeom prst="rect">
             <a:avLst/>
@@ -6583,7 +6666,7 @@
                   <a:schemeClr val="tx2"/>
                 </a:solidFill>
               </a:rPr>
-              <a:t>5,000</a:t>
+              <a:t>5,000 EGP</a:t>
             </a:r>
             <a:endParaRPr lang="en-US" sz="1500" dirty="0"/>
           </a:p>
@@ -6639,7 +6722,7 @@
                   <a:schemeClr val="tx1"/>
                 </a:solidFill>
               </a:rPr>
-              <a:t>Paid advertising budget</a:t>
+              <a:t>Paid advertising</a:t>
             </a:r>
             <a:endParaRPr lang="en-US" sz="1500" dirty="0"/>
           </a:p>
@@ -6653,8 +6736,8 @@
         </p:nvSpPr>
         <p:spPr>
           <a:xfrm>
-            <a:off x="7406640" y="2029968"/>
-            <a:ext cx="1280160" cy="475488"/>
+            <a:off x="7223760" y="2029968"/>
+            <a:ext cx="1463040" cy="475488"/>
           </a:xfrm>
           <a:prstGeom prst="rect">
             <a:avLst/>
@@ -6675,7 +6758,7 @@
                   <a:schemeClr val="tx2"/>
                 </a:solidFill>
               </a:rPr>
-              <a:t>4,000</a:t>
+              <a:t>4,000 EGP</a:t>
             </a:r>
             <a:endParaRPr lang="en-US" sz="1500" dirty="0"/>
           </a:p>
@@ -6696,7 +6779,7 @@
             <a:avLst/>
           </a:prstGeom>
           <a:solidFill>
-            <a:srgbClr val="6F4E37"/>
+            <a:srgbClr val="5B7F5E"/>
           </a:solidFill>
           <a:ln/>
         </p:spPr>
@@ -6745,8 +6828,8 @@
         </p:nvSpPr>
         <p:spPr>
           <a:xfrm>
-            <a:off x="7406640" y="2596896"/>
-            <a:ext cx="1280160" cy="475488"/>
+            <a:off x="7223760" y="2596896"/>
+            <a:ext cx="1463040" cy="475488"/>
           </a:xfrm>
           <a:prstGeom prst="rect">
             <a:avLst/>
@@ -6767,7 +6850,7 @@
                   <a:schemeClr val="tx2"/>
                 </a:solidFill>
               </a:rPr>
-              <a:t>3,000</a:t>
+              <a:t>3,000 EGP</a:t>
             </a:r>
             <a:endParaRPr lang="en-US" sz="1500" dirty="0"/>
           </a:p>
@@ -6837,8 +6920,8 @@
         </p:nvSpPr>
         <p:spPr>
           <a:xfrm>
-            <a:off x="7406640" y="3163824"/>
-            <a:ext cx="1280160" cy="475488"/>
+            <a:off x="7223760" y="3163824"/>
+            <a:ext cx="1463040" cy="475488"/>
           </a:xfrm>
           <a:prstGeom prst="rect">
             <a:avLst/>
@@ -6859,7 +6942,7 @@
                   <a:schemeClr val="tx2"/>
                 </a:solidFill>
               </a:rPr>
-              <a:t>1,000</a:t>
+              <a:t>1,000 EGP</a:t>
             </a:r>
             <a:endParaRPr lang="en-US" sz="1500" dirty="0"/>
           </a:p>
@@ -6917,7 +7000,7 @@
                   <a:schemeClr val="bg1"/>
                 </a:solidFill>
               </a:rPr>
-              <a:t>Total per month</a:t>
+              <a:t>Total</a:t>
             </a:r>
             <a:endParaRPr lang="en-US" sz="1500" dirty="0"/>
           </a:p>
@@ -6968,7 +7051,7 @@
         <p:spPr>
           <a:xfrm>
             <a:off x="4389120" y="4343400"/>
-            <a:ext cx="4297680" cy="365760"/>
+            <a:ext cx="4297680" cy="274320"/>
           </a:xfrm>
           <a:prstGeom prst="rect">
             <a:avLst/>
@@ -6989,7 +7072,7 @@
                   <a:schemeClr val="accent5"/>
                 </a:solidFill>
               </a:rPr>
-              <a:t>Illustrative one-month budget. The final quote will confirm taxes, photography and other production costs.</a:t>
+              <a:t>This is a proposed budget for the presentation.</a:t>
             </a:r>
             <a:endParaRPr lang="en-US" sz="1000" dirty="0"/>
           </a:p>
@@ -7138,7 +7221,7 @@
                 <a:ea typeface="Cambria" pitchFamily="34" charset="-122"/>
                 <a:cs typeface="Cambria" pitchFamily="34" charset="-120"/>
               </a:rPr>
-              <a:t>The First Month, Week by Week</a:t>
+              <a:t>The First Month</a:t>
             </a:r>
             <a:endParaRPr lang="en-US" sz="3200" dirty="0"/>
           </a:p>
@@ -7184,7 +7267,7 @@
             </a:avLst>
           </a:prstGeom>
           <a:solidFill>
-            <a:schemeClr val="accent1"/>
+            <a:schemeClr val="accent4"/>
           </a:solidFill>
           <a:ln/>
         </p:spPr>
@@ -7227,7 +7310,7 @@
       </p:sp>
       <p:sp>
         <p:nvSpPr>
-          <p:cNvPr id="7" name="Research and Planning circle"/>
+          <p:cNvPr id="7" name="Research and planning circle"/>
           <p:cNvSpPr/>
           <p:nvPr/>
         </p:nvSpPr>
@@ -7247,7 +7330,7 @@
       </p:sp>
       <p:pic>
         <p:nvPicPr>
-          <p:cNvPr id="8" name="Research and Planning icon" descr="Research and Planning">    </p:cNvPr>
+          <p:cNvPr id="8" name="Research and planning icon" descr="Research and planning">    </p:cNvPr>
           <p:cNvPicPr>
             <a:picLocks noChangeAspect="1"/>
           </p:cNvPicPr>
@@ -7271,101 +7354,7 @@
       </p:pic>
       <p:sp>
         <p:nvSpPr>
-          <p:cNvPr id="9" name="Week card 1"/>
-          <p:cNvSpPr/>
-          <p:nvPr/>
-        </p:nvSpPr>
-        <p:spPr>
-          <a:xfrm>
-            <a:off x="571500" y="2743200"/>
-            <a:ext cx="1828800" cy="1737360"/>
-          </a:xfrm>
-          <a:prstGeom prst="roundRect">
-            <a:avLst>
-              <a:gd name="adj" fmla="val 6316"/>
-            </a:avLst>
-          </a:prstGeom>
-          <a:solidFill>
-            <a:schemeClr val="bg2"/>
-          </a:solidFill>
-          <a:ln/>
-        </p:spPr>
-      </p:sp>
-      <p:sp>
-        <p:nvSpPr>
-          <p:cNvPr id="10" name="Week title 1"/>
-          <p:cNvSpPr txBox="1"/>
-          <p:nvPr/>
-        </p:nvSpPr>
-        <p:spPr>
-          <a:xfrm>
-            <a:off x="708660" y="2880360"/>
-            <a:ext cx="1554480" cy="548640"/>
-          </a:xfrm>
-          <a:prstGeom prst="rect">
-            <a:avLst/>
-          </a:prstGeom>
-          <a:noFill/>
-          <a:ln/>
-        </p:spPr>
-        <p:txBody>
-          <a:bodyPr wrap="square" lIns="0" tIns="0" rIns="0" bIns="0" rtlCol="0" anchor="t"/>
-          <a:lstStyle/>
-          <a:p>
-            <a:pPr indent="0" marL="0">
-              <a:buNone/>
-            </a:pPr>
-            <a:r>
-              <a:rPr lang="en-US" sz="1500" b="1" dirty="0">
-                <a:solidFill>
-                  <a:schemeClr val="tx2"/>
-                </a:solidFill>
-              </a:rPr>
-              <a:t>Research and Planning</a:t>
-            </a:r>
-            <a:endParaRPr lang="en-US" sz="1500" dirty="0"/>
-          </a:p>
-        </p:txBody>
-      </p:sp>
-      <p:sp>
-        <p:nvSpPr>
-          <p:cNvPr id="11" name="Week text 1"/>
-          <p:cNvSpPr txBox="1"/>
-          <p:nvPr/>
-        </p:nvSpPr>
-        <p:spPr>
-          <a:xfrm>
-            <a:off x="708660" y="3474720"/>
-            <a:ext cx="1554480" cy="914400"/>
-          </a:xfrm>
-          <a:prstGeom prst="rect">
-            <a:avLst/>
-          </a:prstGeom>
-          <a:noFill/>
-          <a:ln/>
-        </p:spPr>
-        <p:txBody>
-          <a:bodyPr wrap="square" lIns="0" tIns="0" rIns="0" bIns="0" rtlCol="0" anchor="t"/>
-          <a:lstStyle/>
-          <a:p>
-            <a:pPr indent="0" marL="0">
-              <a:buNone/>
-            </a:pPr>
-            <a:r>
-              <a:rPr lang="en-US" sz="1200" dirty="0">
-                <a:solidFill>
-                  <a:schemeClr val="tx1"/>
-                </a:solidFill>
-              </a:rPr>
-              <a:t>Study the market, competitors and audience</a:t>
-            </a:r>
-            <a:endParaRPr lang="en-US" sz="1200" dirty="0"/>
-          </a:p>
-        </p:txBody>
-      </p:sp>
-      <p:sp>
-        <p:nvSpPr>
-          <p:cNvPr id="12" name="Week pill 2"/>
+          <p:cNvPr id="9" name="Week pill 2"/>
           <p:cNvSpPr/>
           <p:nvPr/>
         </p:nvSpPr>
@@ -7380,14 +7369,14 @@
             </a:avLst>
           </a:prstGeom>
           <a:solidFill>
-            <a:schemeClr val="accent1"/>
+            <a:schemeClr val="accent4"/>
           </a:solidFill>
           <a:ln/>
         </p:spPr>
       </p:sp>
       <p:sp>
         <p:nvSpPr>
-          <p:cNvPr id="13" name="Week label 2"/>
+          <p:cNvPr id="10" name="Week label 2"/>
           <p:cNvSpPr txBox="1"/>
           <p:nvPr/>
         </p:nvSpPr>
@@ -7423,7 +7412,7 @@
       </p:sp>
       <p:sp>
         <p:nvSpPr>
-          <p:cNvPr id="14" name="Content Creation circle"/>
+          <p:cNvPr id="11" name="Content creation circle"/>
           <p:cNvSpPr/>
           <p:nvPr/>
         </p:nvSpPr>
@@ -7443,7 +7432,7 @@
       </p:sp>
       <p:pic>
         <p:nvPicPr>
-          <p:cNvPr id="15" name="Content Creation icon" descr="Content Creation">    </p:cNvPr>
+          <p:cNvPr id="12" name="Content creation icon" descr="Content creation">    </p:cNvPr>
           <p:cNvPicPr>
             <a:picLocks noChangeAspect="1"/>
           </p:cNvPicPr>
@@ -7467,101 +7456,7 @@
       </p:pic>
       <p:sp>
         <p:nvSpPr>
-          <p:cNvPr id="16" name="Week card 2"/>
-          <p:cNvSpPr/>
-          <p:nvPr/>
-        </p:nvSpPr>
-        <p:spPr>
-          <a:xfrm>
-            <a:off x="2628900" y="2743200"/>
-            <a:ext cx="1828800" cy="1737360"/>
-          </a:xfrm>
-          <a:prstGeom prst="roundRect">
-            <a:avLst>
-              <a:gd name="adj" fmla="val 6316"/>
-            </a:avLst>
-          </a:prstGeom>
-          <a:solidFill>
-            <a:schemeClr val="bg2"/>
-          </a:solidFill>
-          <a:ln/>
-        </p:spPr>
-      </p:sp>
-      <p:sp>
-        <p:nvSpPr>
-          <p:cNvPr id="17" name="Week title 2"/>
-          <p:cNvSpPr txBox="1"/>
-          <p:nvPr/>
-        </p:nvSpPr>
-        <p:spPr>
-          <a:xfrm>
-            <a:off x="2766060" y="2880360"/>
-            <a:ext cx="1554480" cy="548640"/>
-          </a:xfrm>
-          <a:prstGeom prst="rect">
-            <a:avLst/>
-          </a:prstGeom>
-          <a:noFill/>
-          <a:ln/>
-        </p:spPr>
-        <p:txBody>
-          <a:bodyPr wrap="square" lIns="0" tIns="0" rIns="0" bIns="0" rtlCol="0" anchor="t"/>
-          <a:lstStyle/>
-          <a:p>
-            <a:pPr indent="0" marL="0">
-              <a:buNone/>
-            </a:pPr>
-            <a:r>
-              <a:rPr lang="en-US" sz="1500" b="1" dirty="0">
-                <a:solidFill>
-                  <a:schemeClr val="tx2"/>
-                </a:solidFill>
-              </a:rPr>
-              <a:t>Content Creation</a:t>
-            </a:r>
-            <a:endParaRPr lang="en-US" sz="1500" dirty="0"/>
-          </a:p>
-        </p:txBody>
-      </p:sp>
-      <p:sp>
-        <p:nvSpPr>
-          <p:cNvPr id="18" name="Week text 2"/>
-          <p:cNvSpPr txBox="1"/>
-          <p:nvPr/>
-        </p:nvSpPr>
-        <p:spPr>
-          <a:xfrm>
-            <a:off x="2766060" y="3474720"/>
-            <a:ext cx="1554480" cy="914400"/>
-          </a:xfrm>
-          <a:prstGeom prst="rect">
-            <a:avLst/>
-          </a:prstGeom>
-          <a:noFill/>
-          <a:ln/>
-        </p:spPr>
-        <p:txBody>
-          <a:bodyPr wrap="square" lIns="0" tIns="0" rIns="0" bIns="0" rtlCol="0" anchor="t"/>
-          <a:lstStyle/>
-          <a:p>
-            <a:pPr indent="0" marL="0">
-              <a:buNone/>
-            </a:pPr>
-            <a:r>
-              <a:rPr lang="en-US" sz="1200" dirty="0">
-                <a:solidFill>
-                  <a:schemeClr val="tx1"/>
-                </a:solidFill>
-              </a:rPr>
-              <a:t>Prepare posts, videos and ad designs</a:t>
-            </a:r>
-            <a:endParaRPr lang="en-US" sz="1200" dirty="0"/>
-          </a:p>
-        </p:txBody>
-      </p:sp>
-      <p:sp>
-        <p:nvSpPr>
-          <p:cNvPr id="19" name="Week pill 3"/>
+          <p:cNvPr id="13" name="Week pill 3"/>
           <p:cNvSpPr/>
           <p:nvPr/>
         </p:nvSpPr>
@@ -7576,70 +7471,70 @@
             </a:avLst>
           </a:prstGeom>
           <a:solidFill>
+            <a:schemeClr val="accent4"/>
+          </a:solidFill>
+          <a:ln/>
+        </p:spPr>
+      </p:sp>
+      <p:sp>
+        <p:nvSpPr>
+          <p:cNvPr id="14" name="Week label 3"/>
+          <p:cNvSpPr txBox="1"/>
+          <p:nvPr/>
+        </p:nvSpPr>
+        <p:spPr>
+          <a:xfrm>
+            <a:off x="5097780" y="1298448"/>
+            <a:ext cx="1005840" cy="310896"/>
+          </a:xfrm>
+          <a:prstGeom prst="rect">
+            <a:avLst/>
+          </a:prstGeom>
+          <a:noFill/>
+          <a:ln/>
+        </p:spPr>
+        <p:txBody>
+          <a:bodyPr wrap="square" lIns="0" tIns="0" rIns="0" bIns="0" rtlCol="0" anchor="ctr"/>
+          <a:lstStyle/>
+          <a:p>
+            <a:pPr algn="ctr" indent="0" marL="0">
+              <a:buNone/>
+            </a:pPr>
+            <a:r>
+              <a:rPr lang="en-US" sz="1100" b="1" spc="100" kern="0" dirty="0">
+                <a:solidFill>
+                  <a:schemeClr val="bg1"/>
+                </a:solidFill>
+              </a:rPr>
+              <a:t>WEEK 3</a:t>
+            </a:r>
+            <a:endParaRPr lang="en-US" sz="1100" dirty="0"/>
+          </a:p>
+        </p:txBody>
+      </p:sp>
+      <p:sp>
+        <p:nvSpPr>
+          <p:cNvPr id="15" name="Launch marketing campaigns circle"/>
+          <p:cNvSpPr/>
+          <p:nvPr/>
+        </p:nvSpPr>
+        <p:spPr>
+          <a:xfrm>
+            <a:off x="5216652" y="1719072"/>
+            <a:ext cx="768096" cy="768096"/>
+          </a:xfrm>
+          <a:prstGeom prst="ellipse">
+            <a:avLst/>
+          </a:prstGeom>
+          <a:solidFill>
             <a:schemeClr val="accent1"/>
           </a:solidFill>
           <a:ln/>
         </p:spPr>
       </p:sp>
-      <p:sp>
-        <p:nvSpPr>
-          <p:cNvPr id="20" name="Week label 3"/>
-          <p:cNvSpPr txBox="1"/>
-          <p:nvPr/>
-        </p:nvSpPr>
-        <p:spPr>
-          <a:xfrm>
-            <a:off x="5097780" y="1298448"/>
-            <a:ext cx="1005840" cy="310896"/>
-          </a:xfrm>
-          <a:prstGeom prst="rect">
-            <a:avLst/>
-          </a:prstGeom>
-          <a:noFill/>
-          <a:ln/>
-        </p:spPr>
-        <p:txBody>
-          <a:bodyPr wrap="square" lIns="0" tIns="0" rIns="0" bIns="0" rtlCol="0" anchor="ctr"/>
-          <a:lstStyle/>
-          <a:p>
-            <a:pPr algn="ctr" indent="0" marL="0">
-              <a:buNone/>
-            </a:pPr>
-            <a:r>
-              <a:rPr lang="en-US" sz="1100" b="1" spc="100" kern="0" dirty="0">
-                <a:solidFill>
-                  <a:schemeClr val="bg1"/>
-                </a:solidFill>
-              </a:rPr>
-              <a:t>WEEK 3</a:t>
-            </a:r>
-            <a:endParaRPr lang="en-US" sz="1100" dirty="0"/>
-          </a:p>
-        </p:txBody>
-      </p:sp>
-      <p:sp>
-        <p:nvSpPr>
-          <p:cNvPr id="21" name="Campaign Launch circle"/>
-          <p:cNvSpPr/>
-          <p:nvPr/>
-        </p:nvSpPr>
-        <p:spPr>
-          <a:xfrm>
-            <a:off x="5216652" y="1719072"/>
-            <a:ext cx="768096" cy="768096"/>
-          </a:xfrm>
-          <a:prstGeom prst="ellipse">
-            <a:avLst/>
-          </a:prstGeom>
-          <a:solidFill>
-            <a:schemeClr val="tx2"/>
-          </a:solidFill>
-          <a:ln/>
-        </p:spPr>
-      </p:sp>
       <p:pic>
         <p:nvPicPr>
-          <p:cNvPr id="22" name="Campaign Launch icon" descr="Campaign Launch">    </p:cNvPr>
+          <p:cNvPr id="16" name="Launch marketing campaigns icon" descr="Launch marketing campaigns">    </p:cNvPr>
           <p:cNvPicPr>
             <a:picLocks noChangeAspect="1"/>
           </p:cNvPicPr>
@@ -7663,101 +7558,7 @@
       </p:pic>
       <p:sp>
         <p:nvSpPr>
-          <p:cNvPr id="23" name="Week card 3"/>
-          <p:cNvSpPr/>
-          <p:nvPr/>
-        </p:nvSpPr>
-        <p:spPr>
-          <a:xfrm>
-            <a:off x="4686300" y="2743200"/>
-            <a:ext cx="1828800" cy="1737360"/>
-          </a:xfrm>
-          <a:prstGeom prst="roundRect">
-            <a:avLst>
-              <a:gd name="adj" fmla="val 6316"/>
-            </a:avLst>
-          </a:prstGeom>
-          <a:solidFill>
-            <a:schemeClr val="bg2"/>
-          </a:solidFill>
-          <a:ln/>
-        </p:spPr>
-      </p:sp>
-      <p:sp>
-        <p:nvSpPr>
-          <p:cNvPr id="24" name="Week title 3"/>
-          <p:cNvSpPr txBox="1"/>
-          <p:nvPr/>
-        </p:nvSpPr>
-        <p:spPr>
-          <a:xfrm>
-            <a:off x="4823460" y="2880360"/>
-            <a:ext cx="1554480" cy="548640"/>
-          </a:xfrm>
-          <a:prstGeom prst="rect">
-            <a:avLst/>
-          </a:prstGeom>
-          <a:noFill/>
-          <a:ln/>
-        </p:spPr>
-        <p:txBody>
-          <a:bodyPr wrap="square" lIns="0" tIns="0" rIns="0" bIns="0" rtlCol="0" anchor="t"/>
-          <a:lstStyle/>
-          <a:p>
-            <a:pPr indent="0" marL="0">
-              <a:buNone/>
-            </a:pPr>
-            <a:r>
-              <a:rPr lang="en-US" sz="1500" b="1" dirty="0">
-                <a:solidFill>
-                  <a:schemeClr val="tx2"/>
-                </a:solidFill>
-              </a:rPr>
-              <a:t>Campaign Launch</a:t>
-            </a:r>
-            <a:endParaRPr lang="en-US" sz="1500" dirty="0"/>
-          </a:p>
-        </p:txBody>
-      </p:sp>
-      <p:sp>
-        <p:nvSpPr>
-          <p:cNvPr id="25" name="Week text 3"/>
-          <p:cNvSpPr txBox="1"/>
-          <p:nvPr/>
-        </p:nvSpPr>
-        <p:spPr>
-          <a:xfrm>
-            <a:off x="4823460" y="3474720"/>
-            <a:ext cx="1554480" cy="914400"/>
-          </a:xfrm>
-          <a:prstGeom prst="rect">
-            <a:avLst/>
-          </a:prstGeom>
-          <a:noFill/>
-          <a:ln/>
-        </p:spPr>
-        <p:txBody>
-          <a:bodyPr wrap="square" lIns="0" tIns="0" rIns="0" bIns="0" rtlCol="0" anchor="t"/>
-          <a:lstStyle/>
-          <a:p>
-            <a:pPr indent="0" marL="0">
-              <a:buNone/>
-            </a:pPr>
-            <a:r>
-              <a:rPr lang="en-US" sz="1200" dirty="0">
-                <a:solidFill>
-                  <a:schemeClr val="tx1"/>
-                </a:solidFill>
-              </a:rPr>
-              <a:t>Publish content and start paid ads</a:t>
-            </a:r>
-            <a:endParaRPr lang="en-US" sz="1200" dirty="0"/>
-          </a:p>
-        </p:txBody>
-      </p:sp>
-      <p:sp>
-        <p:nvSpPr>
-          <p:cNvPr id="26" name="Week pill 4"/>
+          <p:cNvPr id="17" name="Week pill 4"/>
           <p:cNvSpPr/>
           <p:nvPr/>
         </p:nvSpPr>
@@ -7772,14 +7573,14 @@
             </a:avLst>
           </a:prstGeom>
           <a:solidFill>
-            <a:schemeClr val="accent1"/>
+            <a:schemeClr val="accent4"/>
           </a:solidFill>
           <a:ln/>
         </p:spPr>
       </p:sp>
       <p:sp>
         <p:nvSpPr>
-          <p:cNvPr id="27" name="Week label 4"/>
+          <p:cNvPr id="18" name="Week label 4"/>
           <p:cNvSpPr txBox="1"/>
           <p:nvPr/>
         </p:nvSpPr>
@@ -7815,7 +7616,7 @@
       </p:sp>
       <p:sp>
         <p:nvSpPr>
-          <p:cNvPr id="28" name="Evaluate and Improve circle"/>
+          <p:cNvPr id="19" name="Measure results and improve circle"/>
           <p:cNvSpPr/>
           <p:nvPr/>
         </p:nvSpPr>
@@ -7835,7 +7636,7 @@
       </p:sp>
       <p:pic>
         <p:nvPicPr>
-          <p:cNvPr id="29" name="Evaluate and Improve icon" descr="Evaluate and Improve">    </p:cNvPr>
+          <p:cNvPr id="20" name="Measure results and improve icon" descr="Measure results and improve">    </p:cNvPr>
           <p:cNvPicPr>
             <a:picLocks noChangeAspect="1"/>
           </p:cNvPicPr>
@@ -7859,18 +7660,18 @@
       </p:pic>
       <p:sp>
         <p:nvSpPr>
-          <p:cNvPr id="30" name="Week card 4"/>
-          <p:cNvSpPr/>
-          <p:nvPr/>
-        </p:nvSpPr>
-        <p:spPr>
-          <a:xfrm>
-            <a:off x="6743700" y="2743200"/>
-            <a:ext cx="1828800" cy="1737360"/>
+          <p:cNvPr id="21" name="Week card 1"/>
+          <p:cNvSpPr/>
+          <p:nvPr/>
+        </p:nvSpPr>
+        <p:spPr>
+          <a:xfrm>
+            <a:off x="571500" y="2743200"/>
+            <a:ext cx="1828800" cy="1783080"/>
           </a:xfrm>
           <a:prstGeom prst="roundRect">
             <a:avLst>
-              <a:gd name="adj" fmla="val 6316"/>
+              <a:gd name="adj" fmla="val 6154"/>
             </a:avLst>
           </a:prstGeom>
           <a:solidFill>
@@ -7879,15 +7680,39 @@
           <a:ln/>
         </p:spPr>
       </p:sp>
-      <p:sp>
-        <p:nvSpPr>
-          <p:cNvPr id="31" name="Week title 4"/>
+      <p:pic>
+        <p:nvPicPr>
+          <p:cNvPr id="22" name="Research and planning illustration" descr="Research and planning illustration">    </p:cNvPr>
+          <p:cNvPicPr>
+            <a:picLocks noChangeAspect="1"/>
+          </p:cNvPicPr>
+          <p:nvPr/>
+        </p:nvPicPr>
+        <p:blipFill>
+          <a:blip r:embed="rId5"/>
+          <a:stretch>
+            <a:fillRect/>
+          </a:stretch>
+        </p:blipFill>
+        <p:spPr>
+          <a:xfrm>
+            <a:off x="662940" y="2834640"/>
+            <a:ext cx="1645920" cy="960120"/>
+          </a:xfrm>
+          <a:prstGeom prst="rect">
+            <a:avLst/>
+          </a:prstGeom>
+        </p:spPr>
+      </p:pic>
+      <p:sp>
+        <p:nvSpPr>
+          <p:cNvPr id="23" name="Week title 1"/>
           <p:cNvSpPr txBox="1"/>
           <p:nvPr/>
         </p:nvSpPr>
         <p:spPr>
           <a:xfrm>
-            <a:off x="6880860" y="2880360"/>
+            <a:off x="708660" y="3886200"/>
             <a:ext cx="1554480" cy="548640"/>
           </a:xfrm>
           <a:prstGeom prst="rect">
@@ -7904,27 +7729,73 @@
               <a:buNone/>
             </a:pPr>
             <a:r>
-              <a:rPr lang="en-US" sz="1500" b="1" dirty="0">
+              <a:rPr lang="en-US" sz="1400" b="1" dirty="0">
                 <a:solidFill>
                   <a:schemeClr val="tx2"/>
                 </a:solidFill>
               </a:rPr>
-              <a:t>Evaluate and Improve</a:t>
-            </a:r>
-            <a:endParaRPr lang="en-US" sz="1500" dirty="0"/>
-          </a:p>
-        </p:txBody>
-      </p:sp>
-      <p:sp>
-        <p:nvSpPr>
-          <p:cNvPr id="32" name="Week text 4"/>
+              <a:t>Research and planning</a:t>
+            </a:r>
+            <a:endParaRPr lang="en-US" sz="1400" dirty="0"/>
+          </a:p>
+        </p:txBody>
+      </p:sp>
+      <p:sp>
+        <p:nvSpPr>
+          <p:cNvPr id="24" name="Week card 2"/>
+          <p:cNvSpPr/>
+          <p:nvPr/>
+        </p:nvSpPr>
+        <p:spPr>
+          <a:xfrm>
+            <a:off x="2628900" y="2743200"/>
+            <a:ext cx="1828800" cy="1783080"/>
+          </a:xfrm>
+          <a:prstGeom prst="roundRect">
+            <a:avLst>
+              <a:gd name="adj" fmla="val 6154"/>
+            </a:avLst>
+          </a:prstGeom>
+          <a:solidFill>
+            <a:schemeClr val="bg2"/>
+          </a:solidFill>
+          <a:ln/>
+        </p:spPr>
+      </p:sp>
+      <p:pic>
+        <p:nvPicPr>
+          <p:cNvPr id="25" name="Content creation illustration" descr="Content creation illustration">    </p:cNvPr>
+          <p:cNvPicPr>
+            <a:picLocks noChangeAspect="1"/>
+          </p:cNvPicPr>
+          <p:nvPr/>
+        </p:nvPicPr>
+        <p:blipFill>
+          <a:blip r:embed="rId6"/>
+          <a:stretch>
+            <a:fillRect/>
+          </a:stretch>
+        </p:blipFill>
+        <p:spPr>
+          <a:xfrm>
+            <a:off x="2720340" y="2834640"/>
+            <a:ext cx="1645920" cy="960120"/>
+          </a:xfrm>
+          <a:prstGeom prst="rect">
+            <a:avLst/>
+          </a:prstGeom>
+        </p:spPr>
+      </p:pic>
+      <p:sp>
+        <p:nvSpPr>
+          <p:cNvPr id="26" name="Week title 2"/>
           <p:cNvSpPr txBox="1"/>
           <p:nvPr/>
         </p:nvSpPr>
         <p:spPr>
           <a:xfrm>
-            <a:off x="6880860" y="3474720"/>
-            <a:ext cx="1554480" cy="914400"/>
+            <a:off x="2766060" y="3886200"/>
+            <a:ext cx="1554480" cy="548640"/>
           </a:xfrm>
           <a:prstGeom prst="rect">
             <a:avLst/>
@@ -7940,14 +7811,178 @@
               <a:buNone/>
             </a:pPr>
             <a:r>
-              <a:rPr lang="en-US" sz="1200" dirty="0">
-                <a:solidFill>
-                  <a:schemeClr val="tx1"/>
-                </a:solidFill>
-              </a:rPr>
-              <a:t>Analyze results and recommend next steps</a:t>
-            </a:r>
-            <a:endParaRPr lang="en-US" sz="1200" dirty="0"/>
+              <a:rPr lang="en-US" sz="1400" b="1" dirty="0">
+                <a:solidFill>
+                  <a:schemeClr val="tx2"/>
+                </a:solidFill>
+              </a:rPr>
+              <a:t>Content creation</a:t>
+            </a:r>
+            <a:endParaRPr lang="en-US" sz="1400" dirty="0"/>
+          </a:p>
+        </p:txBody>
+      </p:sp>
+      <p:sp>
+        <p:nvSpPr>
+          <p:cNvPr id="27" name="Week card 3"/>
+          <p:cNvSpPr/>
+          <p:nvPr/>
+        </p:nvSpPr>
+        <p:spPr>
+          <a:xfrm>
+            <a:off x="4686300" y="2743200"/>
+            <a:ext cx="1828800" cy="1783080"/>
+          </a:xfrm>
+          <a:prstGeom prst="roundRect">
+            <a:avLst>
+              <a:gd name="adj" fmla="val 6154"/>
+            </a:avLst>
+          </a:prstGeom>
+          <a:solidFill>
+            <a:schemeClr val="bg2"/>
+          </a:solidFill>
+          <a:ln/>
+        </p:spPr>
+      </p:sp>
+      <p:pic>
+        <p:nvPicPr>
+          <p:cNvPr id="28" name="Launch marketing campaigns illustration" descr="Launch marketing campaigns illustration">    </p:cNvPr>
+          <p:cNvPicPr>
+            <a:picLocks noChangeAspect="1"/>
+          </p:cNvPicPr>
+          <p:nvPr/>
+        </p:nvPicPr>
+        <p:blipFill>
+          <a:blip r:embed="rId7"/>
+          <a:stretch>
+            <a:fillRect/>
+          </a:stretch>
+        </p:blipFill>
+        <p:spPr>
+          <a:xfrm>
+            <a:off x="4777740" y="2834640"/>
+            <a:ext cx="1645920" cy="960120"/>
+          </a:xfrm>
+          <a:prstGeom prst="rect">
+            <a:avLst/>
+          </a:prstGeom>
+        </p:spPr>
+      </p:pic>
+      <p:sp>
+        <p:nvSpPr>
+          <p:cNvPr id="29" name="Week title 3"/>
+          <p:cNvSpPr txBox="1"/>
+          <p:nvPr/>
+        </p:nvSpPr>
+        <p:spPr>
+          <a:xfrm>
+            <a:off x="4823460" y="3886200"/>
+            <a:ext cx="1554480" cy="548640"/>
+          </a:xfrm>
+          <a:prstGeom prst="rect">
+            <a:avLst/>
+          </a:prstGeom>
+          <a:noFill/>
+          <a:ln/>
+        </p:spPr>
+        <p:txBody>
+          <a:bodyPr wrap="square" lIns="0" tIns="0" rIns="0" bIns="0" rtlCol="0" anchor="t"/>
+          <a:lstStyle/>
+          <a:p>
+            <a:pPr indent="0" marL="0">
+              <a:buNone/>
+            </a:pPr>
+            <a:r>
+              <a:rPr lang="en-US" sz="1400" b="1" dirty="0">
+                <a:solidFill>
+                  <a:schemeClr val="tx2"/>
+                </a:solidFill>
+              </a:rPr>
+              <a:t>Launch marketing campaigns</a:t>
+            </a:r>
+            <a:endParaRPr lang="en-US" sz="1400" dirty="0"/>
+          </a:p>
+        </p:txBody>
+      </p:sp>
+      <p:sp>
+        <p:nvSpPr>
+          <p:cNvPr id="30" name="Week card 4"/>
+          <p:cNvSpPr/>
+          <p:nvPr/>
+        </p:nvSpPr>
+        <p:spPr>
+          <a:xfrm>
+            <a:off x="6743700" y="2743200"/>
+            <a:ext cx="1828800" cy="1783080"/>
+          </a:xfrm>
+          <a:prstGeom prst="roundRect">
+            <a:avLst>
+              <a:gd name="adj" fmla="val 6154"/>
+            </a:avLst>
+          </a:prstGeom>
+          <a:solidFill>
+            <a:schemeClr val="bg2"/>
+          </a:solidFill>
+          <a:ln/>
+        </p:spPr>
+      </p:sp>
+      <p:pic>
+        <p:nvPicPr>
+          <p:cNvPr id="31" name="Measure results and improve illustration" descr="Measure results and improve illustration">    </p:cNvPr>
+          <p:cNvPicPr>
+            <a:picLocks noChangeAspect="1"/>
+          </p:cNvPicPr>
+          <p:nvPr/>
+        </p:nvPicPr>
+        <p:blipFill>
+          <a:blip r:embed="rId8"/>
+          <a:stretch>
+            <a:fillRect/>
+          </a:stretch>
+        </p:blipFill>
+        <p:spPr>
+          <a:xfrm>
+            <a:off x="6835140" y="2834640"/>
+            <a:ext cx="1645920" cy="960120"/>
+          </a:xfrm>
+          <a:prstGeom prst="rect">
+            <a:avLst/>
+          </a:prstGeom>
+        </p:spPr>
+      </p:pic>
+      <p:sp>
+        <p:nvSpPr>
+          <p:cNvPr id="32" name="Week title 4"/>
+          <p:cNvSpPr txBox="1"/>
+          <p:nvPr/>
+        </p:nvSpPr>
+        <p:spPr>
+          <a:xfrm>
+            <a:off x="6880860" y="3886200"/>
+            <a:ext cx="1554480" cy="548640"/>
+          </a:xfrm>
+          <a:prstGeom prst="rect">
+            <a:avLst/>
+          </a:prstGeom>
+          <a:noFill/>
+          <a:ln/>
+        </p:spPr>
+        <p:txBody>
+          <a:bodyPr wrap="square" lIns="0" tIns="0" rIns="0" bIns="0" rtlCol="0" anchor="t"/>
+          <a:lstStyle/>
+          <a:p>
+            <a:pPr indent="0" marL="0">
+              <a:buNone/>
+            </a:pPr>
+            <a:r>
+              <a:rPr lang="en-US" sz="1400" b="1" dirty="0">
+                <a:solidFill>
+                  <a:schemeClr val="tx2"/>
+                </a:solidFill>
+              </a:rPr>
+              <a:t>Measure results and improve</a:t>
+            </a:r>
+            <a:endParaRPr lang="en-US" sz="1400" dirty="0"/>
           </a:p>
         </p:txBody>
       </p:sp>
@@ -8094,7 +8129,7 @@
                 <a:ea typeface="Cambria" pitchFamily="34" charset="-122"/>
                 <a:cs typeface="Cambria" pitchFamily="34" charset="-120"/>
               </a:rPr>
-              <a:t>What the Café Gains</a:t>
+              <a:t>How the Café Benefits</a:t>
             </a:r>
             <a:endParaRPr lang="en-US" sz="3200" dirty="0"/>
           </a:p>
@@ -8126,7 +8161,7 @@
       </p:pic>
       <p:sp>
         <p:nvSpPr>
-          <p:cNvPr id="5" name="More awareness and online visibility circle"/>
+          <p:cNvPr id="5" name="Reach more people circle"/>
           <p:cNvSpPr/>
           <p:nvPr/>
         </p:nvSpPr>
@@ -8139,14 +8174,14 @@
             <a:avLst/>
           </a:prstGeom>
           <a:solidFill>
-            <a:schemeClr val="accent1"/>
+            <a:schemeClr val="accent4"/>
           </a:solidFill>
           <a:ln/>
         </p:spPr>
       </p:sp>
       <p:pic>
         <p:nvPicPr>
-          <p:cNvPr id="6" name="More awareness and online visibility icon" descr="More awareness and online visibility">    </p:cNvPr>
+          <p:cNvPr id="6" name="Reach more people icon" descr="Reach more people">    </p:cNvPr>
           <p:cNvPicPr>
             <a:picLocks noChangeAspect="1"/>
           </p:cNvPicPr>
@@ -8198,7 +8233,7 @@
                   <a:schemeClr val="tx2"/>
                 </a:solidFill>
               </a:rPr>
-              <a:t>More awareness and online visibility</a:t>
+              <a:t>Reach more people</a:t>
             </a:r>
             <a:endParaRPr lang="en-US" sz="1600" dirty="0"/>
           </a:p>
@@ -8206,7 +8241,7 @@
       </p:sp>
       <p:sp>
         <p:nvSpPr>
-          <p:cNvPr id="8" name="Reach more potential customers circle"/>
+          <p:cNvPr id="8" name="Attract new customers circle"/>
           <p:cNvSpPr/>
           <p:nvPr/>
         </p:nvSpPr>
@@ -8219,14 +8254,14 @@
             <a:avLst/>
           </a:prstGeom>
           <a:solidFill>
-            <a:schemeClr val="accent1"/>
+            <a:schemeClr val="accent4"/>
           </a:solidFill>
           <a:ln/>
         </p:spPr>
       </p:sp>
       <p:pic>
         <p:nvPicPr>
-          <p:cNvPr id="9" name="Reach more potential customers icon" descr="Reach more potential customers">    </p:cNvPr>
+          <p:cNvPr id="9" name="Attract new customers icon" descr="Attract new customers">    </p:cNvPr>
           <p:cNvPicPr>
             <a:picLocks noChangeAspect="1"/>
           </p:cNvPicPr>
@@ -8278,7 +8313,7 @@
                   <a:schemeClr val="tx2"/>
                 </a:solidFill>
               </a:rPr>
-              <a:t>Reach more potential customers</a:t>
+              <a:t>Attract new customers</a:t>
             </a:r>
             <a:endParaRPr lang="en-US" sz="1600" dirty="0"/>
           </a:p>
@@ -8286,7 +8321,7 @@
       </p:sp>
       <p:sp>
         <p:nvSpPr>
-          <p:cNvPr id="11" name="Stronger customer relationships circle"/>
+          <p:cNvPr id="11" name="Build a strong brand circle"/>
           <p:cNvSpPr/>
           <p:nvPr/>
         </p:nvSpPr>
@@ -8299,14 +8334,14 @@
             <a:avLst/>
           </a:prstGeom>
           <a:solidFill>
-            <a:schemeClr val="accent1"/>
+            <a:schemeClr val="accent4"/>
           </a:solidFill>
           <a:ln/>
         </p:spPr>
       </p:sp>
       <p:pic>
         <p:nvPicPr>
-          <p:cNvPr id="12" name="Stronger customer relationships icon" descr="Stronger customer relationships">    </p:cNvPr>
+          <p:cNvPr id="12" name="Build a strong brand icon" descr="Build a strong brand">    </p:cNvPr>
           <p:cNvPicPr>
             <a:picLocks noChangeAspect="1"/>
           </p:cNvPicPr>
@@ -8358,7 +8393,7 @@
                   <a:schemeClr val="tx2"/>
                 </a:solidFill>
               </a:rPr>
-              <a:t>Stronger customer relationships</a:t>
+              <a:t>Build a strong brand</a:t>
             </a:r>
             <a:endParaRPr lang="en-US" sz="1600" dirty="0"/>
           </a:p>
@@ -8366,7 +8401,7 @@
       </p:sp>
       <p:sp>
         <p:nvSpPr>
-          <p:cNvPr id="14" name="Promote new products and offers circle"/>
+          <p:cNvPr id="14" name="Improve customer engagement circle"/>
           <p:cNvSpPr/>
           <p:nvPr/>
         </p:nvSpPr>
@@ -8379,14 +8414,14 @@
             <a:avLst/>
           </a:prstGeom>
           <a:solidFill>
-            <a:schemeClr val="accent1"/>
+            <a:schemeClr val="accent4"/>
           </a:solidFill>
           <a:ln/>
         </p:spPr>
       </p:sp>
       <p:pic>
         <p:nvPicPr>
-          <p:cNvPr id="15" name="Promote new products and offers icon" descr="Promote new products and offers">    </p:cNvPr>
+          <p:cNvPr id="15" name="Improve customer engagement icon" descr="Improve customer engagement">    </p:cNvPr>
           <p:cNvPicPr>
             <a:picLocks noChangeAspect="1"/>
           </p:cNvPicPr>
@@ -8438,7 +8473,7 @@
                   <a:schemeClr val="tx2"/>
                 </a:solidFill>
               </a:rPr>
-              <a:t>Promote new products and offers</a:t>
+              <a:t>Improve customer engagement</a:t>
             </a:r>
             <a:endParaRPr lang="en-US" sz="1600" dirty="0"/>
           </a:p>
@@ -8446,7 +8481,7 @@
       </p:sp>
       <p:sp>
         <p:nvSpPr>
-          <p:cNvPr id="17" name="Smarter, data-driven decisions circle"/>
+          <p:cNvPr id="17" name="Better chance of higher sales circle"/>
           <p:cNvSpPr/>
           <p:nvPr/>
         </p:nvSpPr>
@@ -8459,14 +8494,14 @@
             <a:avLst/>
           </a:prstGeom>
           <a:solidFill>
-            <a:schemeClr val="accent1"/>
+            <a:schemeClr val="accent4"/>
           </a:solidFill>
           <a:ln/>
         </p:spPr>
       </p:sp>
       <p:pic>
         <p:nvPicPr>
-          <p:cNvPr id="18" name="Smarter, data-driven decisions icon" descr="Smarter, data-driven decisions">    </p:cNvPr>
+          <p:cNvPr id="18" name="Better chance of higher sales icon" descr="Better chance of higher sales">    </p:cNvPr>
           <p:cNvPicPr>
             <a:picLocks noChangeAspect="1"/>
           </p:cNvPicPr>
@@ -8518,7 +8553,7 @@
                   <a:schemeClr val="tx2"/>
                 </a:solidFill>
               </a:rPr>
-              <a:t>Smarter, data-driven decisions</a:t>
+              <a:t>Better chance of higher sales</a:t>
             </a:r>
             <a:endParaRPr lang="en-US" sz="1600" dirty="0"/>
           </a:p>
@@ -8682,11 +8717,11 @@
         <p:spPr>
           <a:xfrm>
             <a:off x="457200" y="1325880"/>
-            <a:ext cx="1920240" cy="1783080"/>
+            <a:ext cx="1517904" cy="1828800"/>
           </a:xfrm>
           <a:prstGeom prst="roundRect">
             <a:avLst>
-              <a:gd name="adj" fmla="val 6154"/>
+              <a:gd name="adj" fmla="val 7229"/>
             </a:avLst>
           </a:prstGeom>
           <a:solidFill>
@@ -8697,14 +8732,14 @@
       </p:sp>
       <p:sp>
         <p:nvSpPr>
-          <p:cNvPr id="5" name="Reach and engagement circle"/>
-          <p:cNvSpPr/>
-          <p:nvPr/>
-        </p:nvSpPr>
-        <p:spPr>
-          <a:xfrm>
-            <a:off x="640080" y="1508760"/>
-            <a:ext cx="566928" cy="566928"/>
+          <p:cNvPr id="5" name="Followers circle"/>
+          <p:cNvSpPr/>
+          <p:nvPr/>
+        </p:nvSpPr>
+        <p:spPr>
+          <a:xfrm>
+            <a:off x="621792" y="1490472"/>
+            <a:ext cx="548640" cy="548640"/>
           </a:xfrm>
           <a:prstGeom prst="ellipse">
             <a:avLst/>
@@ -8717,7 +8752,7 @@
       </p:sp>
       <p:pic>
         <p:nvPicPr>
-          <p:cNvPr id="6" name="Reach and engagement icon" descr="Reach and engagement">    </p:cNvPr>
+          <p:cNvPr id="6" name="Followers icon" descr="Followers">    </p:cNvPr>
           <p:cNvPicPr>
             <a:picLocks noChangeAspect="1"/>
           </p:cNvPicPr>
@@ -8731,8 +8766,8 @@
         </p:blipFill>
         <p:spPr>
           <a:xfrm>
-            <a:off x="793151" y="1661831"/>
-            <a:ext cx="260787" cy="260787"/>
+            <a:off x="769925" y="1638605"/>
+            <a:ext cx="252374" cy="252374"/>
           </a:xfrm>
           <a:prstGeom prst="rect">
             <a:avLst/>
@@ -8747,8 +8782,8 @@
         </p:nvSpPr>
         <p:spPr>
           <a:xfrm>
-            <a:off x="1783080" y="1554480"/>
-            <a:ext cx="411480" cy="411480"/>
+            <a:off x="1426464" y="1536192"/>
+            <a:ext cx="384048" cy="384048"/>
           </a:xfrm>
           <a:prstGeom prst="ellipse">
             <a:avLst/>
@@ -8775,8 +8810,8 @@
         </p:blipFill>
         <p:spPr>
           <a:xfrm>
-            <a:off x="1894180" y="1665580"/>
-            <a:ext cx="189281" cy="189281"/>
+            <a:off x="1530157" y="1639885"/>
+            <a:ext cx="176662" cy="176662"/>
           </a:xfrm>
           <a:prstGeom prst="rect">
             <a:avLst/>
@@ -8791,8 +8826,8 @@
         </p:nvSpPr>
         <p:spPr>
           <a:xfrm>
-            <a:off x="640080" y="2194560"/>
-            <a:ext cx="1600200" cy="822960"/>
+            <a:off x="621792" y="2194560"/>
+            <a:ext cx="1280160" cy="868680"/>
           </a:xfrm>
           <a:prstGeom prst="rect">
             <a:avLst/>
@@ -8813,7 +8848,7 @@
                   <a:schemeClr val="tx2"/>
                 </a:solidFill>
               </a:rPr>
-              <a:t>Reach and engagement</a:t>
+              <a:t>More followers</a:t>
             </a:r>
             <a:endParaRPr lang="en-US" sz="1500" dirty="0"/>
           </a:p>
@@ -8827,7 +8862,7 @@
                   <a:schemeClr val="tx1"/>
                 </a:solidFill>
               </a:rPr>
-              <a:t>on social media</a:t>
+              <a:t>and engagement</a:t>
             </a:r>
             <a:endParaRPr lang="en-US" sz="1500" dirty="0"/>
           </a:p>
@@ -8841,12 +8876,12 @@
         </p:nvSpPr>
         <p:spPr>
           <a:xfrm>
-            <a:off x="2560320" y="1325880"/>
-            <a:ext cx="1920240" cy="1783080"/>
+            <a:off x="2139696" y="1325880"/>
+            <a:ext cx="1517904" cy="1828800"/>
           </a:xfrm>
           <a:prstGeom prst="roundRect">
             <a:avLst>
-              <a:gd name="adj" fmla="val 6154"/>
+              <a:gd name="adj" fmla="val 7229"/>
             </a:avLst>
           </a:prstGeom>
           <a:solidFill>
@@ -8857,14 +8892,14 @@
       </p:sp>
       <p:sp>
         <p:nvSpPr>
-          <p:cNvPr id="11" name="Profile visits circle"/>
-          <p:cNvSpPr/>
-          <p:nvPr/>
-        </p:nvSpPr>
-        <p:spPr>
-          <a:xfrm>
-            <a:off x="2743200" y="1508760"/>
-            <a:ext cx="566928" cy="566928"/>
+          <p:cNvPr id="11" name="Inquiries circle"/>
+          <p:cNvSpPr/>
+          <p:nvPr/>
+        </p:nvSpPr>
+        <p:spPr>
+          <a:xfrm>
+            <a:off x="2304288" y="1490472"/>
+            <a:ext cx="548640" cy="548640"/>
           </a:xfrm>
           <a:prstGeom prst="ellipse">
             <a:avLst/>
@@ -8877,7 +8912,7 @@
       </p:sp>
       <p:pic>
         <p:nvPicPr>
-          <p:cNvPr id="12" name="Profile visits icon" descr="Profile visits">    </p:cNvPr>
+          <p:cNvPr id="12" name="Inquiries icon" descr="Inquiries">    </p:cNvPr>
           <p:cNvPicPr>
             <a:picLocks noChangeAspect="1"/>
           </p:cNvPicPr>
@@ -8891,8 +8926,8 @@
         </p:blipFill>
         <p:spPr>
           <a:xfrm>
-            <a:off x="2896271" y="1661831"/>
-            <a:ext cx="260787" cy="260787"/>
+            <a:off x="2452421" y="1638605"/>
+            <a:ext cx="252374" cy="252374"/>
           </a:xfrm>
           <a:prstGeom prst="rect">
             <a:avLst/>
@@ -8907,8 +8942,8 @@
         </p:nvSpPr>
         <p:spPr>
           <a:xfrm>
-            <a:off x="3886200" y="1554480"/>
-            <a:ext cx="411480" cy="411480"/>
+            <a:off x="3108960" y="1536192"/>
+            <a:ext cx="384048" cy="384048"/>
           </a:xfrm>
           <a:prstGeom prst="ellipse">
             <a:avLst/>
@@ -8935,8 +8970,8 @@
         </p:blipFill>
         <p:spPr>
           <a:xfrm>
-            <a:off x="3997300" y="1665580"/>
-            <a:ext cx="189281" cy="189281"/>
+            <a:off x="3212653" y="1639885"/>
+            <a:ext cx="176662" cy="176662"/>
           </a:xfrm>
           <a:prstGeom prst="rect">
             <a:avLst/>
@@ -8951,8 +8986,8 @@
         </p:nvSpPr>
         <p:spPr>
           <a:xfrm>
-            <a:off x="2743200" y="2194560"/>
-            <a:ext cx="1600200" cy="822960"/>
+            <a:off x="2304288" y="2194560"/>
+            <a:ext cx="1280160" cy="868680"/>
           </a:xfrm>
           <a:prstGeom prst="rect">
             <a:avLst/>
@@ -8973,7 +9008,7 @@
                   <a:schemeClr val="tx2"/>
                 </a:solidFill>
               </a:rPr>
-              <a:t>Profile visits</a:t>
+              <a:t>More inquiries</a:t>
             </a:r>
             <a:endParaRPr lang="en-US" sz="1500" dirty="0"/>
           </a:p>
@@ -8987,7 +9022,7 @@
                   <a:schemeClr val="tx1"/>
                 </a:solidFill>
               </a:rPr>
-              <a:t>inquiries and direction requests</a:t>
+              <a:t>from customers</a:t>
             </a:r>
             <a:endParaRPr lang="en-US" sz="1500" dirty="0"/>
           </a:p>
@@ -9001,12 +9036,12 @@
         </p:nvSpPr>
         <p:spPr>
           <a:xfrm>
-            <a:off x="4663440" y="1325880"/>
-            <a:ext cx="1920240" cy="1783080"/>
+            <a:off x="3822192" y="1325880"/>
+            <a:ext cx="1517904" cy="1828800"/>
           </a:xfrm>
           <a:prstGeom prst="roundRect">
             <a:avLst>
-              <a:gd name="adj" fmla="val 6154"/>
+              <a:gd name="adj" fmla="val 7229"/>
             </a:avLst>
           </a:prstGeom>
           <a:solidFill>
@@ -9023,8 +9058,8 @@
         </p:nvSpPr>
         <p:spPr>
           <a:xfrm>
-            <a:off x="4846320" y="1508760"/>
-            <a:ext cx="566928" cy="566928"/>
+            <a:off x="3986784" y="1490472"/>
+            <a:ext cx="548640" cy="548640"/>
           </a:xfrm>
           <a:prstGeom prst="ellipse">
             <a:avLst/>
@@ -9051,8 +9086,8 @@
         </p:blipFill>
         <p:spPr>
           <a:xfrm>
-            <a:off x="4999391" y="1661831"/>
-            <a:ext cx="260787" cy="260787"/>
+            <a:off x="4134917" y="1638605"/>
+            <a:ext cx="252374" cy="252374"/>
           </a:xfrm>
           <a:prstGeom prst="rect">
             <a:avLst/>
@@ -9067,8 +9102,8 @@
         </p:nvSpPr>
         <p:spPr>
           <a:xfrm>
-            <a:off x="5989320" y="1554480"/>
-            <a:ext cx="411480" cy="411480"/>
+            <a:off x="4791456" y="1536192"/>
+            <a:ext cx="384048" cy="384048"/>
           </a:xfrm>
           <a:prstGeom prst="ellipse">
             <a:avLst/>
@@ -9095,8 +9130,8 @@
         </p:blipFill>
         <p:spPr>
           <a:xfrm>
-            <a:off x="6100420" y="1665580"/>
-            <a:ext cx="189281" cy="189281"/>
+            <a:off x="4895149" y="1639885"/>
+            <a:ext cx="176662" cy="176662"/>
           </a:xfrm>
           <a:prstGeom prst="rect">
             <a:avLst/>
@@ -9111,8 +9146,8 @@
         </p:nvSpPr>
         <p:spPr>
           <a:xfrm>
-            <a:off x="4846320" y="2194560"/>
-            <a:ext cx="1600200" cy="822960"/>
+            <a:off x="3986784" y="2194560"/>
+            <a:ext cx="1280160" cy="868680"/>
           </a:xfrm>
           <a:prstGeom prst="rect">
             <a:avLst/>
@@ -9133,7 +9168,7 @@
                   <a:schemeClr val="tx2"/>
                 </a:solidFill>
               </a:rPr>
-              <a:t>Awareness</a:t>
+              <a:t>More awareness</a:t>
             </a:r>
             <a:endParaRPr lang="en-US" sz="1500" dirty="0"/>
           </a:p>
@@ -9147,7 +9182,7 @@
                   <a:schemeClr val="tx1"/>
                 </a:solidFill>
               </a:rPr>
-              <a:t>of products and offers</a:t>
+              <a:t>of the café</a:t>
             </a:r>
             <a:endParaRPr lang="en-US" sz="1500" dirty="0"/>
           </a:p>
@@ -9161,12 +9196,12 @@
         </p:nvSpPr>
         <p:spPr>
           <a:xfrm>
-            <a:off x="6766560" y="1325880"/>
-            <a:ext cx="1920240" cy="1783080"/>
+            <a:off x="5504688" y="1325880"/>
+            <a:ext cx="1517904" cy="1828800"/>
           </a:xfrm>
           <a:prstGeom prst="roundRect">
             <a:avLst>
-              <a:gd name="adj" fmla="val 6154"/>
+              <a:gd name="adj" fmla="val 7229"/>
             </a:avLst>
           </a:prstGeom>
           <a:solidFill>
@@ -9177,14 +9212,14 @@
       </p:sp>
       <p:sp>
         <p:nvSpPr>
-          <p:cNvPr id="23" name="Visits and sales circle"/>
-          <p:cNvSpPr/>
-          <p:nvPr/>
-        </p:nvSpPr>
-        <p:spPr>
-          <a:xfrm>
-            <a:off x="6949440" y="1508760"/>
-            <a:ext cx="566928" cy="566928"/>
+          <p:cNvPr id="23" name="Visits circle"/>
+          <p:cNvSpPr/>
+          <p:nvPr/>
+        </p:nvSpPr>
+        <p:spPr>
+          <a:xfrm>
+            <a:off x="5669280" y="1490472"/>
+            <a:ext cx="548640" cy="548640"/>
           </a:xfrm>
           <a:prstGeom prst="ellipse">
             <a:avLst/>
@@ -9197,7 +9232,7 @@
       </p:sp>
       <p:pic>
         <p:nvPicPr>
-          <p:cNvPr id="24" name="Visits and sales icon" descr="Visits and sales">    </p:cNvPr>
+          <p:cNvPr id="24" name="Visits icon" descr="Visits">    </p:cNvPr>
           <p:cNvPicPr>
             <a:picLocks noChangeAspect="1"/>
           </p:cNvPicPr>
@@ -9211,8 +9246,8 @@
         </p:blipFill>
         <p:spPr>
           <a:xfrm>
-            <a:off x="7102511" y="1661831"/>
-            <a:ext cx="260787" cy="260787"/>
+            <a:off x="5817413" y="1638605"/>
+            <a:ext cx="252374" cy="252374"/>
           </a:xfrm>
           <a:prstGeom prst="rect">
             <a:avLst/>
@@ -9227,8 +9262,8 @@
         </p:nvSpPr>
         <p:spPr>
           <a:xfrm>
-            <a:off x="8092440" y="1554480"/>
-            <a:ext cx="411480" cy="411480"/>
+            <a:off x="6473952" y="1536192"/>
+            <a:ext cx="384048" cy="384048"/>
           </a:xfrm>
           <a:prstGeom prst="ellipse">
             <a:avLst/>
@@ -9255,8 +9290,8 @@
         </p:blipFill>
         <p:spPr>
           <a:xfrm>
-            <a:off x="8203540" y="1665580"/>
-            <a:ext cx="189281" cy="189281"/>
+            <a:off x="6577645" y="1639885"/>
+            <a:ext cx="176662" cy="176662"/>
           </a:xfrm>
           <a:prstGeom prst="rect">
             <a:avLst/>
@@ -9271,8 +9306,8 @@
         </p:nvSpPr>
         <p:spPr>
           <a:xfrm>
-            <a:off x="6949440" y="2194560"/>
-            <a:ext cx="1600200" cy="822960"/>
+            <a:off x="5669280" y="2194560"/>
+            <a:ext cx="1280160" cy="868680"/>
           </a:xfrm>
           <a:prstGeom prst="rect">
             <a:avLst/>
@@ -9293,7 +9328,7 @@
                   <a:schemeClr val="tx2"/>
                 </a:solidFill>
               </a:rPr>
-              <a:t>Visits and sales</a:t>
+              <a:t>More visits</a:t>
             </a:r>
             <a:endParaRPr lang="en-US" sz="1500" dirty="0"/>
           </a:p>
@@ -9307,7 +9342,7 @@
                   <a:schemeClr val="tx1"/>
                 </a:solidFill>
               </a:rPr>
-              <a:t>linked to the campaign</a:t>
+              <a:t>from new customers</a:t>
             </a:r>
             <a:endParaRPr lang="en-US" sz="1500" dirty="0"/>
           </a:p>
@@ -9315,140 +9350,240 @@
       </p:sp>
       <p:sp>
         <p:nvSpPr>
-          <p:cNvPr id="28" name="Measure heading"/>
-          <p:cNvSpPr txBox="1"/>
-          <p:nvPr/>
-        </p:nvSpPr>
-        <p:spPr>
-          <a:xfrm>
-            <a:off x="457200" y="3310128"/>
-            <a:ext cx="8229600" cy="320040"/>
-          </a:xfrm>
-          <a:prstGeom prst="rect">
-            <a:avLst/>
-          </a:prstGeom>
-          <a:noFill/>
-          <a:ln/>
-        </p:spPr>
-        <p:txBody>
-          <a:bodyPr wrap="square" lIns="0" tIns="0" rIns="0" bIns="0" rtlCol="0" anchor="ctr"/>
-          <a:lstStyle/>
-          <a:p>
-            <a:pPr indent="0" marL="0">
-              <a:buNone/>
-            </a:pPr>
-            <a:r>
-              <a:rPr lang="en-US" sz="1500" b="1" dirty="0">
-                <a:solidFill>
-                  <a:schemeClr val="tx2"/>
-                </a:solidFill>
-              </a:rPr>
-              <a:t>How we measure success</a:t>
-            </a:r>
-            <a:endParaRPr lang="en-US" sz="1500" dirty="0"/>
-          </a:p>
-        </p:txBody>
-      </p:sp>
-      <p:sp>
-        <p:nvSpPr>
-          <p:cNvPr id="29" name="Metric pill 1"/>
-          <p:cNvSpPr/>
-          <p:nvPr/>
-        </p:nvSpPr>
-        <p:spPr>
-          <a:xfrm>
-            <a:off x="457200" y="3703320"/>
-            <a:ext cx="1536192" cy="420624"/>
+          <p:cNvPr id="28" name="Result card 5"/>
+          <p:cNvSpPr/>
+          <p:nvPr/>
+        </p:nvSpPr>
+        <p:spPr>
+          <a:xfrm>
+            <a:off x="7187184" y="1325880"/>
+            <a:ext cx="1517904" cy="1828800"/>
           </a:xfrm>
           <a:prstGeom prst="roundRect">
             <a:avLst>
-              <a:gd name="adj" fmla="val 50000"/>
+              <a:gd name="adj" fmla="val 7229"/>
             </a:avLst>
           </a:prstGeom>
           <a:solidFill>
-            <a:schemeClr val="bg1"/>
+            <a:schemeClr val="bg2"/>
           </a:solidFill>
-          <a:ln w="15875">
-            <a:solidFill>
-              <a:srgbClr val="C27A3A"/>
-            </a:solidFill>
-            <a:prstDash val="solid"/>
-          </a:ln>
-        </p:spPr>
-      </p:sp>
-      <p:sp>
-        <p:nvSpPr>
-          <p:cNvPr id="30" name="Metric 1"/>
+          <a:ln/>
+        </p:spPr>
+      </p:sp>
+      <p:sp>
+        <p:nvSpPr>
+          <p:cNvPr id="29" name="Sales circle"/>
+          <p:cNvSpPr/>
+          <p:nvPr/>
+        </p:nvSpPr>
+        <p:spPr>
+          <a:xfrm>
+            <a:off x="7351776" y="1490472"/>
+            <a:ext cx="548640" cy="548640"/>
+          </a:xfrm>
+          <a:prstGeom prst="ellipse">
+            <a:avLst/>
+          </a:prstGeom>
+          <a:solidFill>
+            <a:schemeClr val="tx2"/>
+          </a:solidFill>
+          <a:ln/>
+        </p:spPr>
+      </p:sp>
+      <p:pic>
+        <p:nvPicPr>
+          <p:cNvPr id="30" name="Sales icon" descr="Sales">    </p:cNvPr>
+          <p:cNvPicPr>
+            <a:picLocks noChangeAspect="1"/>
+          </p:cNvPicPr>
+          <p:nvPr/>
+        </p:nvPicPr>
+        <p:blipFill>
+          <a:blip r:embed="rId9"/>
+          <a:stretch>
+            <a:fillRect/>
+          </a:stretch>
+        </p:blipFill>
+        <p:spPr>
+          <a:xfrm>
+            <a:off x="7499909" y="1638605"/>
+            <a:ext cx="252374" cy="252374"/>
+          </a:xfrm>
+          <a:prstGeom prst="rect">
+            <a:avLst/>
+          </a:prstGeom>
+        </p:spPr>
+      </p:pic>
+      <p:sp>
+        <p:nvSpPr>
+          <p:cNvPr id="31" name="Increase 5 circle"/>
+          <p:cNvSpPr/>
+          <p:nvPr/>
+        </p:nvSpPr>
+        <p:spPr>
+          <a:xfrm>
+            <a:off x="8156448" y="1536192"/>
+            <a:ext cx="384048" cy="384048"/>
+          </a:xfrm>
+          <a:prstGeom prst="ellipse">
+            <a:avLst/>
+          </a:prstGeom>
+          <a:solidFill>
+            <a:schemeClr val="accent4"/>
+          </a:solidFill>
+          <a:ln/>
+        </p:spPr>
+      </p:sp>
+      <p:pic>
+        <p:nvPicPr>
+          <p:cNvPr id="32" name="Increase 5 icon" descr="Increase 5">    </p:cNvPr>
+          <p:cNvPicPr>
+            <a:picLocks noChangeAspect="1"/>
+          </p:cNvPicPr>
+          <p:nvPr/>
+        </p:nvPicPr>
+        <p:blipFill>
+          <a:blip r:embed="rId10"/>
+          <a:stretch>
+            <a:fillRect/>
+          </a:stretch>
+        </p:blipFill>
+        <p:spPr>
+          <a:xfrm>
+            <a:off x="8260141" y="1639885"/>
+            <a:ext cx="176662" cy="176662"/>
+          </a:xfrm>
+          <a:prstGeom prst="rect">
+            <a:avLst/>
+          </a:prstGeom>
+        </p:spPr>
+      </p:pic>
+      <p:sp>
+        <p:nvSpPr>
+          <p:cNvPr id="33" name="Result text 5"/>
           <p:cNvSpPr txBox="1"/>
           <p:nvPr/>
         </p:nvSpPr>
         <p:spPr>
           <a:xfrm>
-            <a:off x="457200" y="3703320"/>
-            <a:ext cx="1536192" cy="420624"/>
-          </a:xfrm>
-          <a:prstGeom prst="rect">
-            <a:avLst/>
-          </a:prstGeom>
-          <a:noFill/>
-          <a:ln/>
-        </p:spPr>
-        <p:txBody>
-          <a:bodyPr wrap="square" lIns="0" tIns="0" rIns="0" bIns="0" rtlCol="0" anchor="ctr"/>
-          <a:lstStyle/>
-          <a:p>
-            <a:pPr algn="ctr" indent="0" marL="0">
-              <a:buNone/>
-            </a:pPr>
-            <a:r>
-              <a:rPr lang="en-US" sz="1300" b="1" dirty="0">
-                <a:solidFill>
-                  <a:schemeClr val="accent1"/>
-                </a:solidFill>
-              </a:rPr>
-              <a:t>Reach</a:t>
-            </a:r>
-            <a:endParaRPr lang="en-US" sz="1300" dirty="0"/>
-          </a:p>
-        </p:txBody>
-      </p:sp>
-      <p:sp>
-        <p:nvSpPr>
-          <p:cNvPr id="31" name="Metric pill 2"/>
-          <p:cNvSpPr/>
-          <p:nvPr/>
-        </p:nvSpPr>
-        <p:spPr>
-          <a:xfrm>
-            <a:off x="2130552" y="3703320"/>
-            <a:ext cx="1536192" cy="420624"/>
+            <a:off x="7351776" y="2194560"/>
+            <a:ext cx="1280160" cy="868680"/>
+          </a:xfrm>
+          <a:prstGeom prst="rect">
+            <a:avLst/>
+          </a:prstGeom>
+          <a:noFill/>
+          <a:ln/>
+        </p:spPr>
+        <p:txBody>
+          <a:bodyPr wrap="square" lIns="0" tIns="0" rIns="0" bIns="0" rtlCol="0" anchor="t"/>
+          <a:lstStyle/>
+          <a:p>
+            <a:pPr indent="0" marL="0">
+              <a:buNone/>
+            </a:pPr>
+            <a:r>
+              <a:rPr lang="en-US" sz="1500" b="1" dirty="0">
+                <a:solidFill>
+                  <a:schemeClr val="tx2"/>
+                </a:solidFill>
+              </a:rPr>
+              <a:t>More sales</a:t>
+            </a:r>
+            <a:endParaRPr lang="en-US" sz="1500" dirty="0"/>
+          </a:p>
+          <a:p>
+            <a:pPr indent="0" marL="0">
+              <a:buNone/>
+            </a:pPr>
+            <a:r>
+              <a:rPr lang="en-US" sz="1200" dirty="0">
+                <a:solidFill>
+                  <a:schemeClr val="tx1"/>
+                </a:solidFill>
+              </a:rPr>
+              <a:t>performance</a:t>
+            </a:r>
+            <a:endParaRPr lang="en-US" sz="1500" dirty="0"/>
+          </a:p>
+        </p:txBody>
+      </p:sp>
+      <p:sp>
+        <p:nvSpPr>
+          <p:cNvPr id="34" name="Tracking box"/>
+          <p:cNvSpPr/>
+          <p:nvPr/>
+        </p:nvSpPr>
+        <p:spPr>
+          <a:xfrm>
+            <a:off x="457200" y="3429000"/>
+            <a:ext cx="8229600" cy="1097280"/>
           </a:xfrm>
           <a:prstGeom prst="roundRect">
             <a:avLst>
-              <a:gd name="adj" fmla="val 50000"/>
+              <a:gd name="adj" fmla="val 10000"/>
             </a:avLst>
           </a:prstGeom>
           <a:solidFill>
-            <a:schemeClr val="bg1"/>
+            <a:schemeClr val="tx2"/>
           </a:solidFill>
-          <a:ln w="15875">
-            <a:solidFill>
-              <a:srgbClr val="C27A3A"/>
-            </a:solidFill>
-            <a:prstDash val="solid"/>
-          </a:ln>
-        </p:spPr>
-      </p:sp>
-      <p:sp>
-        <p:nvSpPr>
-          <p:cNvPr id="32" name="Metric 2"/>
+          <a:ln/>
+        </p:spPr>
+      </p:sp>
+      <p:sp>
+        <p:nvSpPr>
+          <p:cNvPr id="35" name="Tracking circle"/>
+          <p:cNvSpPr/>
+          <p:nvPr/>
+        </p:nvSpPr>
+        <p:spPr>
+          <a:xfrm>
+            <a:off x="731520" y="3657600"/>
+            <a:ext cx="640080" cy="640080"/>
+          </a:xfrm>
+          <a:prstGeom prst="ellipse">
+            <a:avLst/>
+          </a:prstGeom>
+          <a:solidFill>
+            <a:schemeClr val="accent4"/>
+          </a:solidFill>
+          <a:ln/>
+        </p:spPr>
+      </p:sp>
+      <p:pic>
+        <p:nvPicPr>
+          <p:cNvPr id="36" name="Tracking icon" descr="Tracking">    </p:cNvPr>
+          <p:cNvPicPr>
+            <a:picLocks noChangeAspect="1"/>
+          </p:cNvPicPr>
+          <p:nvPr/>
+        </p:nvPicPr>
+        <p:blipFill>
+          <a:blip r:embed="rId11"/>
+          <a:stretch>
+            <a:fillRect/>
+          </a:stretch>
+        </p:blipFill>
+        <p:spPr>
+          <a:xfrm>
+            <a:off x="904342" y="3830422"/>
+            <a:ext cx="294437" cy="294437"/>
+          </a:xfrm>
+          <a:prstGeom prst="rect">
+            <a:avLst/>
+          </a:prstGeom>
+        </p:spPr>
+      </p:pic>
+      <p:sp>
+        <p:nvSpPr>
+          <p:cNvPr id="37" name="Tracking text"/>
           <p:cNvSpPr txBox="1"/>
           <p:nvPr/>
         </p:nvSpPr>
         <p:spPr>
           <a:xfrm>
-            <a:off x="2130552" y="3703320"/>
-            <a:ext cx="1536192" cy="420624"/>
+            <a:off x="1600200" y="3429000"/>
+            <a:ext cx="6858000" cy="1097280"/>
           </a:xfrm>
           <a:prstGeom prst="rect">
             <a:avLst/>
@@ -9460,243 +9595,32 @@
           <a:bodyPr wrap="square" lIns="0" tIns="0" rIns="0" bIns="0" rtlCol="0" anchor="ctr"/>
           <a:lstStyle/>
           <a:p>
-            <a:pPr algn="ctr" indent="0" marL="0">
-              <a:buNone/>
-            </a:pPr>
-            <a:r>
-              <a:rPr lang="en-US" sz="1300" b="1" dirty="0">
-                <a:solidFill>
-                  <a:schemeClr val="accent1"/>
-                </a:solidFill>
-              </a:rPr>
-              <a:t>Engagement rate</a:t>
-            </a:r>
-            <a:endParaRPr lang="en-US" sz="1300" dirty="0"/>
-          </a:p>
-        </p:txBody>
-      </p:sp>
-      <p:sp>
-        <p:nvSpPr>
-          <p:cNvPr id="33" name="Metric pill 3"/>
-          <p:cNvSpPr/>
-          <p:nvPr/>
-        </p:nvSpPr>
-        <p:spPr>
-          <a:xfrm>
-            <a:off x="3803904" y="3703320"/>
-            <a:ext cx="1536192" cy="420624"/>
-          </a:xfrm>
-          <a:prstGeom prst="roundRect">
-            <a:avLst>
-              <a:gd name="adj" fmla="val 50000"/>
-            </a:avLst>
-          </a:prstGeom>
-          <a:solidFill>
-            <a:schemeClr val="bg1"/>
-          </a:solidFill>
-          <a:ln w="15875">
-            <a:solidFill>
-              <a:srgbClr val="C27A3A"/>
-            </a:solidFill>
-            <a:prstDash val="solid"/>
-          </a:ln>
-        </p:spPr>
-      </p:sp>
-      <p:sp>
-        <p:nvSpPr>
-          <p:cNvPr id="34" name="Metric 3"/>
-          <p:cNvSpPr txBox="1"/>
-          <p:nvPr/>
-        </p:nvSpPr>
-        <p:spPr>
-          <a:xfrm>
-            <a:off x="3803904" y="3703320"/>
-            <a:ext cx="1536192" cy="420624"/>
-          </a:xfrm>
-          <a:prstGeom prst="rect">
-            <a:avLst/>
-          </a:prstGeom>
-          <a:noFill/>
-          <a:ln/>
-        </p:spPr>
-        <p:txBody>
-          <a:bodyPr wrap="square" lIns="0" tIns="0" rIns="0" bIns="0" rtlCol="0" anchor="ctr"/>
-          <a:lstStyle/>
-          <a:p>
-            <a:pPr algn="ctr" indent="0" marL="0">
-              <a:buNone/>
-            </a:pPr>
-            <a:r>
-              <a:rPr lang="en-US" sz="1300" b="1" dirty="0">
-                <a:solidFill>
-                  <a:schemeClr val="accent1"/>
-                </a:solidFill>
-              </a:rPr>
-              <a:t>Cost per inquiry</a:t>
-            </a:r>
-            <a:endParaRPr lang="en-US" sz="1300" dirty="0"/>
-          </a:p>
-        </p:txBody>
-      </p:sp>
-      <p:sp>
-        <p:nvSpPr>
-          <p:cNvPr id="35" name="Metric pill 4"/>
-          <p:cNvSpPr/>
-          <p:nvPr/>
-        </p:nvSpPr>
-        <p:spPr>
-          <a:xfrm>
-            <a:off x="5477256" y="3703320"/>
-            <a:ext cx="1536192" cy="420624"/>
-          </a:xfrm>
-          <a:prstGeom prst="roundRect">
-            <a:avLst>
-              <a:gd name="adj" fmla="val 50000"/>
-            </a:avLst>
-          </a:prstGeom>
-          <a:solidFill>
-            <a:schemeClr val="bg1"/>
-          </a:solidFill>
-          <a:ln w="15875">
-            <a:solidFill>
-              <a:srgbClr val="C27A3A"/>
-            </a:solidFill>
-            <a:prstDash val="solid"/>
-          </a:ln>
-        </p:spPr>
-      </p:sp>
-      <p:sp>
-        <p:nvSpPr>
-          <p:cNvPr id="36" name="Metric 4"/>
-          <p:cNvSpPr txBox="1"/>
-          <p:nvPr/>
-        </p:nvSpPr>
-        <p:spPr>
-          <a:xfrm>
-            <a:off x="5477256" y="3703320"/>
-            <a:ext cx="1536192" cy="420624"/>
-          </a:xfrm>
-          <a:prstGeom prst="rect">
-            <a:avLst/>
-          </a:prstGeom>
-          <a:noFill/>
-          <a:ln/>
-        </p:spPr>
-        <p:txBody>
-          <a:bodyPr wrap="square" lIns="0" tIns="0" rIns="0" bIns="0" rtlCol="0" anchor="ctr"/>
-          <a:lstStyle/>
-          <a:p>
-            <a:pPr algn="ctr" indent="0" marL="0">
-              <a:buNone/>
-            </a:pPr>
-            <a:r>
-              <a:rPr lang="en-US" sz="1300" b="1" dirty="0">
-                <a:solidFill>
-                  <a:schemeClr val="accent1"/>
-                </a:solidFill>
-              </a:rPr>
-              <a:t>Customer visits</a:t>
-            </a:r>
-            <a:endParaRPr lang="en-US" sz="1300" dirty="0"/>
-          </a:p>
-        </p:txBody>
-      </p:sp>
-      <p:sp>
-        <p:nvSpPr>
-          <p:cNvPr id="37" name="Metric pill 5"/>
-          <p:cNvSpPr/>
-          <p:nvPr/>
-        </p:nvSpPr>
-        <p:spPr>
-          <a:xfrm>
-            <a:off x="7150608" y="3703320"/>
-            <a:ext cx="1536192" cy="420624"/>
-          </a:xfrm>
-          <a:prstGeom prst="roundRect">
-            <a:avLst>
-              <a:gd name="adj" fmla="val 50000"/>
-            </a:avLst>
-          </a:prstGeom>
-          <a:solidFill>
-            <a:schemeClr val="bg1"/>
-          </a:solidFill>
-          <a:ln w="15875">
-            <a:solidFill>
-              <a:srgbClr val="C27A3A"/>
-            </a:solidFill>
-            <a:prstDash val="solid"/>
-          </a:ln>
-        </p:spPr>
-      </p:sp>
-      <p:sp>
-        <p:nvSpPr>
-          <p:cNvPr id="38" name="Metric 5"/>
-          <p:cNvSpPr txBox="1"/>
-          <p:nvPr/>
-        </p:nvSpPr>
-        <p:spPr>
-          <a:xfrm>
-            <a:off x="7150608" y="3703320"/>
-            <a:ext cx="1536192" cy="420624"/>
-          </a:xfrm>
-          <a:prstGeom prst="rect">
-            <a:avLst/>
-          </a:prstGeom>
-          <a:noFill/>
-          <a:ln/>
-        </p:spPr>
-        <p:txBody>
-          <a:bodyPr wrap="square" lIns="0" tIns="0" rIns="0" bIns="0" rtlCol="0" anchor="ctr"/>
-          <a:lstStyle/>
-          <a:p>
-            <a:pPr algn="ctr" indent="0" marL="0">
-              <a:buNone/>
-            </a:pPr>
-            <a:r>
-              <a:rPr lang="en-US" sz="1300" b="1" dirty="0">
-                <a:solidFill>
-                  <a:schemeClr val="accent1"/>
-                </a:solidFill>
-              </a:rPr>
-              <a:t>Sales</a:t>
-            </a:r>
-            <a:endParaRPr lang="en-US" sz="1300" dirty="0"/>
-          </a:p>
-        </p:txBody>
-      </p:sp>
-      <p:sp>
-        <p:nvSpPr>
-          <p:cNvPr id="39" name="Results disclaimer"/>
-          <p:cNvSpPr txBox="1"/>
-          <p:nvPr/>
-        </p:nvSpPr>
-        <p:spPr>
-          <a:xfrm>
-            <a:off x="457200" y="4279392"/>
-            <a:ext cx="8229600" cy="274320"/>
-          </a:xfrm>
-          <a:prstGeom prst="rect">
-            <a:avLst/>
-          </a:prstGeom>
-          <a:noFill/>
-          <a:ln/>
-        </p:spPr>
-        <p:txBody>
-          <a:bodyPr wrap="square" lIns="0" tIns="0" rIns="0" bIns="0" rtlCol="0" anchor="ctr"/>
-          <a:lstStyle/>
-          <a:p>
             <a:pPr indent="0" marL="0">
               <a:buNone/>
             </a:pPr>
             <a:r>
-              <a:rPr lang="en-US" sz="1000" dirty="0">
-                <a:solidFill>
-                  <a:schemeClr val="accent5"/>
-                </a:solidFill>
-              </a:rPr>
-              <a:t>Targets are set after reviewing the café's current performance. Results are not guaranteed.</a:t>
-            </a:r>
-            <a:endParaRPr lang="en-US" sz="1000" dirty="0"/>
+              <a:rPr lang="en-US" sz="1800" b="1" dirty="0">
+                <a:solidFill>
+                  <a:schemeClr val="bg1"/>
+                </a:solidFill>
+              </a:rPr>
+              <a:t>We track the results</a:t>
+            </a:r>
+            <a:endParaRPr lang="en-US" sz="1800" dirty="0"/>
+          </a:p>
+          <a:p>
+            <a:pPr indent="0" marL="0">
+              <a:buNone/>
+            </a:pPr>
+            <a:r>
+              <a:rPr lang="en-US" sz="1400" dirty="0">
+                <a:solidFill>
+                  <a:schemeClr val="accent2"/>
+                </a:solidFill>
+              </a:rPr>
+              <a:t>to understand what works best</a:t>
+            </a:r>
+            <a:endParaRPr lang="en-US" sz="1800" dirty="0"/>
           </a:p>
         </p:txBody>
       </p:sp>
@@ -9779,7 +9703,7 @@
         <a:srgbClr val="6F4E37"/>
       </a:accent3>
       <a:accent4>
-        <a:srgbClr val="7A9A7E"/>
+        <a:srgbClr val="5B7F5E"/>
       </a:accent4>
       <a:accent5>
         <a:srgbClr val="8C7F76"/>

--- a/Cafe_Marketing_Proposal.pptx
+++ b/Cafe_Marketing_Proposal.pptx
@@ -16,9 +16,11 @@
     <p:sldId id="264" r:id="rId10"/>
     <p:sldId id="265" r:id="rId11"/>
     <p:sldId id="266" r:id="rId12"/>
+    <p:sldId id="267" r:id="rId13"/>
+    <p:sldId id="268" r:id="rId14"/>
   </p:sldIdLst>
   <p:notesMasterIdLst>
-    <p:notesMasterId r:id="rId13"/>
+    <p:notesMasterId r:id="rId15"/>
   </p:notesMasterIdLst>
   <p:sldSz cx="9144000" cy="5143500"/>
   <p:notesSz cx="5143500" cy="9144000"/>
@@ -117,39 +119,45 @@
   <p:extLst>
     <p:ext uri="{521415D9-36F7-43E2-AB2F-B90AF26B5E84}">
       <p14:sectionLst xmlns:p14="http://schemas.microsoft.com/office/powerpoint/2010/main">
-        <p14:section name="Introduction" id="{e2b1dd3d-62ba-4e62-df16-e882d4886722}">
+        <p14:section name="Introduction" id="{5bdd043f-870c-001b-56d1-4f9a39e0baaa}">
           <p14:sldIdLst>
             <p14:sldId id="256"/>
             <p14:sldId id="257"/>
           </p14:sldIdLst>
         </p14:section>
-        <p14:section name="Problem" id="{49f65fef-79c9-ef57-eb77-9c9846c35fab}">
+        <p14:section name="Problem" id="{057a16e2-1dc4-0da3-83e4-3b2bf742f064}">
           <p14:sldIdLst>
             <p14:sldId id="258"/>
           </p14:sldIdLst>
         </p14:section>
-        <p14:section name="Solution" id="{1dd3e3ab-358d-cdff-2b0c-54b83b9ab916}">
+        <p14:section name="Solution" id="{8df52afd-9d71-7ab7-b465-7a541c8ca3f4}">
           <p14:sldIdLst>
             <p14:sldId id="259"/>
             <p14:sldId id="260"/>
           </p14:sldIdLst>
         </p14:section>
-        <p14:section name="Budget and Timeline" id="{da5e3706-3aa2-8250-fd5d-62c22d81ef7c}">
+        <p14:section name="Budget and Timeline" id="{2856a4ab-21f2-bd0d-858c-a26653fdd40c}">
           <p14:sldIdLst>
             <p14:sldId id="261"/>
             <p14:sldId id="262"/>
           </p14:sldIdLst>
         </p14:section>
-        <p14:section name="Results" id="{acff62f4-050c-9ce2-49a1-737b1cc3ff45}">
+        <p14:section name="Results" id="{313db6e8-18c3-467d-971e-c40fbfb32d21}">
           <p14:sldIdLst>
             <p14:sldId id="263"/>
             <p14:sldId id="264"/>
             <p14:sldId id="265"/>
+            <p14:sldId id="266"/>
           </p14:sldIdLst>
         </p14:section>
-        <p14:section name="Conclusion" id="{79dde2e4-27d2-468c-c1c0-15917b20f069}">
+        <p14:section name="Why Us" id="{5037e329-baf9-e1bc-c8fa-db23593521ba}">
           <p14:sldIdLst>
-            <p14:sldId id="266"/>
+            <p14:sldId id="267"/>
+          </p14:sldIdLst>
+        </p14:section>
+        <p14:section name="Conclusion" id="{c088e8e0-617b-067e-7990-23dda1b90d8a}">
+          <p14:sldIdLst>
+            <p14:sldId id="268"/>
           </p14:sldIdLst>
         </p14:section>
       </p14:sectionLst>
@@ -458,6 +466,279 @@
 </c:chartSpace>
 </file>
 
+<file path=ppt/charts/chart2.xml><?xml version="1.0" encoding="utf-8"?>
+<c:chartSpace xmlns:c="http://schemas.openxmlformats.org/drawingml/2006/chart" xmlns:a="http://schemas.openxmlformats.org/drawingml/2006/main" xmlns:r="http://schemas.openxmlformats.org/officeDocument/2006/relationships">
+  <c:date1904 val="0"/>
+  <c:roundedCorners val="1"/>
+  <c:chart>
+    <c:title>
+      <c:tx>
+        <c:rich>
+          <a:bodyPr/>
+          <a:lstStyle/>
+          <a:p>
+            <a:pPr>
+              <a:defRPr sz="1200" b="0" i="0" u="none" strike="noStrike">
+                <a:solidFill>
+                  <a:srgbClr val="2E1F17"/>
+                </a:solidFill>
+                <a:latin typeface="+mn-lt"/>
+              </a:defRPr>
+            </a:pPr>
+            <a:r>
+              <a:rPr sz="1200" b="0" i="0" u="none" strike="noStrike">
+                <a:solidFill>
+                  <a:srgbClr val="2E1F17"/>
+                </a:solidFill>
+                <a:latin typeface="+mn-lt"/>
+              </a:rPr>
+              <a:t>Monthly profit vs. cost (EGP)</a:t>
+            </a:r>
+          </a:p>
+        </c:rich>
+      </c:tx>
+      <c:layout/>
+      <c:overlay val="0"/>
+    </c:title>
+    <c:autoTitleDeleted val="0"/>
+    <c:plotArea>
+      <c:layout/>
+      <c:barChart>
+        <c:barDir val="bar"/>
+        <c:grouping val="clustered"/>
+        <c:varyColors val="0"/>
+        <c:ser>
+          <c:idx val="0"/>
+          <c:order val="0"/>
+          <c:tx>
+            <c:strRef>
+              <c:f>Sheet1!$B$1</c:f>
+              <c:strCache>
+                <c:ptCount val="1"/>
+                <c:pt idx="0">
+                  <c:v>EGP per month</c:v>
+                </c:pt>
+              </c:strCache>
+            </c:strRef>
+          </c:tx>
+          <c:spPr>
+            <a:solidFill>
+              <a:srgbClr val="C27A3A"/>
+            </a:solidFill>
+            <a:effectLst/>
+          </c:spPr>
+          <c:invertIfNegative val="0"/>
+          <c:dLbls>
+            <c:numFmt formatCode="#,##0" sourceLinked="0"/>
+            <c:txPr>
+              <a:bodyPr/>
+              <a:lstStyle/>
+              <a:p>
+                <a:pPr>
+                  <a:defRPr b="1" i="0" strike="noStrike" sz="1200" u="none">
+                    <a:solidFill>
+                      <a:srgbClr val="2E1F17"/>
+                    </a:solidFill>
+                    <a:latin typeface="+mn-lt"/>
+                  </a:defRPr>
+                </a:pPr>
+              </a:p>
+            </c:txPr>
+            <c:showLegendKey val="0"/>
+            <c:showVal val="1"/>
+            <c:showCatName val="0"/>
+            <c:showSerName val="0"/>
+            <c:showPercent val="0"/>
+            <c:showBubbleSize val="0"/>
+            <c:showLeaderLines val="0"/>
+          </c:dLbls>
+          <c:dPt>
+            <c:idx val="0"/>
+            <c:invertIfNegative val="0"/>
+            <c:bubble3D val="0"/>
+            <c:spPr>
+              <a:solidFill>
+                <a:srgbClr val="C27A3A"/>
+              </a:solidFill>
+              <a:effectLst/>
+            </c:spPr>
+          </c:dPt>
+          <c:dPt>
+            <c:idx val="1"/>
+            <c:invertIfNegative val="0"/>
+            <c:bubble3D val="0"/>
+            <c:spPr>
+              <a:solidFill>
+                <a:srgbClr val="8C7F76"/>
+              </a:solidFill>
+              <a:effectLst/>
+            </c:spPr>
+          </c:dPt>
+          <c:cat>
+            <c:multiLvlStrRef>
+              <c:f>Sheet1!$A$2:$A$3</c:f>
+              <c:multiLvlStrCache>
+                <c:ptCount val="2"/>
+                <c:lvl>
+                  <c:pt idx="0">
+                    <c:v>You gain at target</c:v>
+                  </c:pt>
+                  <c:pt idx="1">
+                    <c:v>You invest</c:v>
+                  </c:pt>
+                </c:lvl>
+              </c:multiLvlStrCache>
+            </c:multiLvlStrRef>
+          </c:cat>
+          <c:val>
+            <c:numRef>
+              <c:f>Sheet1!$B$2:$B$3</c:f>
+              <c:numCache>
+                <c:formatCode>General</c:formatCode>
+                <c:ptCount val="2"/>
+                <c:pt idx="0">
+                  <c:v>30000</c:v>
+                </c:pt>
+                <c:pt idx="1">
+                  <c:v>13000</c:v>
+                </c:pt>
+              </c:numCache>
+            </c:numRef>
+          </c:val>
+        </c:ser>
+        <c:dLbls>
+          <c:numFmt formatCode="#,##0" sourceLinked="0"/>
+          <c:txPr>
+            <a:bodyPr/>
+            <a:lstStyle/>
+            <a:p>
+              <a:pPr>
+                <a:defRPr b="1" i="0" strike="noStrike" sz="1200" u="none">
+                  <a:solidFill>
+                    <a:srgbClr val="2E1F17"/>
+                  </a:solidFill>
+                  <a:latin typeface="+mn-lt"/>
+                </a:defRPr>
+              </a:pPr>
+            </a:p>
+          </c:txPr>
+          <c:showLegendKey val="0"/>
+          <c:showVal val="1"/>
+          <c:showCatName val="0"/>
+          <c:showSerName val="0"/>
+          <c:showPercent val="0"/>
+          <c:showBubbleSize val="0"/>
+          <c:showLeaderLines val="0"/>
+        </c:dLbls>
+        <c:gapWidth val="45"/>
+        <c:overlap val="0"/>
+        <c:axId val="2094734554"/>
+        <c:axId val="2094734552"/>
+        <c:axId val="2094734556"/>
+      </c:barChart>
+      <c:catAx>
+        <c:axId val="2094734554"/>
+        <c:scaling>
+          <c:orientation val="minMax"/>
+        </c:scaling>
+        <c:delete val="0"/>
+        <c:axPos val="l"/>
+        <c:numFmt formatCode="General" sourceLinked="1"/>
+        <c:majorTickMark val="out"/>
+        <c:minorTickMark val="none"/>
+        <c:tickLblPos val="nextTo"/>
+        <c:spPr>
+          <a:ln w="12700" cap="flat">
+            <a:noFill/>
+            <a:prstDash val="solid"/>
+            <a:round/>
+          </a:ln>
+        </c:spPr>
+        <c:txPr>
+          <a:bodyPr/>
+          <a:lstStyle/>
+          <a:p>
+            <a:pPr>
+              <a:defRPr sz="1200" b="0" i="0" u="none" strike="noStrike">
+                <a:solidFill>
+                  <a:srgbClr val="2E1F17"/>
+                </a:solidFill>
+                <a:latin typeface="+mn-lt"/>
+              </a:defRPr>
+            </a:pPr>
+            <a:endParaRPr lang="en-US"/>
+          </a:p>
+        </c:txPr>
+        <c:crossAx val="2094734552"/>
+        <c:crosses val="autoZero"/>
+        <c:auto val="1"/>
+        <c:lblAlgn val="ctr"/>
+        <c:noMultiLvlLbl val="1"/>
+      </c:catAx>
+      <c:valAx>
+        <c:axId val="2094734552"/>
+        <c:scaling>
+          <c:orientation val="minMax"/>
+          <c:max val="36000"/>
+        </c:scaling>
+        <c:delete val="1"/>
+        <c:axPos val="b"/>
+        <c:numFmt formatCode="General" sourceLinked="0"/>
+        <c:majorTickMark val="out"/>
+        <c:minorTickMark val="none"/>
+        <c:tickLblPos val="low"/>
+        <c:spPr>
+          <a:ln w="12700" cap="flat">
+            <a:solidFill>
+              <a:srgbClr val="888888"/>
+            </a:solidFill>
+            <a:prstDash val="solid"/>
+            <a:round/>
+          </a:ln>
+        </c:spPr>
+        <c:txPr>
+          <a:bodyPr/>
+          <a:lstStyle/>
+          <a:p>
+            <a:pPr>
+              <a:defRPr sz="1200" b="0" i="0" u="none" strike="noStrike">
+                <a:solidFill>
+                  <a:srgbClr val="000000"/>
+                </a:solidFill>
+                <a:latin typeface="Arial"/>
+              </a:defRPr>
+            </a:pPr>
+            <a:endParaRPr lang="en-US"/>
+          </a:p>
+        </c:txPr>
+        <c:crossAx val="2094734554"/>
+        <c:crosses val="autoZero"/>
+        <c:crossBetween val="between"/>
+      </c:valAx>
+      <c:spPr>
+        <a:noFill/>
+        <a:ln>
+          <a:noFill/>
+        </a:ln>
+        <a:effectLst/>
+      </c:spPr>
+    </c:plotArea>
+    <c:plotVisOnly val="1"/>
+    <c:dispBlanksAs val="span"/>
+  </c:chart>
+  <c:spPr>
+    <a:noFill/>
+    <a:ln>
+      <a:noFill/>
+    </a:ln>
+    <a:effectLst/>
+  </c:spPr>
+  <c:externalData r:id="rId1">
+    <c:autoUpdate val="0"/>
+  </c:externalData>
+</c:chartSpace>
+</file>
+
 <file path=ppt/notesMasters/notesMaster1.xml><?xml version="1.0" encoding="utf-8"?>
 <p:notesMaster xmlns:a="http://schemas.openxmlformats.org/drawingml/2006/main" xmlns:r="http://schemas.openxmlformats.org/officeDocument/2006/relationships" xmlns:p="http://schemas.openxmlformats.org/presentationml/2006/main">
   <p:cSld>
@@ -942,12 +1223,11 @@
           <a:p>
             <a:r>
               <a:rPr lang="en-US" dirty="0"/>
-              <a:t>After the first month, we plan to:
-- Work with local food influencers.
-- Launch loyalty programs for regular customers.
-- Create seasonal offers.
-- Expand successful advertising campaigns.
-- Develop a long-term marketing strategy.</a:t>
+              <a:t>This is the most important slide for the owner: the plan pays for itself.
+- Each customer spends about 150 EGP. After ingredients, the café keeps about 100 EGP.
+- 13,000 EGP divided by 100 EGP = 130 customers a month, which is less than 5 extra customers a day.
+- Our target is 10 extra customers a day: 10 × 30 days × 100 EGP = about 30,000 EGP extra profit per month, more than double the cost.
+Ask the owner: "Do you think 5 more customers a day is possible with better marketing?"</a:t>
             </a:r>
             <a:endParaRPr lang="en-US" dirty="0"/>
           </a:p>
@@ -1035,9 +1315,12 @@
           <a:p>
             <a:r>
               <a:rPr lang="en-US" dirty="0"/>
-              <a:t>Our agency is ready to help The Daily Cup grow and reach more customers.
-We believe that a good marketing strategy can improve the café's online presence and support its business growth.
-Let's grow together! Then thank the owner and open for questions.</a:t>
+              <a:t>After the first month, we plan to:
+- Work with local food influencers.
+- Launch loyalty programs for regular customers.
+- Create seasonal offers.
+- Expand successful advertising campaigns.
+- Develop a long-term marketing strategy.</a:t>
             </a:r>
             <a:endParaRPr lang="en-US" dirty="0"/>
           </a:p>
@@ -1061,6 +1344,196 @@
             <a:fld id="{F7021451-1387-4CA6-816F-3879F97B5CBC}" type="slidenum">
               <a:rPr lang="en-US"/>
               <a:t>11</a:t>
+            </a:fld>
+            <a:endParaRPr lang="en-US"/>
+          </a:p>
+        </p:txBody>
+      </p:sp>
+    </p:spTree>
+    <p:extLst>
+      <p:ext uri="{BB962C8B-B14F-4D97-AF65-F5344CB8AC3E}">
+        <p14:creationId xmlns:p14="http://schemas.microsoft.com/office/powerpoint/2010/main" val="1024086991"/>
+      </p:ext>
+    </p:extLst>
+  </p:cSld>
+  <p:clrMapOvr>
+    <a:masterClrMapping/>
+  </p:clrMapOvr>
+</p:notes>
+</file>
+
+<file path=ppt/notesSlides/notesSlide12.xml><?xml version="1.0" encoding="utf-8"?>
+<p:notes xmlns:a="http://schemas.openxmlformats.org/drawingml/2006/main" xmlns:r="http://schemas.openxmlformats.org/officeDocument/2006/relationships" xmlns:p="http://schemas.openxmlformats.org/presentationml/2006/main">
+  <p:cSld>
+    <p:spTree>
+      <p:nvGrpSpPr>
+        <p:cNvPr id="1" name=""/>
+        <p:cNvGrpSpPr/>
+        <p:nvPr/>
+      </p:nvGrpSpPr>
+      <p:grpSpPr>
+        <a:xfrm>
+          <a:off x="0" y="0"/>
+          <a:ext cx="0" cy="0"/>
+          <a:chOff x="0" y="0"/>
+          <a:chExt cx="0" cy="0"/>
+        </a:xfrm>
+      </p:grpSpPr>
+      <p:sp>
+        <p:nvSpPr>
+          <p:cNvPr id="2" name="Slide Image Placeholder 1"/>
+          <p:cNvSpPr>
+            <a:spLocks noGrp="1" noRot="1" noChangeAspect="1"/>
+          </p:cNvSpPr>
+          <p:nvPr>
+            <p:ph type="sldImg"/>
+          </p:nvPr>
+        </p:nvSpPr>
+        <p:spPr/>
+      </p:sp>
+      <p:sp>
+        <p:nvSpPr>
+          <p:cNvPr id="3" name="Notes Placeholder 2"/>
+          <p:cNvSpPr>
+            <a:spLocks noGrp="1"/>
+          </p:cNvSpPr>
+          <p:nvPr>
+            <p:ph type="body" idx="1"/>
+          </p:nvPr>
+        </p:nvSpPr>
+        <p:spPr/>
+        <p:txBody>
+          <a:bodyPr/>
+          <a:lstStyle/>
+          <a:p>
+            <a:r>
+              <a:rPr lang="en-US" dirty="0"/>
+              <a:t>Why the owner should choose us:
+- Café specialists: we focus on cafés and restaurants, so we know what brings people in.
+- Your own team: one dedicated account manager for The Daily Cup.
+- Weekly reports: the owner sees exactly what their money does.
+The bottom row removes the risk for the owner:
+- No long-term contract: month to month, they stay because it works.
+- Free audit: we review their pages for free in week 1.
+- Reach guarantee: if we miss the reach target, we run the ads for an extra week at no fee.</a:t>
+            </a:r>
+            <a:endParaRPr lang="en-US" dirty="0"/>
+          </a:p>
+        </p:txBody>
+      </p:sp>
+      <p:sp>
+        <p:nvSpPr>
+          <p:cNvPr id="4" name="Slide Number Placeholder 3"/>
+          <p:cNvSpPr>
+            <a:spLocks noGrp="1"/>
+          </p:cNvSpPr>
+          <p:nvPr>
+            <p:ph type="sldNum" sz="quarter" idx="10"/>
+          </p:nvPr>
+        </p:nvSpPr>
+        <p:spPr/>
+        <p:txBody>
+          <a:bodyPr/>
+          <a:lstStyle/>
+          <a:p>
+            <a:fld id="{F7021451-1387-4CA6-816F-3879F97B5CBC}" type="slidenum">
+              <a:rPr lang="en-US"/>
+              <a:t>12</a:t>
+            </a:fld>
+            <a:endParaRPr lang="en-US"/>
+          </a:p>
+        </p:txBody>
+      </p:sp>
+    </p:spTree>
+    <p:extLst>
+      <p:ext uri="{BB962C8B-B14F-4D97-AF65-F5344CB8AC3E}">
+        <p14:creationId xmlns:p14="http://schemas.microsoft.com/office/powerpoint/2010/main" val="1024086991"/>
+      </p:ext>
+    </p:extLst>
+  </p:cSld>
+  <p:clrMapOvr>
+    <a:masterClrMapping/>
+  </p:clrMapOvr>
+</p:notes>
+</file>
+
+<file path=ppt/notesSlides/notesSlide13.xml><?xml version="1.0" encoding="utf-8"?>
+<p:notes xmlns:a="http://schemas.openxmlformats.org/drawingml/2006/main" xmlns:r="http://schemas.openxmlformats.org/officeDocument/2006/relationships" xmlns:p="http://schemas.openxmlformats.org/presentationml/2006/main">
+  <p:cSld>
+    <p:spTree>
+      <p:nvGrpSpPr>
+        <p:cNvPr id="1" name=""/>
+        <p:cNvGrpSpPr/>
+        <p:nvPr/>
+      </p:nvGrpSpPr>
+      <p:grpSpPr>
+        <a:xfrm>
+          <a:off x="0" y="0"/>
+          <a:ext cx="0" cy="0"/>
+          <a:chOff x="0" y="0"/>
+          <a:chExt cx="0" cy="0"/>
+        </a:xfrm>
+      </p:grpSpPr>
+      <p:sp>
+        <p:nvSpPr>
+          <p:cNvPr id="2" name="Slide Image Placeholder 1"/>
+          <p:cNvSpPr>
+            <a:spLocks noGrp="1" noRot="1" noChangeAspect="1"/>
+          </p:cNvSpPr>
+          <p:nvPr>
+            <p:ph type="sldImg"/>
+          </p:nvPr>
+        </p:nvSpPr>
+        <p:spPr/>
+      </p:sp>
+      <p:sp>
+        <p:nvSpPr>
+          <p:cNvPr id="3" name="Notes Placeholder 2"/>
+          <p:cNvSpPr>
+            <a:spLocks noGrp="1"/>
+          </p:cNvSpPr>
+          <p:nvPr>
+            <p:ph type="body" idx="1"/>
+          </p:nvPr>
+        </p:nvSpPr>
+        <p:spPr/>
+        <p:txBody>
+          <a:bodyPr/>
+          <a:lstStyle/>
+          <a:p>
+            <a:r>
+              <a:rPr lang="en-US" dirty="0"/>
+              <a:t>Summary: The Daily Cup gets more visibility, more customers and more sales, and the plan pays for itself with less than 5 extra customers a day.
+Clear next steps (shown on the right):
+1. Approve the proposal today.
+2. We do a free audit of the café's pages in week 1.
+3. The first content and ads go live in week 2.
+Bonus: if they start this month, they get a free professional photo shoot of the menu.
+Our agency is ready to help The Daily Cup grow and reach more customers. Let's grow together!
+Thank the owner and open for questions.</a:t>
+            </a:r>
+            <a:endParaRPr lang="en-US" dirty="0"/>
+          </a:p>
+        </p:txBody>
+      </p:sp>
+      <p:sp>
+        <p:nvSpPr>
+          <p:cNvPr id="4" name="Slide Number Placeholder 3"/>
+          <p:cNvSpPr>
+            <a:spLocks noGrp="1"/>
+          </p:cNvSpPr>
+          <p:nvPr>
+            <p:ph type="sldNum" sz="quarter" idx="10"/>
+          </p:nvPr>
+        </p:nvSpPr>
+        <p:spPr/>
+        <p:txBody>
+          <a:bodyPr/>
+          <a:lstStyle/>
+          <a:p>
+            <a:fld id="{F7021451-1387-4CA6-816F-3879F97B5CBC}" type="slidenum">
+              <a:rPr lang="en-US"/>
+              <a:t>13</a:t>
             </a:fld>
             <a:endParaRPr lang="en-US"/>
           </a:p>
@@ -1775,13 +2248,13 @@
           <a:p>
             <a:r>
               <a:rPr lang="en-US" dirty="0"/>
-              <a:t>During the first month, we aim to achieve:
-- More social media followers and engagement.
-- More customer inquiries.
-- Greater awareness of the café.
-- More visits from potential customers.
-- Improved sales performance.
-We will track the results to understand what works best.</a:t>
+              <a:t>These are our targets for the first month:
+- 40,000+ people in the area see The Daily Cup through ads and content.
+- 500+ new Instagram followers.
+- 100+ messages, calls and direction requests.
+- 10 extra customers every day by the end of the month.
+We don't hide anything: every week the owner receives a simple report with reach, followers, messages, visits and sales.
+Targets are based on a 4,000 EGP monthly ad budget and are confirmed after we review the café's current numbers in week 1.</a:t>
             </a:r>
             <a:endParaRPr lang="en-US" dirty="0"/>
           </a:p>
@@ -2738,7 +3211,7 @@
                   <a:schemeClr val="accent1"/>
                 </a:solidFill>
               </a:rPr>
-              <a:t>09  FUTURE WORK</a:t>
+              <a:t>09  RETURN ON INVESTMENT</a:t>
             </a:r>
             <a:endParaRPr lang="en-US" sz="1100" dirty="0"/>
           </a:p>
@@ -2779,7 +3252,7 @@
                 <a:ea typeface="Cambria" pitchFamily="34" charset="-122"/>
                 <a:cs typeface="Cambria" pitchFamily="34" charset="-120"/>
               </a:rPr>
-              <a:t>After the First Month</a:t>
+              <a:t>The Plan Pays for Itself</a:t>
             </a:r>
             <a:endParaRPr lang="en-US" sz="3200" dirty="0"/>
           </a:p>
@@ -2787,18 +3260,18 @@
       </p:sp>
       <p:sp>
         <p:nvSpPr>
-          <p:cNvPr id="4" name="Growth step 1"/>
+          <p:cNvPr id="4" name="Equation box 1"/>
           <p:cNvSpPr/>
           <p:nvPr/>
         </p:nvSpPr>
         <p:spPr>
           <a:xfrm>
-            <a:off x="457200" y="3383280"/>
-            <a:ext cx="1517904" cy="1143000"/>
+            <a:off x="457200" y="1325880"/>
+            <a:ext cx="2438430" cy="1143000"/>
           </a:xfrm>
           <a:prstGeom prst="roundRect">
             <a:avLst>
-              <a:gd name="adj" fmla="val 8000"/>
+              <a:gd name="adj" fmla="val 9600"/>
             </a:avLst>
           </a:prstGeom>
           <a:solidFill>
@@ -2809,200 +3282,293 @@
       </p:sp>
       <p:sp>
         <p:nvSpPr>
-          <p:cNvPr id="5" name="Food influencers circle"/>
+          <p:cNvPr id="5" name="Equation text 1"/>
+          <p:cNvSpPr txBox="1"/>
+          <p:nvPr/>
+        </p:nvSpPr>
+        <p:spPr>
+          <a:xfrm>
+            <a:off x="640080" y="1325880"/>
+            <a:ext cx="2072670" cy="1143000"/>
+          </a:xfrm>
+          <a:prstGeom prst="rect">
+            <a:avLst/>
+          </a:prstGeom>
+          <a:noFill/>
+          <a:ln/>
+        </p:spPr>
+        <p:txBody>
+          <a:bodyPr wrap="square" lIns="0" tIns="0" rIns="0" bIns="0" rtlCol="0" anchor="ctr"/>
+          <a:lstStyle/>
+          <a:p>
+            <a:pPr algn="ctr" indent="0" marL="0">
+              <a:buNone/>
+            </a:pPr>
+            <a:r>
+              <a:rPr lang="en-US" sz="2800" b="1" dirty="0">
+                <a:solidFill>
+                  <a:schemeClr val="tx2"/>
+                </a:solidFill>
+                <a:latin typeface="Cambria" pitchFamily="34" charset="0"/>
+                <a:ea typeface="Cambria" pitchFamily="34" charset="-122"/>
+                <a:cs typeface="Cambria" pitchFamily="34" charset="-120"/>
+              </a:rPr>
+              <a:t>13,000 EGP</a:t>
+            </a:r>
+            <a:endParaRPr lang="en-US" sz="2800" dirty="0"/>
+          </a:p>
+          <a:p>
+            <a:pPr algn="ctr" indent="0" marL="0">
+              <a:buNone/>
+            </a:pPr>
+            <a:r>
+              <a:rPr lang="en-US" sz="1300" dirty="0">
+                <a:solidFill>
+                  <a:schemeClr val="accent5"/>
+                </a:solidFill>
+              </a:rPr>
+              <a:t>monthly investment</a:t>
+            </a:r>
+            <a:endParaRPr lang="en-US" sz="2800" dirty="0"/>
+          </a:p>
+        </p:txBody>
+      </p:sp>
+      <p:sp>
+        <p:nvSpPr>
+          <p:cNvPr id="6" name="Operator 1"/>
+          <p:cNvSpPr txBox="1"/>
+          <p:nvPr/>
+        </p:nvSpPr>
+        <p:spPr>
+          <a:xfrm>
+            <a:off x="2895630" y="1325880"/>
+            <a:ext cx="457200" cy="1143000"/>
+          </a:xfrm>
+          <a:prstGeom prst="rect">
+            <a:avLst/>
+          </a:prstGeom>
+          <a:noFill/>
+          <a:ln/>
+        </p:spPr>
+        <p:txBody>
+          <a:bodyPr wrap="square" lIns="0" tIns="0" rIns="0" bIns="0" rtlCol="0" anchor="ctr"/>
+          <a:lstStyle/>
+          <a:p>
+            <a:pPr algn="ctr" indent="0" marL="0">
+              <a:buNone/>
+            </a:pPr>
+            <a:r>
+              <a:rPr lang="en-US" sz="3000" b="1" dirty="0">
+                <a:solidFill>
+                  <a:schemeClr val="accent1"/>
+                </a:solidFill>
+              </a:rPr>
+              <a:t>÷</a:t>
+            </a:r>
+            <a:endParaRPr lang="en-US" sz="3000" dirty="0"/>
+          </a:p>
+        </p:txBody>
+      </p:sp>
+      <p:sp>
+        <p:nvSpPr>
+          <p:cNvPr id="7" name="Equation box 2"/>
           <p:cNvSpPr/>
           <p:nvPr/>
         </p:nvSpPr>
         <p:spPr>
           <a:xfrm>
-            <a:off x="941832" y="2724912"/>
-            <a:ext cx="548640" cy="548640"/>
-          </a:xfrm>
-          <a:prstGeom prst="ellipse">
-            <a:avLst/>
-          </a:prstGeom>
-          <a:solidFill>
-            <a:schemeClr val="accent1"/>
-          </a:solidFill>
-          <a:ln/>
-        </p:spPr>
-      </p:sp>
-      <p:pic>
-        <p:nvPicPr>
-          <p:cNvPr id="6" name="Food influencers icon" descr="Food influencers">    </p:cNvPr>
-          <p:cNvPicPr>
-            <a:picLocks noChangeAspect="1"/>
-          </p:cNvPicPr>
-          <p:nvPr/>
-        </p:nvPicPr>
-        <p:blipFill>
-          <a:blip r:embed="rId1"/>
-          <a:stretch>
-            <a:fillRect/>
-          </a:stretch>
-        </p:blipFill>
-        <p:spPr>
-          <a:xfrm>
-            <a:off x="1089965" y="2873045"/>
-            <a:ext cx="252374" cy="252374"/>
-          </a:xfrm>
-          <a:prstGeom prst="rect">
-            <a:avLst/>
-          </a:prstGeom>
-        </p:spPr>
-      </p:pic>
-      <p:sp>
-        <p:nvSpPr>
-          <p:cNvPr id="7" name="Growth text 1"/>
-          <p:cNvSpPr txBox="1"/>
-          <p:nvPr/>
-        </p:nvSpPr>
-        <p:spPr>
-          <a:xfrm>
-            <a:off x="566928" y="3493008"/>
-            <a:ext cx="1298448" cy="685800"/>
-          </a:xfrm>
-          <a:prstGeom prst="rect">
-            <a:avLst/>
-          </a:prstGeom>
-          <a:noFill/>
-          <a:ln/>
-        </p:spPr>
-        <p:txBody>
-          <a:bodyPr wrap="square" lIns="0" tIns="0" rIns="0" bIns="0" rtlCol="0" anchor="t"/>
-          <a:lstStyle/>
-          <a:p>
-            <a:pPr indent="0" marL="0">
-              <a:buNone/>
-            </a:pPr>
-            <a:r>
-              <a:rPr lang="en-US" sz="1400" b="1" dirty="0">
-                <a:solidFill>
-                  <a:schemeClr val="tx2"/>
-                </a:solidFill>
-              </a:rPr>
-              <a:t>Food influencers</a:t>
-            </a:r>
-            <a:endParaRPr lang="en-US" sz="1400" dirty="0"/>
-          </a:p>
-        </p:txBody>
-      </p:sp>
-      <p:sp>
-        <p:nvSpPr>
-          <p:cNvPr id="8" name="Growth step 2"/>
-          <p:cNvSpPr/>
-          <p:nvPr/>
-        </p:nvSpPr>
-        <p:spPr>
-          <a:xfrm>
-            <a:off x="2139696" y="3090672"/>
-            <a:ext cx="1517904" cy="1435608"/>
+            <a:off x="3352830" y="1325880"/>
+            <a:ext cx="2438430" cy="1143000"/>
           </a:xfrm>
           <a:prstGeom prst="roundRect">
             <a:avLst>
-              <a:gd name="adj" fmla="val 6369"/>
+              <a:gd name="adj" fmla="val 9600"/>
             </a:avLst>
           </a:prstGeom>
           <a:solidFill>
-            <a:schemeClr val="accent2"/>
+            <a:schemeClr val="bg2"/>
           </a:solidFill>
           <a:ln/>
         </p:spPr>
       </p:sp>
       <p:sp>
         <p:nvSpPr>
-          <p:cNvPr id="9" name="Loyalty programs circle"/>
+          <p:cNvPr id="8" name="Equation text 2"/>
+          <p:cNvSpPr txBox="1"/>
+          <p:nvPr/>
+        </p:nvSpPr>
+        <p:spPr>
+          <a:xfrm>
+            <a:off x="3535710" y="1325880"/>
+            <a:ext cx="2072670" cy="1143000"/>
+          </a:xfrm>
+          <a:prstGeom prst="rect">
+            <a:avLst/>
+          </a:prstGeom>
+          <a:noFill/>
+          <a:ln/>
+        </p:spPr>
+        <p:txBody>
+          <a:bodyPr wrap="square" lIns="0" tIns="0" rIns="0" bIns="0" rtlCol="0" anchor="ctr"/>
+          <a:lstStyle/>
+          <a:p>
+            <a:pPr algn="ctr" indent="0" marL="0">
+              <a:buNone/>
+            </a:pPr>
+            <a:r>
+              <a:rPr lang="en-US" sz="2800" b="1" dirty="0">
+                <a:solidFill>
+                  <a:schemeClr val="tx2"/>
+                </a:solidFill>
+                <a:latin typeface="Cambria" pitchFamily="34" charset="0"/>
+                <a:ea typeface="Cambria" pitchFamily="34" charset="-122"/>
+                <a:cs typeface="Cambria" pitchFamily="34" charset="-120"/>
+              </a:rPr>
+              <a:t>100 EGP</a:t>
+            </a:r>
+            <a:endParaRPr lang="en-US" sz="2800" dirty="0"/>
+          </a:p>
+          <a:p>
+            <a:pPr algn="ctr" indent="0" marL="0">
+              <a:buNone/>
+            </a:pPr>
+            <a:r>
+              <a:rPr lang="en-US" sz="1300" dirty="0">
+                <a:solidFill>
+                  <a:schemeClr val="accent5"/>
+                </a:solidFill>
+              </a:rPr>
+              <a:t>profit per customer*</a:t>
+            </a:r>
+            <a:endParaRPr lang="en-US" sz="2800" dirty="0"/>
+          </a:p>
+        </p:txBody>
+      </p:sp>
+      <p:sp>
+        <p:nvSpPr>
+          <p:cNvPr id="9" name="Operator 2"/>
+          <p:cNvSpPr txBox="1"/>
+          <p:nvPr/>
+        </p:nvSpPr>
+        <p:spPr>
+          <a:xfrm>
+            <a:off x="5791261" y="1325880"/>
+            <a:ext cx="457200" cy="1143000"/>
+          </a:xfrm>
+          <a:prstGeom prst="rect">
+            <a:avLst/>
+          </a:prstGeom>
+          <a:noFill/>
+          <a:ln/>
+        </p:spPr>
+        <p:txBody>
+          <a:bodyPr wrap="square" lIns="0" tIns="0" rIns="0" bIns="0" rtlCol="0" anchor="ctr"/>
+          <a:lstStyle/>
+          <a:p>
+            <a:pPr algn="ctr" indent="0" marL="0">
+              <a:buNone/>
+            </a:pPr>
+            <a:r>
+              <a:rPr lang="en-US" sz="3000" b="1" dirty="0">
+                <a:solidFill>
+                  <a:schemeClr val="accent1"/>
+                </a:solidFill>
+              </a:rPr>
+              <a:t>=</a:t>
+            </a:r>
+            <a:endParaRPr lang="en-US" sz="3000" dirty="0"/>
+          </a:p>
+        </p:txBody>
+      </p:sp>
+      <p:sp>
+        <p:nvSpPr>
+          <p:cNvPr id="10" name="Equation box 3"/>
           <p:cNvSpPr/>
           <p:nvPr/>
         </p:nvSpPr>
         <p:spPr>
           <a:xfrm>
-            <a:off x="2624328" y="2432304"/>
-            <a:ext cx="548640" cy="548640"/>
-          </a:xfrm>
-          <a:prstGeom prst="ellipse">
-            <a:avLst/>
-          </a:prstGeom>
-          <a:solidFill>
-            <a:schemeClr val="accent1"/>
-          </a:solidFill>
-          <a:ln/>
-        </p:spPr>
-      </p:sp>
-      <p:pic>
-        <p:nvPicPr>
-          <p:cNvPr id="10" name="Loyalty programs icon" descr="Loyalty programs">    </p:cNvPr>
-          <p:cNvPicPr>
-            <a:picLocks noChangeAspect="1"/>
-          </p:cNvPicPr>
-          <p:nvPr/>
-        </p:nvPicPr>
-        <p:blipFill>
-          <a:blip r:embed="rId2"/>
-          <a:stretch>
-            <a:fillRect/>
-          </a:stretch>
-        </p:blipFill>
-        <p:spPr>
-          <a:xfrm>
-            <a:off x="2772461" y="2580437"/>
-            <a:ext cx="252374" cy="252374"/>
-          </a:xfrm>
-          <a:prstGeom prst="rect">
-            <a:avLst/>
-          </a:prstGeom>
-        </p:spPr>
-      </p:pic>
-      <p:sp>
-        <p:nvSpPr>
-          <p:cNvPr id="11" name="Growth text 2"/>
-          <p:cNvSpPr txBox="1"/>
-          <p:nvPr/>
-        </p:nvSpPr>
-        <p:spPr>
-          <a:xfrm>
-            <a:off x="2249424" y="3200400"/>
-            <a:ext cx="1298448" cy="685800"/>
-          </a:xfrm>
-          <a:prstGeom prst="rect">
-            <a:avLst/>
-          </a:prstGeom>
-          <a:noFill/>
-          <a:ln/>
-        </p:spPr>
-        <p:txBody>
-          <a:bodyPr wrap="square" lIns="0" tIns="0" rIns="0" bIns="0" rtlCol="0" anchor="t"/>
-          <a:lstStyle/>
-          <a:p>
-            <a:pPr indent="0" marL="0">
-              <a:buNone/>
-            </a:pPr>
-            <a:r>
-              <a:rPr lang="en-US" sz="1400" b="1" dirty="0">
-                <a:solidFill>
-                  <a:schemeClr val="tx2"/>
-                </a:solidFill>
-              </a:rPr>
-              <a:t>Loyalty programs</a:t>
-            </a:r>
-            <a:endParaRPr lang="en-US" sz="1400" dirty="0"/>
-          </a:p>
-        </p:txBody>
-      </p:sp>
-      <p:sp>
-        <p:nvSpPr>
-          <p:cNvPr id="12" name="Growth step 3"/>
-          <p:cNvSpPr/>
-          <p:nvPr/>
-        </p:nvSpPr>
-        <p:spPr>
-          <a:xfrm>
-            <a:off x="3822192" y="2798064"/>
-            <a:ext cx="1517904" cy="1728216"/>
+            <a:off x="6248461" y="1325880"/>
+            <a:ext cx="2438430" cy="1143000"/>
           </a:xfrm>
           <a:prstGeom prst="roundRect">
             <a:avLst>
-              <a:gd name="adj" fmla="val 6024"/>
+              <a:gd name="adj" fmla="val 9600"/>
+            </a:avLst>
+          </a:prstGeom>
+          <a:solidFill>
+            <a:schemeClr val="tx2"/>
+          </a:solidFill>
+          <a:ln/>
+        </p:spPr>
+      </p:sp>
+      <p:sp>
+        <p:nvSpPr>
+          <p:cNvPr id="11" name="Equation text 3"/>
+          <p:cNvSpPr txBox="1"/>
+          <p:nvPr/>
+        </p:nvSpPr>
+        <p:spPr>
+          <a:xfrm>
+            <a:off x="6431341" y="1325880"/>
+            <a:ext cx="2072670" cy="1143000"/>
+          </a:xfrm>
+          <a:prstGeom prst="rect">
+            <a:avLst/>
+          </a:prstGeom>
+          <a:noFill/>
+          <a:ln/>
+        </p:spPr>
+        <p:txBody>
+          <a:bodyPr wrap="square" lIns="0" tIns="0" rIns="0" bIns="0" rtlCol="0" anchor="ctr"/>
+          <a:lstStyle/>
+          <a:p>
+            <a:pPr algn="ctr" indent="0" marL="0">
+              <a:buNone/>
+            </a:pPr>
+            <a:r>
+              <a:rPr lang="en-US" sz="2800" b="1" dirty="0">
+                <a:solidFill>
+                  <a:schemeClr val="bg1"/>
+                </a:solidFill>
+                <a:latin typeface="Cambria" pitchFamily="34" charset="0"/>
+                <a:ea typeface="Cambria" pitchFamily="34" charset="-122"/>
+                <a:cs typeface="Cambria" pitchFamily="34" charset="-120"/>
+              </a:rPr>
+              <a:t>130</a:t>
+            </a:r>
+            <a:endParaRPr lang="en-US" sz="2800" dirty="0"/>
+          </a:p>
+          <a:p>
+            <a:pPr algn="ctr" indent="0" marL="0">
+              <a:buNone/>
+            </a:pPr>
+            <a:r>
+              <a:rPr lang="en-US" sz="1300" dirty="0">
+                <a:solidFill>
+                  <a:schemeClr val="accent2"/>
+                </a:solidFill>
+              </a:rPr>
+              <a:t>customers a month</a:t>
+            </a:r>
+            <a:endParaRPr lang="en-US" sz="2800" dirty="0"/>
+          </a:p>
+        </p:txBody>
+      </p:sp>
+      <p:sp>
+        <p:nvSpPr>
+          <p:cNvPr id="12" name="Break-even callout"/>
+          <p:cNvSpPr/>
+          <p:nvPr/>
+        </p:nvSpPr>
+        <p:spPr>
+          <a:xfrm>
+            <a:off x="457200" y="2697480"/>
+            <a:ext cx="3840480" cy="1600200"/>
+          </a:xfrm>
+          <a:prstGeom prst="roundRect">
+            <a:avLst>
+              <a:gd name="adj" fmla="val 6857"/>
             </a:avLst>
           </a:prstGeom>
           <a:solidFill>
@@ -3013,285 +3579,106 @@
       </p:sp>
       <p:sp>
         <p:nvSpPr>
-          <p:cNvPr id="13" name="Seasonal offers circle"/>
-          <p:cNvSpPr/>
-          <p:nvPr/>
-        </p:nvSpPr>
-        <p:spPr>
-          <a:xfrm>
-            <a:off x="4306824" y="2139696"/>
-            <a:ext cx="548640" cy="548640"/>
-          </a:xfrm>
-          <a:prstGeom prst="ellipse">
-            <a:avLst/>
-          </a:prstGeom>
-          <a:solidFill>
-            <a:schemeClr val="accent1"/>
-          </a:solidFill>
-          <a:ln/>
-        </p:spPr>
-      </p:sp>
-      <p:pic>
-        <p:nvPicPr>
-          <p:cNvPr id="14" name="Seasonal offers icon" descr="Seasonal offers">    </p:cNvPr>
-          <p:cNvPicPr>
-            <a:picLocks noChangeAspect="1"/>
-          </p:cNvPicPr>
-          <p:nvPr/>
-        </p:nvPicPr>
-        <p:blipFill>
-          <a:blip r:embed="rId3"/>
-          <a:stretch>
-            <a:fillRect/>
-          </a:stretch>
-        </p:blipFill>
-        <p:spPr>
-          <a:xfrm>
-            <a:off x="4454957" y="2287829"/>
-            <a:ext cx="252374" cy="252374"/>
-          </a:xfrm>
-          <a:prstGeom prst="rect">
-            <a:avLst/>
-          </a:prstGeom>
-        </p:spPr>
-      </p:pic>
-      <p:sp>
-        <p:nvSpPr>
-          <p:cNvPr id="15" name="Growth text 3"/>
+          <p:cNvPr id="13" name="Break-even text"/>
           <p:cNvSpPr txBox="1"/>
           <p:nvPr/>
         </p:nvSpPr>
         <p:spPr>
           <a:xfrm>
-            <a:off x="3931920" y="2907792"/>
-            <a:ext cx="1298448" cy="685800"/>
-          </a:xfrm>
-          <a:prstGeom prst="rect">
-            <a:avLst/>
-          </a:prstGeom>
-          <a:noFill/>
-          <a:ln/>
-        </p:spPr>
-        <p:txBody>
-          <a:bodyPr wrap="square" lIns="0" tIns="0" rIns="0" bIns="0" rtlCol="0" anchor="t"/>
+            <a:off x="685800" y="2697480"/>
+            <a:ext cx="3429000" cy="1600200"/>
+          </a:xfrm>
+          <a:prstGeom prst="rect">
+            <a:avLst/>
+          </a:prstGeom>
+          <a:noFill/>
+          <a:ln/>
+        </p:spPr>
+        <p:txBody>
+          <a:bodyPr wrap="square" lIns="0" tIns="0" rIns="0" bIns="0" rtlCol="0" anchor="ctr"/>
           <a:lstStyle/>
           <a:p>
             <a:pPr indent="0" marL="0">
               <a:buNone/>
             </a:pPr>
             <a:r>
-              <a:rPr lang="en-US" sz="1400" b="1" dirty="0">
+              <a:rPr lang="en-US" sz="3200" b="1" dirty="0">
                 <a:solidFill>
                   <a:schemeClr val="bg1"/>
                 </a:solidFill>
-              </a:rPr>
-              <a:t>Seasonal offers</a:t>
-            </a:r>
-            <a:endParaRPr lang="en-US" sz="1400" dirty="0"/>
-          </a:p>
-        </p:txBody>
-      </p:sp>
-      <p:sp>
-        <p:nvSpPr>
-          <p:cNvPr id="16" name="Growth step 4"/>
-          <p:cNvSpPr/>
-          <p:nvPr/>
-        </p:nvSpPr>
-        <p:spPr>
-          <a:xfrm>
-            <a:off x="5504688" y="2505456"/>
-            <a:ext cx="1517904" cy="2020824"/>
-          </a:xfrm>
-          <a:prstGeom prst="roundRect">
-            <a:avLst>
-              <a:gd name="adj" fmla="val 6024"/>
-            </a:avLst>
-          </a:prstGeom>
-          <a:solidFill>
-            <a:schemeClr val="accent3"/>
-          </a:solidFill>
-          <a:ln/>
-        </p:spPr>
-      </p:sp>
-      <p:sp>
-        <p:nvSpPr>
-          <p:cNvPr id="17" name="Expand the best ads circle"/>
-          <p:cNvSpPr/>
-          <p:nvPr/>
-        </p:nvSpPr>
-        <p:spPr>
-          <a:xfrm>
-            <a:off x="5989320" y="1847088"/>
-            <a:ext cx="548640" cy="548640"/>
-          </a:xfrm>
-          <a:prstGeom prst="ellipse">
-            <a:avLst/>
-          </a:prstGeom>
-          <a:solidFill>
-            <a:schemeClr val="accent1"/>
-          </a:solidFill>
-          <a:ln/>
-        </p:spPr>
-      </p:sp>
-      <p:pic>
-        <p:nvPicPr>
-          <p:cNvPr id="18" name="Expand the best ads icon" descr="Expand the best ads">    </p:cNvPr>
-          <p:cNvPicPr>
-            <a:picLocks noChangeAspect="1"/>
-          </p:cNvPicPr>
-          <p:nvPr/>
-        </p:nvPicPr>
-        <p:blipFill>
-          <a:blip r:embed="rId4"/>
-          <a:stretch>
-            <a:fillRect/>
-          </a:stretch>
-        </p:blipFill>
-        <p:spPr>
-          <a:xfrm>
-            <a:off x="6137453" y="1995221"/>
-            <a:ext cx="252374" cy="252374"/>
-          </a:xfrm>
-          <a:prstGeom prst="rect">
-            <a:avLst/>
-          </a:prstGeom>
-        </p:spPr>
-      </p:pic>
-      <p:sp>
-        <p:nvSpPr>
-          <p:cNvPr id="19" name="Growth text 4"/>
+                <a:latin typeface="Cambria" pitchFamily="34" charset="0"/>
+                <a:ea typeface="Cambria" pitchFamily="34" charset="-122"/>
+                <a:cs typeface="Cambria" pitchFamily="34" charset="-120"/>
+              </a:rPr>
+              <a:t>Less than 5</a:t>
+            </a:r>
+            <a:endParaRPr lang="en-US" sz="3200" dirty="0"/>
+          </a:p>
+          <a:p>
+            <a:pPr indent="0" marL="0">
+              <a:buNone/>
+            </a:pPr>
+            <a:r>
+              <a:rPr lang="en-US" sz="1500" dirty="0">
+                <a:solidFill>
+                  <a:schemeClr val="bg1"/>
+                </a:solidFill>
+              </a:rPr>
+              <a:t>extra customers a day covers the full cost. Our target is 10.</a:t>
+            </a:r>
+            <a:endParaRPr lang="en-US" sz="3200" dirty="0"/>
+          </a:p>
+        </p:txBody>
+      </p:sp>
+      <p:graphicFrame>
+        <p:nvGraphicFramePr>
+          <p:cNvPr id="14" name="Investment vs gain chart" descr=""/>
+          <p:cNvGraphicFramePr/>
+          <p:nvPr/>
+        </p:nvGraphicFramePr>
+        <p:xfrm>
+          <a:off x="4526280" y="2606040"/>
+          <a:ext cx="4160520" cy="1783080"/>
+        </p:xfrm>
+        <a:graphic xmlns:a="http://schemas.openxmlformats.org/drawingml/2006/main">
+          <a:graphicData uri="http://schemas.openxmlformats.org/drawingml/2006/chart">
+            <c:chart xmlns:c="http://schemas.openxmlformats.org/drawingml/2006/chart" r:id="rId1"/>
+          </a:graphicData>
+        </a:graphic>
+      </p:graphicFrame>
+      <p:sp>
+        <p:nvSpPr>
+          <p:cNvPr id="15" name="ROI footnote"/>
           <p:cNvSpPr txBox="1"/>
           <p:nvPr/>
         </p:nvSpPr>
         <p:spPr>
           <a:xfrm>
-            <a:off x="5614416" y="2615184"/>
-            <a:ext cx="1298448" cy="685800"/>
-          </a:xfrm>
-          <a:prstGeom prst="rect">
-            <a:avLst/>
-          </a:prstGeom>
-          <a:noFill/>
-          <a:ln/>
-        </p:spPr>
-        <p:txBody>
-          <a:bodyPr wrap="square" lIns="0" tIns="0" rIns="0" bIns="0" rtlCol="0" anchor="t"/>
+            <a:off x="457200" y="4389120"/>
+            <a:ext cx="8229600" cy="274320"/>
+          </a:xfrm>
+          <a:prstGeom prst="rect">
+            <a:avLst/>
+          </a:prstGeom>
+          <a:noFill/>
+          <a:ln/>
+        </p:spPr>
+        <p:txBody>
+          <a:bodyPr wrap="square" lIns="0" tIns="0" rIns="0" bIns="0" rtlCol="0" anchor="ctr"/>
           <a:lstStyle/>
           <a:p>
             <a:pPr indent="0" marL="0">
               <a:buNone/>
             </a:pPr>
             <a:r>
-              <a:rPr lang="en-US" sz="1400" b="1" dirty="0">
-                <a:solidFill>
-                  <a:schemeClr val="bg1"/>
-                </a:solidFill>
-              </a:rPr>
-              <a:t>Expand the best ads</a:t>
-            </a:r>
-            <a:endParaRPr lang="en-US" sz="1400" dirty="0"/>
-          </a:p>
-        </p:txBody>
-      </p:sp>
-      <p:sp>
-        <p:nvSpPr>
-          <p:cNvPr id="20" name="Growth step 5"/>
-          <p:cNvSpPr/>
-          <p:nvPr/>
-        </p:nvSpPr>
-        <p:spPr>
-          <a:xfrm>
-            <a:off x="7187184" y="2212848"/>
-            <a:ext cx="1517904" cy="2313432"/>
-          </a:xfrm>
-          <a:prstGeom prst="roundRect">
-            <a:avLst>
-              <a:gd name="adj" fmla="val 6024"/>
-            </a:avLst>
-          </a:prstGeom>
-          <a:solidFill>
-            <a:schemeClr val="tx2"/>
-          </a:solidFill>
-          <a:ln/>
-        </p:spPr>
-      </p:sp>
-      <p:sp>
-        <p:nvSpPr>
-          <p:cNvPr id="21" name="Long-term strategy circle"/>
-          <p:cNvSpPr/>
-          <p:nvPr/>
-        </p:nvSpPr>
-        <p:spPr>
-          <a:xfrm>
-            <a:off x="7671816" y="1554480"/>
-            <a:ext cx="548640" cy="548640"/>
-          </a:xfrm>
-          <a:prstGeom prst="ellipse">
-            <a:avLst/>
-          </a:prstGeom>
-          <a:solidFill>
-            <a:schemeClr val="accent1"/>
-          </a:solidFill>
-          <a:ln/>
-        </p:spPr>
-      </p:sp>
-      <p:pic>
-        <p:nvPicPr>
-          <p:cNvPr id="22" name="Long-term strategy icon" descr="Long-term strategy">    </p:cNvPr>
-          <p:cNvPicPr>
-            <a:picLocks noChangeAspect="1"/>
-          </p:cNvPicPr>
-          <p:nvPr/>
-        </p:nvPicPr>
-        <p:blipFill>
-          <a:blip r:embed="rId5"/>
-          <a:stretch>
-            <a:fillRect/>
-          </a:stretch>
-        </p:blipFill>
-        <p:spPr>
-          <a:xfrm>
-            <a:off x="7819949" y="1702613"/>
-            <a:ext cx="252374" cy="252374"/>
-          </a:xfrm>
-          <a:prstGeom prst="rect">
-            <a:avLst/>
-          </a:prstGeom>
-        </p:spPr>
-      </p:pic>
-      <p:sp>
-        <p:nvSpPr>
-          <p:cNvPr id="23" name="Growth text 5"/>
-          <p:cNvSpPr txBox="1"/>
-          <p:nvPr/>
-        </p:nvSpPr>
-        <p:spPr>
-          <a:xfrm>
-            <a:off x="7296912" y="2322576"/>
-            <a:ext cx="1298448" cy="685800"/>
-          </a:xfrm>
-          <a:prstGeom prst="rect">
-            <a:avLst/>
-          </a:prstGeom>
-          <a:noFill/>
-          <a:ln/>
-        </p:spPr>
-        <p:txBody>
-          <a:bodyPr wrap="square" lIns="0" tIns="0" rIns="0" bIns="0" rtlCol="0" anchor="t"/>
-          <a:lstStyle/>
-          <a:p>
-            <a:pPr indent="0" marL="0">
-              <a:buNone/>
-            </a:pPr>
-            <a:r>
-              <a:rPr lang="en-US" sz="1400" b="1" dirty="0">
-                <a:solidFill>
-                  <a:schemeClr val="bg1"/>
-                </a:solidFill>
-              </a:rPr>
-              <a:t>Long-term strategy</a:t>
-            </a:r>
-            <a:endParaRPr lang="en-US" sz="1400" dirty="0"/>
+              <a:rPr lang="en-US" sz="1000" dirty="0">
+                <a:solidFill>
+                  <a:schemeClr val="accent5"/>
+                </a:solidFill>
+              </a:rPr>
+              <a:t>*Assumes an average bill of 150 EGP and about 65% margin after ingredients. At target: 10 customers × 30 days × 100 EGP = 30,000 EGP.</a:t>
+            </a:r>
+            <a:endParaRPr lang="en-US" sz="1000" dirty="0"/>
           </a:p>
         </p:txBody>
       </p:sp>
@@ -3375,8 +3762,8 @@
         </p:nvSpPr>
         <p:spPr>
           <a:xfrm>
-            <a:off x="548640" y="914400"/>
-            <a:ext cx="4389120" cy="320040"/>
+            <a:off x="457200" y="274320"/>
+            <a:ext cx="8229600" cy="274320"/>
           </a:xfrm>
           <a:prstGeom prst="rect">
             <a:avLst/>
@@ -3392,14 +3779,14 @@
               <a:buNone/>
             </a:pPr>
             <a:r>
-              <a:rPr lang="en-US" sz="1200" b="1" spc="300" kern="0" dirty="0">
-                <a:solidFill>
-                  <a:schemeClr val="accent2"/>
-                </a:solidFill>
-              </a:rPr>
-              <a:t>10  CONCLUSION</a:t>
-            </a:r>
-            <a:endParaRPr lang="en-US" sz="1200" dirty="0"/>
+              <a:rPr lang="en-US" sz="1100" b="1" spc="200" kern="0" dirty="0">
+                <a:solidFill>
+                  <a:schemeClr val="accent1"/>
+                </a:solidFill>
+              </a:rPr>
+              <a:t>10  FUTURE WORK</a:t>
+            </a:r>
+            <a:endParaRPr lang="en-US" sz="1100" dirty="0"/>
           </a:p>
         </p:txBody>
       </p:sp>
@@ -3413,6 +3800,1642 @@
         </p:nvSpPr>
         <p:spPr>
           <a:xfrm>
+            <a:off x="457200" y="530352"/>
+            <a:ext cx="8229600" cy="640080"/>
+          </a:xfrm>
+          <a:prstGeom prst="rect">
+            <a:avLst/>
+          </a:prstGeom>
+          <a:noFill/>
+          <a:ln/>
+        </p:spPr>
+        <p:txBody>
+          <a:bodyPr wrap="square" lIns="0" tIns="0" rIns="0" bIns="0" rtlCol="0" anchor="t"/>
+          <a:lstStyle/>
+          <a:p>
+            <a:pPr algn="l" indent="0" marL="0">
+              <a:buNone/>
+            </a:pPr>
+            <a:r>
+              <a:rPr lang="en-US" sz="3200" b="1" dirty="0">
+                <a:solidFill>
+                  <a:schemeClr val="tx2"/>
+                </a:solidFill>
+                <a:latin typeface="Cambria" pitchFamily="34" charset="0"/>
+                <a:ea typeface="Cambria" pitchFamily="34" charset="-122"/>
+                <a:cs typeface="Cambria" pitchFamily="34" charset="-120"/>
+              </a:rPr>
+              <a:t>After the First Month</a:t>
+            </a:r>
+            <a:endParaRPr lang="en-US" sz="3200" dirty="0"/>
+          </a:p>
+        </p:txBody>
+      </p:sp>
+      <p:sp>
+        <p:nvSpPr>
+          <p:cNvPr id="4" name="Growth step 1"/>
+          <p:cNvSpPr/>
+          <p:nvPr/>
+        </p:nvSpPr>
+        <p:spPr>
+          <a:xfrm>
+            <a:off x="457200" y="3383280"/>
+            <a:ext cx="1517904" cy="1143000"/>
+          </a:xfrm>
+          <a:prstGeom prst="roundRect">
+            <a:avLst>
+              <a:gd name="adj" fmla="val 8000"/>
+            </a:avLst>
+          </a:prstGeom>
+          <a:solidFill>
+            <a:schemeClr val="bg2"/>
+          </a:solidFill>
+          <a:ln/>
+        </p:spPr>
+      </p:sp>
+      <p:sp>
+        <p:nvSpPr>
+          <p:cNvPr id="5" name="Food influencers circle"/>
+          <p:cNvSpPr/>
+          <p:nvPr/>
+        </p:nvSpPr>
+        <p:spPr>
+          <a:xfrm>
+            <a:off x="941832" y="2724912"/>
+            <a:ext cx="548640" cy="548640"/>
+          </a:xfrm>
+          <a:prstGeom prst="ellipse">
+            <a:avLst/>
+          </a:prstGeom>
+          <a:solidFill>
+            <a:schemeClr val="accent1"/>
+          </a:solidFill>
+          <a:ln/>
+        </p:spPr>
+      </p:sp>
+      <p:pic>
+        <p:nvPicPr>
+          <p:cNvPr id="6" name="Food influencers icon" descr="Food influencers">    </p:cNvPr>
+          <p:cNvPicPr>
+            <a:picLocks noChangeAspect="1"/>
+          </p:cNvPicPr>
+          <p:nvPr/>
+        </p:nvPicPr>
+        <p:blipFill>
+          <a:blip r:embed="rId1"/>
+          <a:stretch>
+            <a:fillRect/>
+          </a:stretch>
+        </p:blipFill>
+        <p:spPr>
+          <a:xfrm>
+            <a:off x="1089965" y="2873045"/>
+            <a:ext cx="252374" cy="252374"/>
+          </a:xfrm>
+          <a:prstGeom prst="rect">
+            <a:avLst/>
+          </a:prstGeom>
+        </p:spPr>
+      </p:pic>
+      <p:sp>
+        <p:nvSpPr>
+          <p:cNvPr id="7" name="Growth text 1"/>
+          <p:cNvSpPr txBox="1"/>
+          <p:nvPr/>
+        </p:nvSpPr>
+        <p:spPr>
+          <a:xfrm>
+            <a:off x="566928" y="3493008"/>
+            <a:ext cx="1298448" cy="685800"/>
+          </a:xfrm>
+          <a:prstGeom prst="rect">
+            <a:avLst/>
+          </a:prstGeom>
+          <a:noFill/>
+          <a:ln/>
+        </p:spPr>
+        <p:txBody>
+          <a:bodyPr wrap="square" lIns="0" tIns="0" rIns="0" bIns="0" rtlCol="0" anchor="t"/>
+          <a:lstStyle/>
+          <a:p>
+            <a:pPr indent="0" marL="0">
+              <a:buNone/>
+            </a:pPr>
+            <a:r>
+              <a:rPr lang="en-US" sz="1400" b="1" dirty="0">
+                <a:solidFill>
+                  <a:schemeClr val="tx2"/>
+                </a:solidFill>
+              </a:rPr>
+              <a:t>Food influencers</a:t>
+            </a:r>
+            <a:endParaRPr lang="en-US" sz="1400" dirty="0"/>
+          </a:p>
+        </p:txBody>
+      </p:sp>
+      <p:sp>
+        <p:nvSpPr>
+          <p:cNvPr id="8" name="Growth step 2"/>
+          <p:cNvSpPr/>
+          <p:nvPr/>
+        </p:nvSpPr>
+        <p:spPr>
+          <a:xfrm>
+            <a:off x="2139696" y="3090672"/>
+            <a:ext cx="1517904" cy="1435608"/>
+          </a:xfrm>
+          <a:prstGeom prst="roundRect">
+            <a:avLst>
+              <a:gd name="adj" fmla="val 6369"/>
+            </a:avLst>
+          </a:prstGeom>
+          <a:solidFill>
+            <a:schemeClr val="accent2"/>
+          </a:solidFill>
+          <a:ln/>
+        </p:spPr>
+      </p:sp>
+      <p:sp>
+        <p:nvSpPr>
+          <p:cNvPr id="9" name="Loyalty programs circle"/>
+          <p:cNvSpPr/>
+          <p:nvPr/>
+        </p:nvSpPr>
+        <p:spPr>
+          <a:xfrm>
+            <a:off x="2624328" y="2432304"/>
+            <a:ext cx="548640" cy="548640"/>
+          </a:xfrm>
+          <a:prstGeom prst="ellipse">
+            <a:avLst/>
+          </a:prstGeom>
+          <a:solidFill>
+            <a:schemeClr val="accent1"/>
+          </a:solidFill>
+          <a:ln/>
+        </p:spPr>
+      </p:sp>
+      <p:pic>
+        <p:nvPicPr>
+          <p:cNvPr id="10" name="Loyalty programs icon" descr="Loyalty programs">    </p:cNvPr>
+          <p:cNvPicPr>
+            <a:picLocks noChangeAspect="1"/>
+          </p:cNvPicPr>
+          <p:nvPr/>
+        </p:nvPicPr>
+        <p:blipFill>
+          <a:blip r:embed="rId2"/>
+          <a:stretch>
+            <a:fillRect/>
+          </a:stretch>
+        </p:blipFill>
+        <p:spPr>
+          <a:xfrm>
+            <a:off x="2772461" y="2580437"/>
+            <a:ext cx="252374" cy="252374"/>
+          </a:xfrm>
+          <a:prstGeom prst="rect">
+            <a:avLst/>
+          </a:prstGeom>
+        </p:spPr>
+      </p:pic>
+      <p:sp>
+        <p:nvSpPr>
+          <p:cNvPr id="11" name="Growth text 2"/>
+          <p:cNvSpPr txBox="1"/>
+          <p:nvPr/>
+        </p:nvSpPr>
+        <p:spPr>
+          <a:xfrm>
+            <a:off x="2249424" y="3200400"/>
+            <a:ext cx="1298448" cy="685800"/>
+          </a:xfrm>
+          <a:prstGeom prst="rect">
+            <a:avLst/>
+          </a:prstGeom>
+          <a:noFill/>
+          <a:ln/>
+        </p:spPr>
+        <p:txBody>
+          <a:bodyPr wrap="square" lIns="0" tIns="0" rIns="0" bIns="0" rtlCol="0" anchor="t"/>
+          <a:lstStyle/>
+          <a:p>
+            <a:pPr indent="0" marL="0">
+              <a:buNone/>
+            </a:pPr>
+            <a:r>
+              <a:rPr lang="en-US" sz="1400" b="1" dirty="0">
+                <a:solidFill>
+                  <a:schemeClr val="tx2"/>
+                </a:solidFill>
+              </a:rPr>
+              <a:t>Loyalty programs</a:t>
+            </a:r>
+            <a:endParaRPr lang="en-US" sz="1400" dirty="0"/>
+          </a:p>
+        </p:txBody>
+      </p:sp>
+      <p:sp>
+        <p:nvSpPr>
+          <p:cNvPr id="12" name="Growth step 3"/>
+          <p:cNvSpPr/>
+          <p:nvPr/>
+        </p:nvSpPr>
+        <p:spPr>
+          <a:xfrm>
+            <a:off x="3822192" y="2798064"/>
+            <a:ext cx="1517904" cy="1728216"/>
+          </a:xfrm>
+          <a:prstGeom prst="roundRect">
+            <a:avLst>
+              <a:gd name="adj" fmla="val 6024"/>
+            </a:avLst>
+          </a:prstGeom>
+          <a:solidFill>
+            <a:schemeClr val="accent4"/>
+          </a:solidFill>
+          <a:ln/>
+        </p:spPr>
+      </p:sp>
+      <p:sp>
+        <p:nvSpPr>
+          <p:cNvPr id="13" name="Seasonal offers circle"/>
+          <p:cNvSpPr/>
+          <p:nvPr/>
+        </p:nvSpPr>
+        <p:spPr>
+          <a:xfrm>
+            <a:off x="4306824" y="2139696"/>
+            <a:ext cx="548640" cy="548640"/>
+          </a:xfrm>
+          <a:prstGeom prst="ellipse">
+            <a:avLst/>
+          </a:prstGeom>
+          <a:solidFill>
+            <a:schemeClr val="accent1"/>
+          </a:solidFill>
+          <a:ln/>
+        </p:spPr>
+      </p:sp>
+      <p:pic>
+        <p:nvPicPr>
+          <p:cNvPr id="14" name="Seasonal offers icon" descr="Seasonal offers">    </p:cNvPr>
+          <p:cNvPicPr>
+            <a:picLocks noChangeAspect="1"/>
+          </p:cNvPicPr>
+          <p:nvPr/>
+        </p:nvPicPr>
+        <p:blipFill>
+          <a:blip r:embed="rId3"/>
+          <a:stretch>
+            <a:fillRect/>
+          </a:stretch>
+        </p:blipFill>
+        <p:spPr>
+          <a:xfrm>
+            <a:off x="4454957" y="2287829"/>
+            <a:ext cx="252374" cy="252374"/>
+          </a:xfrm>
+          <a:prstGeom prst="rect">
+            <a:avLst/>
+          </a:prstGeom>
+        </p:spPr>
+      </p:pic>
+      <p:sp>
+        <p:nvSpPr>
+          <p:cNvPr id="15" name="Growth text 3"/>
+          <p:cNvSpPr txBox="1"/>
+          <p:nvPr/>
+        </p:nvSpPr>
+        <p:spPr>
+          <a:xfrm>
+            <a:off x="3931920" y="2907792"/>
+            <a:ext cx="1298448" cy="685800"/>
+          </a:xfrm>
+          <a:prstGeom prst="rect">
+            <a:avLst/>
+          </a:prstGeom>
+          <a:noFill/>
+          <a:ln/>
+        </p:spPr>
+        <p:txBody>
+          <a:bodyPr wrap="square" lIns="0" tIns="0" rIns="0" bIns="0" rtlCol="0" anchor="t"/>
+          <a:lstStyle/>
+          <a:p>
+            <a:pPr indent="0" marL="0">
+              <a:buNone/>
+            </a:pPr>
+            <a:r>
+              <a:rPr lang="en-US" sz="1400" b="1" dirty="0">
+                <a:solidFill>
+                  <a:schemeClr val="bg1"/>
+                </a:solidFill>
+              </a:rPr>
+              <a:t>Seasonal offers</a:t>
+            </a:r>
+            <a:endParaRPr lang="en-US" sz="1400" dirty="0"/>
+          </a:p>
+        </p:txBody>
+      </p:sp>
+      <p:sp>
+        <p:nvSpPr>
+          <p:cNvPr id="16" name="Growth step 4"/>
+          <p:cNvSpPr/>
+          <p:nvPr/>
+        </p:nvSpPr>
+        <p:spPr>
+          <a:xfrm>
+            <a:off x="5504688" y="2505456"/>
+            <a:ext cx="1517904" cy="2020824"/>
+          </a:xfrm>
+          <a:prstGeom prst="roundRect">
+            <a:avLst>
+              <a:gd name="adj" fmla="val 6024"/>
+            </a:avLst>
+          </a:prstGeom>
+          <a:solidFill>
+            <a:schemeClr val="accent3"/>
+          </a:solidFill>
+          <a:ln/>
+        </p:spPr>
+      </p:sp>
+      <p:sp>
+        <p:nvSpPr>
+          <p:cNvPr id="17" name="Expand the best ads circle"/>
+          <p:cNvSpPr/>
+          <p:nvPr/>
+        </p:nvSpPr>
+        <p:spPr>
+          <a:xfrm>
+            <a:off x="5989320" y="1847088"/>
+            <a:ext cx="548640" cy="548640"/>
+          </a:xfrm>
+          <a:prstGeom prst="ellipse">
+            <a:avLst/>
+          </a:prstGeom>
+          <a:solidFill>
+            <a:schemeClr val="accent1"/>
+          </a:solidFill>
+          <a:ln/>
+        </p:spPr>
+      </p:sp>
+      <p:pic>
+        <p:nvPicPr>
+          <p:cNvPr id="18" name="Expand the best ads icon" descr="Expand the best ads">    </p:cNvPr>
+          <p:cNvPicPr>
+            <a:picLocks noChangeAspect="1"/>
+          </p:cNvPicPr>
+          <p:nvPr/>
+        </p:nvPicPr>
+        <p:blipFill>
+          <a:blip r:embed="rId4"/>
+          <a:stretch>
+            <a:fillRect/>
+          </a:stretch>
+        </p:blipFill>
+        <p:spPr>
+          <a:xfrm>
+            <a:off x="6137453" y="1995221"/>
+            <a:ext cx="252374" cy="252374"/>
+          </a:xfrm>
+          <a:prstGeom prst="rect">
+            <a:avLst/>
+          </a:prstGeom>
+        </p:spPr>
+      </p:pic>
+      <p:sp>
+        <p:nvSpPr>
+          <p:cNvPr id="19" name="Growth text 4"/>
+          <p:cNvSpPr txBox="1"/>
+          <p:nvPr/>
+        </p:nvSpPr>
+        <p:spPr>
+          <a:xfrm>
+            <a:off x="5614416" y="2615184"/>
+            <a:ext cx="1298448" cy="685800"/>
+          </a:xfrm>
+          <a:prstGeom prst="rect">
+            <a:avLst/>
+          </a:prstGeom>
+          <a:noFill/>
+          <a:ln/>
+        </p:spPr>
+        <p:txBody>
+          <a:bodyPr wrap="square" lIns="0" tIns="0" rIns="0" bIns="0" rtlCol="0" anchor="t"/>
+          <a:lstStyle/>
+          <a:p>
+            <a:pPr indent="0" marL="0">
+              <a:buNone/>
+            </a:pPr>
+            <a:r>
+              <a:rPr lang="en-US" sz="1400" b="1" dirty="0">
+                <a:solidFill>
+                  <a:schemeClr val="bg1"/>
+                </a:solidFill>
+              </a:rPr>
+              <a:t>Expand the best ads</a:t>
+            </a:r>
+            <a:endParaRPr lang="en-US" sz="1400" dirty="0"/>
+          </a:p>
+        </p:txBody>
+      </p:sp>
+      <p:sp>
+        <p:nvSpPr>
+          <p:cNvPr id="20" name="Growth step 5"/>
+          <p:cNvSpPr/>
+          <p:nvPr/>
+        </p:nvSpPr>
+        <p:spPr>
+          <a:xfrm>
+            <a:off x="7187184" y="2212848"/>
+            <a:ext cx="1517904" cy="2313432"/>
+          </a:xfrm>
+          <a:prstGeom prst="roundRect">
+            <a:avLst>
+              <a:gd name="adj" fmla="val 6024"/>
+            </a:avLst>
+          </a:prstGeom>
+          <a:solidFill>
+            <a:schemeClr val="tx2"/>
+          </a:solidFill>
+          <a:ln/>
+        </p:spPr>
+      </p:sp>
+      <p:sp>
+        <p:nvSpPr>
+          <p:cNvPr id="21" name="Long-term strategy circle"/>
+          <p:cNvSpPr/>
+          <p:nvPr/>
+        </p:nvSpPr>
+        <p:spPr>
+          <a:xfrm>
+            <a:off x="7671816" y="1554480"/>
+            <a:ext cx="548640" cy="548640"/>
+          </a:xfrm>
+          <a:prstGeom prst="ellipse">
+            <a:avLst/>
+          </a:prstGeom>
+          <a:solidFill>
+            <a:schemeClr val="accent1"/>
+          </a:solidFill>
+          <a:ln/>
+        </p:spPr>
+      </p:sp>
+      <p:pic>
+        <p:nvPicPr>
+          <p:cNvPr id="22" name="Long-term strategy icon" descr="Long-term strategy">    </p:cNvPr>
+          <p:cNvPicPr>
+            <a:picLocks noChangeAspect="1"/>
+          </p:cNvPicPr>
+          <p:nvPr/>
+        </p:nvPicPr>
+        <p:blipFill>
+          <a:blip r:embed="rId5"/>
+          <a:stretch>
+            <a:fillRect/>
+          </a:stretch>
+        </p:blipFill>
+        <p:spPr>
+          <a:xfrm>
+            <a:off x="7819949" y="1702613"/>
+            <a:ext cx="252374" cy="252374"/>
+          </a:xfrm>
+          <a:prstGeom prst="rect">
+            <a:avLst/>
+          </a:prstGeom>
+        </p:spPr>
+      </p:pic>
+      <p:sp>
+        <p:nvSpPr>
+          <p:cNvPr id="23" name="Growth text 5"/>
+          <p:cNvSpPr txBox="1"/>
+          <p:nvPr/>
+        </p:nvSpPr>
+        <p:spPr>
+          <a:xfrm>
+            <a:off x="7296912" y="2322576"/>
+            <a:ext cx="1298448" cy="685800"/>
+          </a:xfrm>
+          <a:prstGeom prst="rect">
+            <a:avLst/>
+          </a:prstGeom>
+          <a:noFill/>
+          <a:ln/>
+        </p:spPr>
+        <p:txBody>
+          <a:bodyPr wrap="square" lIns="0" tIns="0" rIns="0" bIns="0" rtlCol="0" anchor="t"/>
+          <a:lstStyle/>
+          <a:p>
+            <a:pPr indent="0" marL="0">
+              <a:buNone/>
+            </a:pPr>
+            <a:r>
+              <a:rPr lang="en-US" sz="1400" b="1" dirty="0">
+                <a:solidFill>
+                  <a:schemeClr val="bg1"/>
+                </a:solidFill>
+              </a:rPr>
+              <a:t>Long-term strategy</a:t>
+            </a:r>
+            <a:endParaRPr lang="en-US" sz="1400" dirty="0"/>
+          </a:p>
+        </p:txBody>
+      </p:sp>
+      <p:sp>
+        <p:nvSpPr>
+          <p:cNvPr id="25" name="Slide Number Placeholder 0"/>
+          <p:cNvSpPr>
+            <a:spLocks noGrp="1"/>
+          </p:cNvSpPr>
+          <p:nvPr>
+            <p:ph type="sldNum" sz="quarter" idx="4294967295"/>
+          </p:nvPr>
+        </p:nvSpPr>
+        <p:spPr>
+          <a:xfrm>
+            <a:off x="8229600" y="4800600"/>
+            <a:ext cx="457200" cy="228600"/>
+          </a:xfrm>
+          <a:prstGeom prst="rect">
+            <a:avLst/>
+          </a:prstGeom>
+          <a:extLst>
+            <a:ext uri="{C572A759-6A51-4108-AA02-DFA0A04FC94B}">
+              <ma14:wrappingTextBoxFlag xmlns:ma14="http://schemas.microsoft.com/office/mac/drawingml/2011/main" val="0"/>
+            </a:ext>
+          </a:extLst>
+        </p:spPr>
+        <p:txBody>
+          <a:bodyPr lIns="0" tIns="0" rIns="0" bIns="0" anchor="ctr"/>
+          <a:lstStyle>
+            <a:lvl1pPr>
+              <a:defRPr sz="1000">
+                <a:solidFill>
+                  <a:schemeClr val="accent5"/>
+                </a:solidFill>
+              </a:defRPr>
+            </a:lvl1pPr>
+          </a:lstStyle>
+          <a:p>
+            <a:pPr algn="r"/>
+            <a:fld id="{F7021451-1387-4CA6-816F-3879F97B5CBC}" type="slidenum">
+              <a:rPr b="0" lang="en-US"/>
+              <a:t>11</a:t>
+            </a:fld>
+            <a:endParaRPr lang="en-US"/>
+          </a:p>
+        </p:txBody>
+      </p:sp>
+    </p:spTree>
+  </p:cSld>
+  <p:clrMapOvr>
+    <a:masterClrMapping/>
+  </p:clrMapOvr>
+</p:sld>
+</file>
+
+<file path=ppt/slides/slide12.xml><?xml version="1.0" encoding="utf-8"?>
+<p:sld xmlns:a="http://schemas.openxmlformats.org/drawingml/2006/main" xmlns:r="http://schemas.openxmlformats.org/officeDocument/2006/relationships" xmlns:p="http://schemas.openxmlformats.org/presentationml/2006/main">
+  <p:cSld name="Slide 12">
+    <p:spTree>
+      <p:nvGrpSpPr>
+        <p:cNvPr id="1" name=""/>
+        <p:cNvGrpSpPr/>
+        <p:nvPr/>
+      </p:nvGrpSpPr>
+      <p:grpSpPr>
+        <a:xfrm>
+          <a:off x="0" y="0"/>
+          <a:ext cx="0" cy="0"/>
+          <a:chOff x="0" y="0"/>
+          <a:chExt cx="0" cy="0"/>
+        </a:xfrm>
+      </p:grpSpPr>
+      <p:sp>
+        <p:nvSpPr>
+          <p:cNvPr id="2" name="Text 0"/>
+          <p:cNvSpPr/>
+          <p:nvPr>
+            <p:ph idx="100" type="body" hasCustomPrompt="1"/>
+          </p:nvPr>
+        </p:nvSpPr>
+        <p:spPr>
+          <a:xfrm>
+            <a:off x="457200" y="274320"/>
+            <a:ext cx="8229600" cy="274320"/>
+          </a:xfrm>
+          <a:prstGeom prst="rect">
+            <a:avLst/>
+          </a:prstGeom>
+          <a:noFill/>
+          <a:ln/>
+        </p:spPr>
+        <p:txBody>
+          <a:bodyPr wrap="square" lIns="0" tIns="0" rIns="0" bIns="0" rtlCol="0"/>
+          <a:lstStyle/>
+          <a:p>
+            <a:pPr indent="0" marL="0">
+              <a:buNone/>
+            </a:pPr>
+            <a:r>
+              <a:rPr lang="en-US" sz="1100" b="1" spc="200" kern="0" dirty="0">
+                <a:solidFill>
+                  <a:schemeClr val="accent1"/>
+                </a:solidFill>
+              </a:rPr>
+              <a:t>11  WHY CHOOSE US</a:t>
+            </a:r>
+            <a:endParaRPr lang="en-US" sz="1100" dirty="0"/>
+          </a:p>
+        </p:txBody>
+      </p:sp>
+      <p:sp>
+        <p:nvSpPr>
+          <p:cNvPr id="3" name="Text 0"/>
+          <p:cNvSpPr/>
+          <p:nvPr>
+            <p:ph idx="101" type="title" hasCustomPrompt="1"/>
+          </p:nvPr>
+        </p:nvSpPr>
+        <p:spPr>
+          <a:xfrm>
+            <a:off x="457200" y="530352"/>
+            <a:ext cx="8229600" cy="640080"/>
+          </a:xfrm>
+          <a:prstGeom prst="rect">
+            <a:avLst/>
+          </a:prstGeom>
+          <a:noFill/>
+          <a:ln/>
+        </p:spPr>
+        <p:txBody>
+          <a:bodyPr wrap="square" lIns="0" tIns="0" rIns="0" bIns="0" rtlCol="0" anchor="t"/>
+          <a:lstStyle/>
+          <a:p>
+            <a:pPr algn="l" indent="0" marL="0">
+              <a:buNone/>
+            </a:pPr>
+            <a:r>
+              <a:rPr lang="en-US" sz="3200" b="1" dirty="0">
+                <a:solidFill>
+                  <a:schemeClr val="tx2"/>
+                </a:solidFill>
+                <a:latin typeface="Cambria" pitchFamily="34" charset="0"/>
+                <a:ea typeface="Cambria" pitchFamily="34" charset="-122"/>
+                <a:cs typeface="Cambria" pitchFamily="34" charset="-120"/>
+              </a:rPr>
+              <a:t>Why BrandBrew Marketing</a:t>
+            </a:r>
+            <a:endParaRPr lang="en-US" sz="3200" dirty="0"/>
+          </a:p>
+        </p:txBody>
+      </p:sp>
+      <p:sp>
+        <p:nvSpPr>
+          <p:cNvPr id="4" name="Reason card 1"/>
+          <p:cNvSpPr/>
+          <p:nvPr/>
+        </p:nvSpPr>
+        <p:spPr>
+          <a:xfrm>
+            <a:off x="457200" y="1325880"/>
+            <a:ext cx="2606040" cy="1463040"/>
+          </a:xfrm>
+          <a:prstGeom prst="roundRect">
+            <a:avLst>
+              <a:gd name="adj" fmla="val 7500"/>
+            </a:avLst>
+          </a:prstGeom>
+          <a:solidFill>
+            <a:schemeClr val="bg2"/>
+          </a:solidFill>
+          <a:ln/>
+        </p:spPr>
+      </p:sp>
+      <p:sp>
+        <p:nvSpPr>
+          <p:cNvPr id="5" name="Café specialists circle"/>
+          <p:cNvSpPr/>
+          <p:nvPr/>
+        </p:nvSpPr>
+        <p:spPr>
+          <a:xfrm>
+            <a:off x="640080" y="1527048"/>
+            <a:ext cx="502920" cy="502920"/>
+          </a:xfrm>
+          <a:prstGeom prst="ellipse">
+            <a:avLst/>
+          </a:prstGeom>
+          <a:solidFill>
+            <a:schemeClr val="accent1"/>
+          </a:solidFill>
+          <a:ln/>
+        </p:spPr>
+      </p:sp>
+      <p:pic>
+        <p:nvPicPr>
+          <p:cNvPr id="6" name="Café specialists icon" descr="Café specialists">    </p:cNvPr>
+          <p:cNvPicPr>
+            <a:picLocks noChangeAspect="1"/>
+          </p:cNvPicPr>
+          <p:nvPr/>
+        </p:nvPicPr>
+        <p:blipFill>
+          <a:blip r:embed="rId1"/>
+          <a:stretch>
+            <a:fillRect/>
+          </a:stretch>
+        </p:blipFill>
+        <p:spPr>
+          <a:xfrm>
+            <a:off x="775868" y="1662836"/>
+            <a:ext cx="231343" cy="231343"/>
+          </a:xfrm>
+          <a:prstGeom prst="rect">
+            <a:avLst/>
+          </a:prstGeom>
+        </p:spPr>
+      </p:pic>
+      <p:sp>
+        <p:nvSpPr>
+          <p:cNvPr id="7" name="Reason title 1"/>
+          <p:cNvSpPr txBox="1"/>
+          <p:nvPr/>
+        </p:nvSpPr>
+        <p:spPr>
+          <a:xfrm>
+            <a:off x="1280160" y="1527048"/>
+            <a:ext cx="1691640" cy="502920"/>
+          </a:xfrm>
+          <a:prstGeom prst="rect">
+            <a:avLst/>
+          </a:prstGeom>
+          <a:noFill/>
+          <a:ln/>
+        </p:spPr>
+        <p:txBody>
+          <a:bodyPr wrap="square" lIns="0" tIns="0" rIns="0" bIns="0" rtlCol="0" anchor="ctr"/>
+          <a:lstStyle/>
+          <a:p>
+            <a:pPr indent="0" marL="0">
+              <a:buNone/>
+            </a:pPr>
+            <a:r>
+              <a:rPr lang="en-US" sz="1500" b="1" dirty="0">
+                <a:solidFill>
+                  <a:schemeClr val="tx2"/>
+                </a:solidFill>
+              </a:rPr>
+              <a:t>Café specialists</a:t>
+            </a:r>
+            <a:endParaRPr lang="en-US" sz="1500" dirty="0"/>
+          </a:p>
+        </p:txBody>
+      </p:sp>
+      <p:sp>
+        <p:nvSpPr>
+          <p:cNvPr id="8" name="Reason text 1"/>
+          <p:cNvSpPr txBox="1"/>
+          <p:nvPr/>
+        </p:nvSpPr>
+        <p:spPr>
+          <a:xfrm>
+            <a:off x="640080" y="2148840"/>
+            <a:ext cx="2286000" cy="566928"/>
+          </a:xfrm>
+          <a:prstGeom prst="rect">
+            <a:avLst/>
+          </a:prstGeom>
+          <a:noFill/>
+          <a:ln/>
+        </p:spPr>
+        <p:txBody>
+          <a:bodyPr wrap="square" lIns="0" tIns="0" rIns="0" bIns="0" rtlCol="0" anchor="t"/>
+          <a:lstStyle/>
+          <a:p>
+            <a:pPr indent="0" marL="0">
+              <a:buNone/>
+            </a:pPr>
+            <a:r>
+              <a:rPr lang="en-US" sz="1300" dirty="0">
+                <a:solidFill>
+                  <a:schemeClr val="tx1"/>
+                </a:solidFill>
+              </a:rPr>
+              <a:t>We know what brings people into a café</a:t>
+            </a:r>
+            <a:endParaRPr lang="en-US" sz="1300" dirty="0"/>
+          </a:p>
+        </p:txBody>
+      </p:sp>
+      <p:sp>
+        <p:nvSpPr>
+          <p:cNvPr id="9" name="Reason card 2"/>
+          <p:cNvSpPr/>
+          <p:nvPr/>
+        </p:nvSpPr>
+        <p:spPr>
+          <a:xfrm>
+            <a:off x="3268980" y="1325880"/>
+            <a:ext cx="2606040" cy="1463040"/>
+          </a:xfrm>
+          <a:prstGeom prst="roundRect">
+            <a:avLst>
+              <a:gd name="adj" fmla="val 7500"/>
+            </a:avLst>
+          </a:prstGeom>
+          <a:solidFill>
+            <a:schemeClr val="bg2"/>
+          </a:solidFill>
+          <a:ln/>
+        </p:spPr>
+      </p:sp>
+      <p:sp>
+        <p:nvSpPr>
+          <p:cNvPr id="10" name="Your own team circle"/>
+          <p:cNvSpPr/>
+          <p:nvPr/>
+        </p:nvSpPr>
+        <p:spPr>
+          <a:xfrm>
+            <a:off x="3451860" y="1527048"/>
+            <a:ext cx="502920" cy="502920"/>
+          </a:xfrm>
+          <a:prstGeom prst="ellipse">
+            <a:avLst/>
+          </a:prstGeom>
+          <a:solidFill>
+            <a:schemeClr val="accent1"/>
+          </a:solidFill>
+          <a:ln/>
+        </p:spPr>
+      </p:sp>
+      <p:pic>
+        <p:nvPicPr>
+          <p:cNvPr id="11" name="Your own team icon" descr="Your own team">    </p:cNvPr>
+          <p:cNvPicPr>
+            <a:picLocks noChangeAspect="1"/>
+          </p:cNvPicPr>
+          <p:nvPr/>
+        </p:nvPicPr>
+        <p:blipFill>
+          <a:blip r:embed="rId2"/>
+          <a:stretch>
+            <a:fillRect/>
+          </a:stretch>
+        </p:blipFill>
+        <p:spPr>
+          <a:xfrm>
+            <a:off x="3587648" y="1662836"/>
+            <a:ext cx="231343" cy="231343"/>
+          </a:xfrm>
+          <a:prstGeom prst="rect">
+            <a:avLst/>
+          </a:prstGeom>
+        </p:spPr>
+      </p:pic>
+      <p:sp>
+        <p:nvSpPr>
+          <p:cNvPr id="12" name="Reason title 2"/>
+          <p:cNvSpPr txBox="1"/>
+          <p:nvPr/>
+        </p:nvSpPr>
+        <p:spPr>
+          <a:xfrm>
+            <a:off x="4091940" y="1527048"/>
+            <a:ext cx="1691640" cy="502920"/>
+          </a:xfrm>
+          <a:prstGeom prst="rect">
+            <a:avLst/>
+          </a:prstGeom>
+          <a:noFill/>
+          <a:ln/>
+        </p:spPr>
+        <p:txBody>
+          <a:bodyPr wrap="square" lIns="0" tIns="0" rIns="0" bIns="0" rtlCol="0" anchor="ctr"/>
+          <a:lstStyle/>
+          <a:p>
+            <a:pPr indent="0" marL="0">
+              <a:buNone/>
+            </a:pPr>
+            <a:r>
+              <a:rPr lang="en-US" sz="1500" b="1" dirty="0">
+                <a:solidFill>
+                  <a:schemeClr val="tx2"/>
+                </a:solidFill>
+              </a:rPr>
+              <a:t>Your own team</a:t>
+            </a:r>
+            <a:endParaRPr lang="en-US" sz="1500" dirty="0"/>
+          </a:p>
+        </p:txBody>
+      </p:sp>
+      <p:sp>
+        <p:nvSpPr>
+          <p:cNvPr id="13" name="Reason text 2"/>
+          <p:cNvSpPr txBox="1"/>
+          <p:nvPr/>
+        </p:nvSpPr>
+        <p:spPr>
+          <a:xfrm>
+            <a:off x="3451860" y="2148840"/>
+            <a:ext cx="2286000" cy="566928"/>
+          </a:xfrm>
+          <a:prstGeom prst="rect">
+            <a:avLst/>
+          </a:prstGeom>
+          <a:noFill/>
+          <a:ln/>
+        </p:spPr>
+        <p:txBody>
+          <a:bodyPr wrap="square" lIns="0" tIns="0" rIns="0" bIns="0" rtlCol="0" anchor="t"/>
+          <a:lstStyle/>
+          <a:p>
+            <a:pPr indent="0" marL="0">
+              <a:buNone/>
+            </a:pPr>
+            <a:r>
+              <a:rPr lang="en-US" sz="1300" dirty="0">
+                <a:solidFill>
+                  <a:schemeClr val="tx1"/>
+                </a:solidFill>
+              </a:rPr>
+              <a:t>A dedicated manager for The Daily Cup</a:t>
+            </a:r>
+            <a:endParaRPr lang="en-US" sz="1300" dirty="0"/>
+          </a:p>
+        </p:txBody>
+      </p:sp>
+      <p:sp>
+        <p:nvSpPr>
+          <p:cNvPr id="14" name="Reason card 3"/>
+          <p:cNvSpPr/>
+          <p:nvPr/>
+        </p:nvSpPr>
+        <p:spPr>
+          <a:xfrm>
+            <a:off x="6080760" y="1325880"/>
+            <a:ext cx="2606040" cy="1463040"/>
+          </a:xfrm>
+          <a:prstGeom prst="roundRect">
+            <a:avLst>
+              <a:gd name="adj" fmla="val 7500"/>
+            </a:avLst>
+          </a:prstGeom>
+          <a:solidFill>
+            <a:schemeClr val="bg2"/>
+          </a:solidFill>
+          <a:ln/>
+        </p:spPr>
+      </p:sp>
+      <p:sp>
+        <p:nvSpPr>
+          <p:cNvPr id="15" name="Weekly reports circle"/>
+          <p:cNvSpPr/>
+          <p:nvPr/>
+        </p:nvSpPr>
+        <p:spPr>
+          <a:xfrm>
+            <a:off x="6263640" y="1527048"/>
+            <a:ext cx="502920" cy="502920"/>
+          </a:xfrm>
+          <a:prstGeom prst="ellipse">
+            <a:avLst/>
+          </a:prstGeom>
+          <a:solidFill>
+            <a:schemeClr val="accent1"/>
+          </a:solidFill>
+          <a:ln/>
+        </p:spPr>
+      </p:sp>
+      <p:pic>
+        <p:nvPicPr>
+          <p:cNvPr id="16" name="Weekly reports icon" descr="Weekly reports">    </p:cNvPr>
+          <p:cNvPicPr>
+            <a:picLocks noChangeAspect="1"/>
+          </p:cNvPicPr>
+          <p:nvPr/>
+        </p:nvPicPr>
+        <p:blipFill>
+          <a:blip r:embed="rId3"/>
+          <a:stretch>
+            <a:fillRect/>
+          </a:stretch>
+        </p:blipFill>
+        <p:spPr>
+          <a:xfrm>
+            <a:off x="6399428" y="1662836"/>
+            <a:ext cx="231343" cy="231343"/>
+          </a:xfrm>
+          <a:prstGeom prst="rect">
+            <a:avLst/>
+          </a:prstGeom>
+        </p:spPr>
+      </p:pic>
+      <p:sp>
+        <p:nvSpPr>
+          <p:cNvPr id="17" name="Reason title 3"/>
+          <p:cNvSpPr txBox="1"/>
+          <p:nvPr/>
+        </p:nvSpPr>
+        <p:spPr>
+          <a:xfrm>
+            <a:off x="6903720" y="1527048"/>
+            <a:ext cx="1691640" cy="502920"/>
+          </a:xfrm>
+          <a:prstGeom prst="rect">
+            <a:avLst/>
+          </a:prstGeom>
+          <a:noFill/>
+          <a:ln/>
+        </p:spPr>
+        <p:txBody>
+          <a:bodyPr wrap="square" lIns="0" tIns="0" rIns="0" bIns="0" rtlCol="0" anchor="ctr"/>
+          <a:lstStyle/>
+          <a:p>
+            <a:pPr indent="0" marL="0">
+              <a:buNone/>
+            </a:pPr>
+            <a:r>
+              <a:rPr lang="en-US" sz="1500" b="1" dirty="0">
+                <a:solidFill>
+                  <a:schemeClr val="tx2"/>
+                </a:solidFill>
+              </a:rPr>
+              <a:t>Weekly reports</a:t>
+            </a:r>
+            <a:endParaRPr lang="en-US" sz="1500" dirty="0"/>
+          </a:p>
+        </p:txBody>
+      </p:sp>
+      <p:sp>
+        <p:nvSpPr>
+          <p:cNvPr id="18" name="Reason text 3"/>
+          <p:cNvSpPr txBox="1"/>
+          <p:nvPr/>
+        </p:nvSpPr>
+        <p:spPr>
+          <a:xfrm>
+            <a:off x="6263640" y="2148840"/>
+            <a:ext cx="2286000" cy="566928"/>
+          </a:xfrm>
+          <a:prstGeom prst="rect">
+            <a:avLst/>
+          </a:prstGeom>
+          <a:noFill/>
+          <a:ln/>
+        </p:spPr>
+        <p:txBody>
+          <a:bodyPr wrap="square" lIns="0" tIns="0" rIns="0" bIns="0" rtlCol="0" anchor="t"/>
+          <a:lstStyle/>
+          <a:p>
+            <a:pPr indent="0" marL="0">
+              <a:buNone/>
+            </a:pPr>
+            <a:r>
+              <a:rPr lang="en-US" sz="1300" dirty="0">
+                <a:solidFill>
+                  <a:schemeClr val="tx1"/>
+                </a:solidFill>
+              </a:rPr>
+              <a:t>See exactly what your money does</a:t>
+            </a:r>
+            <a:endParaRPr lang="en-US" sz="1300" dirty="0"/>
+          </a:p>
+        </p:txBody>
+      </p:sp>
+      <p:sp>
+        <p:nvSpPr>
+          <p:cNvPr id="19" name="Reason card 4"/>
+          <p:cNvSpPr/>
+          <p:nvPr/>
+        </p:nvSpPr>
+        <p:spPr>
+          <a:xfrm>
+            <a:off x="457200" y="2971800"/>
+            <a:ext cx="2606040" cy="1463040"/>
+          </a:xfrm>
+          <a:prstGeom prst="roundRect">
+            <a:avLst>
+              <a:gd name="adj" fmla="val 7500"/>
+            </a:avLst>
+          </a:prstGeom>
+          <a:solidFill>
+            <a:schemeClr val="tx2"/>
+          </a:solidFill>
+          <a:ln/>
+        </p:spPr>
+      </p:sp>
+      <p:sp>
+        <p:nvSpPr>
+          <p:cNvPr id="20" name="No long-term contract circle"/>
+          <p:cNvSpPr/>
+          <p:nvPr/>
+        </p:nvSpPr>
+        <p:spPr>
+          <a:xfrm>
+            <a:off x="640080" y="3172968"/>
+            <a:ext cx="502920" cy="502920"/>
+          </a:xfrm>
+          <a:prstGeom prst="ellipse">
+            <a:avLst/>
+          </a:prstGeom>
+          <a:solidFill>
+            <a:schemeClr val="accent4"/>
+          </a:solidFill>
+          <a:ln/>
+        </p:spPr>
+      </p:sp>
+      <p:pic>
+        <p:nvPicPr>
+          <p:cNvPr id="21" name="No long-term contract icon" descr="No long-term contract">    </p:cNvPr>
+          <p:cNvPicPr>
+            <a:picLocks noChangeAspect="1"/>
+          </p:cNvPicPr>
+          <p:nvPr/>
+        </p:nvPicPr>
+        <p:blipFill>
+          <a:blip r:embed="rId4"/>
+          <a:stretch>
+            <a:fillRect/>
+          </a:stretch>
+        </p:blipFill>
+        <p:spPr>
+          <a:xfrm>
+            <a:off x="775868" y="3308756"/>
+            <a:ext cx="231343" cy="231343"/>
+          </a:xfrm>
+          <a:prstGeom prst="rect">
+            <a:avLst/>
+          </a:prstGeom>
+        </p:spPr>
+      </p:pic>
+      <p:sp>
+        <p:nvSpPr>
+          <p:cNvPr id="22" name="Reason title 4"/>
+          <p:cNvSpPr txBox="1"/>
+          <p:nvPr/>
+        </p:nvSpPr>
+        <p:spPr>
+          <a:xfrm>
+            <a:off x="1280160" y="3172968"/>
+            <a:ext cx="1691640" cy="502920"/>
+          </a:xfrm>
+          <a:prstGeom prst="rect">
+            <a:avLst/>
+          </a:prstGeom>
+          <a:noFill/>
+          <a:ln/>
+        </p:spPr>
+        <p:txBody>
+          <a:bodyPr wrap="square" lIns="0" tIns="0" rIns="0" bIns="0" rtlCol="0" anchor="ctr"/>
+          <a:lstStyle/>
+          <a:p>
+            <a:pPr indent="0" marL="0">
+              <a:buNone/>
+            </a:pPr>
+            <a:r>
+              <a:rPr lang="en-US" sz="1500" b="1" dirty="0">
+                <a:solidFill>
+                  <a:schemeClr val="bg1"/>
+                </a:solidFill>
+              </a:rPr>
+              <a:t>No long-term contract</a:t>
+            </a:r>
+            <a:endParaRPr lang="en-US" sz="1500" dirty="0"/>
+          </a:p>
+        </p:txBody>
+      </p:sp>
+      <p:sp>
+        <p:nvSpPr>
+          <p:cNvPr id="23" name="Reason text 4"/>
+          <p:cNvSpPr txBox="1"/>
+          <p:nvPr/>
+        </p:nvSpPr>
+        <p:spPr>
+          <a:xfrm>
+            <a:off x="640080" y="3794760"/>
+            <a:ext cx="2286000" cy="566928"/>
+          </a:xfrm>
+          <a:prstGeom prst="rect">
+            <a:avLst/>
+          </a:prstGeom>
+          <a:noFill/>
+          <a:ln/>
+        </p:spPr>
+        <p:txBody>
+          <a:bodyPr wrap="square" lIns="0" tIns="0" rIns="0" bIns="0" rtlCol="0" anchor="t"/>
+          <a:lstStyle/>
+          <a:p>
+            <a:pPr indent="0" marL="0">
+              <a:buNone/>
+            </a:pPr>
+            <a:r>
+              <a:rPr lang="en-US" sz="1300" dirty="0">
+                <a:solidFill>
+                  <a:schemeClr val="accent2"/>
+                </a:solidFill>
+              </a:rPr>
+              <a:t>Month to month: stay because it works</a:t>
+            </a:r>
+            <a:endParaRPr lang="en-US" sz="1300" dirty="0"/>
+          </a:p>
+        </p:txBody>
+      </p:sp>
+      <p:sp>
+        <p:nvSpPr>
+          <p:cNvPr id="24" name="Reason card 5"/>
+          <p:cNvSpPr/>
+          <p:nvPr/>
+        </p:nvSpPr>
+        <p:spPr>
+          <a:xfrm>
+            <a:off x="3268980" y="2971800"/>
+            <a:ext cx="2606040" cy="1463040"/>
+          </a:xfrm>
+          <a:prstGeom prst="roundRect">
+            <a:avLst>
+              <a:gd name="adj" fmla="val 7500"/>
+            </a:avLst>
+          </a:prstGeom>
+          <a:solidFill>
+            <a:schemeClr val="tx2"/>
+          </a:solidFill>
+          <a:ln/>
+        </p:spPr>
+      </p:sp>
+      <p:sp>
+        <p:nvSpPr>
+          <p:cNvPr id="25" name="Free audit circle"/>
+          <p:cNvSpPr/>
+          <p:nvPr/>
+        </p:nvSpPr>
+        <p:spPr>
+          <a:xfrm>
+            <a:off x="3451860" y="3172968"/>
+            <a:ext cx="502920" cy="502920"/>
+          </a:xfrm>
+          <a:prstGeom prst="ellipse">
+            <a:avLst/>
+          </a:prstGeom>
+          <a:solidFill>
+            <a:schemeClr val="accent4"/>
+          </a:solidFill>
+          <a:ln/>
+        </p:spPr>
+      </p:sp>
+      <p:pic>
+        <p:nvPicPr>
+          <p:cNvPr id="26" name="Free audit icon" descr="Free audit">    </p:cNvPr>
+          <p:cNvPicPr>
+            <a:picLocks noChangeAspect="1"/>
+          </p:cNvPicPr>
+          <p:nvPr/>
+        </p:nvPicPr>
+        <p:blipFill>
+          <a:blip r:embed="rId5"/>
+          <a:stretch>
+            <a:fillRect/>
+          </a:stretch>
+        </p:blipFill>
+        <p:spPr>
+          <a:xfrm>
+            <a:off x="3587648" y="3308756"/>
+            <a:ext cx="231343" cy="231343"/>
+          </a:xfrm>
+          <a:prstGeom prst="rect">
+            <a:avLst/>
+          </a:prstGeom>
+        </p:spPr>
+      </p:pic>
+      <p:sp>
+        <p:nvSpPr>
+          <p:cNvPr id="27" name="Reason title 5"/>
+          <p:cNvSpPr txBox="1"/>
+          <p:nvPr/>
+        </p:nvSpPr>
+        <p:spPr>
+          <a:xfrm>
+            <a:off x="4091940" y="3172968"/>
+            <a:ext cx="1691640" cy="502920"/>
+          </a:xfrm>
+          <a:prstGeom prst="rect">
+            <a:avLst/>
+          </a:prstGeom>
+          <a:noFill/>
+          <a:ln/>
+        </p:spPr>
+        <p:txBody>
+          <a:bodyPr wrap="square" lIns="0" tIns="0" rIns="0" bIns="0" rtlCol="0" anchor="ctr"/>
+          <a:lstStyle/>
+          <a:p>
+            <a:pPr indent="0" marL="0">
+              <a:buNone/>
+            </a:pPr>
+            <a:r>
+              <a:rPr lang="en-US" sz="1500" b="1" dirty="0">
+                <a:solidFill>
+                  <a:schemeClr val="bg1"/>
+                </a:solidFill>
+              </a:rPr>
+              <a:t>Free audit</a:t>
+            </a:r>
+            <a:endParaRPr lang="en-US" sz="1500" dirty="0"/>
+          </a:p>
+        </p:txBody>
+      </p:sp>
+      <p:sp>
+        <p:nvSpPr>
+          <p:cNvPr id="28" name="Reason text 5"/>
+          <p:cNvSpPr txBox="1"/>
+          <p:nvPr/>
+        </p:nvSpPr>
+        <p:spPr>
+          <a:xfrm>
+            <a:off x="3451860" y="3794760"/>
+            <a:ext cx="2286000" cy="566928"/>
+          </a:xfrm>
+          <a:prstGeom prst="rect">
+            <a:avLst/>
+          </a:prstGeom>
+          <a:noFill/>
+          <a:ln/>
+        </p:spPr>
+        <p:txBody>
+          <a:bodyPr wrap="square" lIns="0" tIns="0" rIns="0" bIns="0" rtlCol="0" anchor="t"/>
+          <a:lstStyle/>
+          <a:p>
+            <a:pPr indent="0" marL="0">
+              <a:buNone/>
+            </a:pPr>
+            <a:r>
+              <a:rPr lang="en-US" sz="1300" dirty="0">
+                <a:solidFill>
+                  <a:schemeClr val="accent2"/>
+                </a:solidFill>
+              </a:rPr>
+              <a:t>A free review of your pages in week 1</a:t>
+            </a:r>
+            <a:endParaRPr lang="en-US" sz="1300" dirty="0"/>
+          </a:p>
+        </p:txBody>
+      </p:sp>
+      <p:sp>
+        <p:nvSpPr>
+          <p:cNvPr id="29" name="Reason card 6"/>
+          <p:cNvSpPr/>
+          <p:nvPr/>
+        </p:nvSpPr>
+        <p:spPr>
+          <a:xfrm>
+            <a:off x="6080760" y="2971800"/>
+            <a:ext cx="2606040" cy="1463040"/>
+          </a:xfrm>
+          <a:prstGeom prst="roundRect">
+            <a:avLst>
+              <a:gd name="adj" fmla="val 7500"/>
+            </a:avLst>
+          </a:prstGeom>
+          <a:solidFill>
+            <a:schemeClr val="tx2"/>
+          </a:solidFill>
+          <a:ln/>
+        </p:spPr>
+      </p:sp>
+      <p:sp>
+        <p:nvSpPr>
+          <p:cNvPr id="30" name="Reach guarantee circle"/>
+          <p:cNvSpPr/>
+          <p:nvPr/>
+        </p:nvSpPr>
+        <p:spPr>
+          <a:xfrm>
+            <a:off x="6263640" y="3172968"/>
+            <a:ext cx="502920" cy="502920"/>
+          </a:xfrm>
+          <a:prstGeom prst="ellipse">
+            <a:avLst/>
+          </a:prstGeom>
+          <a:solidFill>
+            <a:schemeClr val="accent4"/>
+          </a:solidFill>
+          <a:ln/>
+        </p:spPr>
+      </p:sp>
+      <p:pic>
+        <p:nvPicPr>
+          <p:cNvPr id="31" name="Reach guarantee icon" descr="Reach guarantee">    </p:cNvPr>
+          <p:cNvPicPr>
+            <a:picLocks noChangeAspect="1"/>
+          </p:cNvPicPr>
+          <p:nvPr/>
+        </p:nvPicPr>
+        <p:blipFill>
+          <a:blip r:embed="rId6"/>
+          <a:stretch>
+            <a:fillRect/>
+          </a:stretch>
+        </p:blipFill>
+        <p:spPr>
+          <a:xfrm>
+            <a:off x="6399428" y="3308756"/>
+            <a:ext cx="231343" cy="231343"/>
+          </a:xfrm>
+          <a:prstGeom prst="rect">
+            <a:avLst/>
+          </a:prstGeom>
+        </p:spPr>
+      </p:pic>
+      <p:sp>
+        <p:nvSpPr>
+          <p:cNvPr id="32" name="Reason title 6"/>
+          <p:cNvSpPr txBox="1"/>
+          <p:nvPr/>
+        </p:nvSpPr>
+        <p:spPr>
+          <a:xfrm>
+            <a:off x="6903720" y="3172968"/>
+            <a:ext cx="1691640" cy="502920"/>
+          </a:xfrm>
+          <a:prstGeom prst="rect">
+            <a:avLst/>
+          </a:prstGeom>
+          <a:noFill/>
+          <a:ln/>
+        </p:spPr>
+        <p:txBody>
+          <a:bodyPr wrap="square" lIns="0" tIns="0" rIns="0" bIns="0" rtlCol="0" anchor="ctr"/>
+          <a:lstStyle/>
+          <a:p>
+            <a:pPr indent="0" marL="0">
+              <a:buNone/>
+            </a:pPr>
+            <a:r>
+              <a:rPr lang="en-US" sz="1500" b="1" dirty="0">
+                <a:solidFill>
+                  <a:schemeClr val="bg1"/>
+                </a:solidFill>
+              </a:rPr>
+              <a:t>Reach guarantee</a:t>
+            </a:r>
+            <a:endParaRPr lang="en-US" sz="1500" dirty="0"/>
+          </a:p>
+        </p:txBody>
+      </p:sp>
+      <p:sp>
+        <p:nvSpPr>
+          <p:cNvPr id="33" name="Reason text 6"/>
+          <p:cNvSpPr txBox="1"/>
+          <p:nvPr/>
+        </p:nvSpPr>
+        <p:spPr>
+          <a:xfrm>
+            <a:off x="6263640" y="3794760"/>
+            <a:ext cx="2286000" cy="566928"/>
+          </a:xfrm>
+          <a:prstGeom prst="rect">
+            <a:avLst/>
+          </a:prstGeom>
+          <a:noFill/>
+          <a:ln/>
+        </p:spPr>
+        <p:txBody>
+          <a:bodyPr wrap="square" lIns="0" tIns="0" rIns="0" bIns="0" rtlCol="0" anchor="t"/>
+          <a:lstStyle/>
+          <a:p>
+            <a:pPr indent="0" marL="0">
+              <a:buNone/>
+            </a:pPr>
+            <a:r>
+              <a:rPr lang="en-US" sz="1300" dirty="0">
+                <a:solidFill>
+                  <a:schemeClr val="accent2"/>
+                </a:solidFill>
+              </a:rPr>
+              <a:t>Miss the reach target? An extra week of ads at no fee</a:t>
+            </a:r>
+            <a:endParaRPr lang="en-US" sz="1300" dirty="0"/>
+          </a:p>
+        </p:txBody>
+      </p:sp>
+      <p:sp>
+        <p:nvSpPr>
+          <p:cNvPr id="25" name="Slide Number Placeholder 0"/>
+          <p:cNvSpPr>
+            <a:spLocks noGrp="1"/>
+          </p:cNvSpPr>
+          <p:nvPr>
+            <p:ph type="sldNum" sz="quarter" idx="4294967295"/>
+          </p:nvPr>
+        </p:nvSpPr>
+        <p:spPr>
+          <a:xfrm>
+            <a:off x="8229600" y="4800600"/>
+            <a:ext cx="457200" cy="228600"/>
+          </a:xfrm>
+          <a:prstGeom prst="rect">
+            <a:avLst/>
+          </a:prstGeom>
+          <a:extLst>
+            <a:ext uri="{C572A759-6A51-4108-AA02-DFA0A04FC94B}">
+              <ma14:wrappingTextBoxFlag xmlns:ma14="http://schemas.microsoft.com/office/mac/drawingml/2011/main" val="0"/>
+            </a:ext>
+          </a:extLst>
+        </p:spPr>
+        <p:txBody>
+          <a:bodyPr lIns="0" tIns="0" rIns="0" bIns="0" anchor="ctr"/>
+          <a:lstStyle>
+            <a:lvl1pPr>
+              <a:defRPr sz="1000">
+                <a:solidFill>
+                  <a:schemeClr val="accent5"/>
+                </a:solidFill>
+              </a:defRPr>
+            </a:lvl1pPr>
+          </a:lstStyle>
+          <a:p>
+            <a:pPr algn="r"/>
+            <a:fld id="{F7021451-1387-4CA6-816F-3879F97B5CBC}" type="slidenum">
+              <a:rPr b="0" lang="en-US"/>
+              <a:t>12</a:t>
+            </a:fld>
+            <a:endParaRPr lang="en-US"/>
+          </a:p>
+        </p:txBody>
+      </p:sp>
+    </p:spTree>
+  </p:cSld>
+  <p:clrMapOvr>
+    <a:masterClrMapping/>
+  </p:clrMapOvr>
+</p:sld>
+</file>
+
+<file path=ppt/slides/slide13.xml><?xml version="1.0" encoding="utf-8"?>
+<p:sld xmlns:a="http://schemas.openxmlformats.org/drawingml/2006/main" xmlns:r="http://schemas.openxmlformats.org/officeDocument/2006/relationships" xmlns:p="http://schemas.openxmlformats.org/presentationml/2006/main">
+  <p:cSld name="Slide 13">
+    <p:spTree>
+      <p:nvGrpSpPr>
+        <p:cNvPr id="1" name=""/>
+        <p:cNvGrpSpPr/>
+        <p:nvPr/>
+      </p:nvGrpSpPr>
+      <p:grpSpPr>
+        <a:xfrm>
+          <a:off x="0" y="0"/>
+          <a:ext cx="0" cy="0"/>
+          <a:chOff x="0" y="0"/>
+          <a:chExt cx="0" cy="0"/>
+        </a:xfrm>
+      </p:grpSpPr>
+      <p:sp>
+        <p:nvSpPr>
+          <p:cNvPr id="2" name="Text 0"/>
+          <p:cNvSpPr/>
+          <p:nvPr>
+            <p:ph idx="100" type="body" hasCustomPrompt="1"/>
+          </p:nvPr>
+        </p:nvSpPr>
+        <p:spPr>
+          <a:xfrm>
+            <a:off x="548640" y="914400"/>
+            <a:ext cx="4389120" cy="320040"/>
+          </a:xfrm>
+          <a:prstGeom prst="rect">
+            <a:avLst/>
+          </a:prstGeom>
+          <a:noFill/>
+          <a:ln/>
+        </p:spPr>
+        <p:txBody>
+          <a:bodyPr wrap="square" lIns="0" tIns="0" rIns="0" bIns="0" rtlCol="0"/>
+          <a:lstStyle/>
+          <a:p>
+            <a:pPr indent="0" marL="0">
+              <a:buNone/>
+            </a:pPr>
+            <a:r>
+              <a:rPr lang="en-US" sz="1200" b="1" spc="300" kern="0" dirty="0">
+                <a:solidFill>
+                  <a:schemeClr val="accent2"/>
+                </a:solidFill>
+              </a:rPr>
+              <a:t>12  CONCLUSION</a:t>
+            </a:r>
+            <a:endParaRPr lang="en-US" sz="1200" dirty="0"/>
+          </a:p>
+        </p:txBody>
+      </p:sp>
+      <p:sp>
+        <p:nvSpPr>
+          <p:cNvPr id="3" name="Text 0"/>
+          <p:cNvSpPr/>
+          <p:nvPr>
+            <p:ph idx="101" type="title" hasCustomPrompt="1"/>
+          </p:nvPr>
+        </p:nvSpPr>
+        <p:spPr>
+          <a:xfrm>
             <a:off x="548640" y="1325880"/>
             <a:ext cx="4389120" cy="1463040"/>
           </a:xfrm>
@@ -3476,7 +5499,7 @@
                   <a:schemeClr val="accent2"/>
                 </a:solidFill>
               </a:rPr>
-              <a:t>We're ready to help The Daily Cup grow and reach more customers.</a:t>
+              <a:t>Start this month and see results within 30 days.</a:t>
             </a:r>
             <a:endParaRPr lang="en-US" sz="1500" dirty="0"/>
           </a:p>
@@ -3484,43 +5507,29 @@
       </p:sp>
       <p:sp>
         <p:nvSpPr>
-          <p:cNvPr id="5" name="Contact details"/>
-          <p:cNvSpPr txBox="1"/>
-          <p:nvPr/>
-        </p:nvSpPr>
-        <p:spPr>
-          <a:xfrm>
-            <a:off x="548640" y="4069080"/>
-            <a:ext cx="4389120" cy="320040"/>
-          </a:xfrm>
-          <a:prstGeom prst="rect">
-            <a:avLst/>
-          </a:prstGeom>
-          <a:noFill/>
-          <a:ln/>
-        </p:spPr>
-        <p:txBody>
-          <a:bodyPr wrap="square" lIns="0" tIns="0" rIns="0" bIns="0" rtlCol="0" anchor="ctr"/>
-          <a:lstStyle/>
-          <a:p>
-            <a:pPr indent="0" marL="0">
-              <a:buNone/>
-            </a:pPr>
-            <a:r>
-              <a:rPr lang="en-US" sz="1300" dirty="0">
-                <a:solidFill>
-                  <a:schemeClr val="accent2"/>
-                </a:solidFill>
-              </a:rPr>
-              <a:t>BrandBrew Marketing   |   [Phone]   |   [Email]</a:t>
-            </a:r>
-            <a:endParaRPr lang="en-US" sz="1300" dirty="0"/>
-          </a:p>
-        </p:txBody>
+          <p:cNvPr id="5" name="Offer badge"/>
+          <p:cNvSpPr/>
+          <p:nvPr/>
+        </p:nvSpPr>
+        <p:spPr>
+          <a:xfrm>
+            <a:off x="548640" y="3429000"/>
+            <a:ext cx="4206240" cy="548640"/>
+          </a:xfrm>
+          <a:prstGeom prst="roundRect">
+            <a:avLst>
+              <a:gd name="adj" fmla="val 50000"/>
+            </a:avLst>
+          </a:prstGeom>
+          <a:solidFill>
+            <a:schemeClr val="accent1"/>
+          </a:solidFill>
+          <a:ln/>
+        </p:spPr>
       </p:sp>
       <p:pic>
         <p:nvPicPr>
-          <p:cNvPr id="6" name="Partnership illustration" descr="Partnership illustration">    </p:cNvPr>
+          <p:cNvPr id="6" name="Offer icon" descr="preencoded.png">    </p:cNvPr>
           <p:cNvPicPr>
             <a:picLocks noChangeAspect="1"/>
           </p:cNvPicPr>
@@ -3528,6 +5537,102 @@
         </p:nvPicPr>
         <p:blipFill>
           <a:blip r:embed="rId1"/>
+          <a:stretch>
+            <a:fillRect/>
+          </a:stretch>
+        </p:blipFill>
+        <p:spPr>
+          <a:xfrm>
+            <a:off x="731520" y="3547872"/>
+            <a:ext cx="310896" cy="310896"/>
+          </a:xfrm>
+          <a:prstGeom prst="rect">
+            <a:avLst/>
+          </a:prstGeom>
+        </p:spPr>
+      </p:pic>
+      <p:sp>
+        <p:nvSpPr>
+          <p:cNvPr id="7" name="Offer text"/>
+          <p:cNvSpPr txBox="1"/>
+          <p:nvPr/>
+        </p:nvSpPr>
+        <p:spPr>
+          <a:xfrm>
+            <a:off x="1188720" y="3429000"/>
+            <a:ext cx="3474720" cy="548640"/>
+          </a:xfrm>
+          <a:prstGeom prst="rect">
+            <a:avLst/>
+          </a:prstGeom>
+          <a:noFill/>
+          <a:ln/>
+        </p:spPr>
+        <p:txBody>
+          <a:bodyPr wrap="square" lIns="0" tIns="0" rIns="0" bIns="0" rtlCol="0" anchor="ctr"/>
+          <a:lstStyle/>
+          <a:p>
+            <a:pPr indent="0" marL="0">
+              <a:buNone/>
+            </a:pPr>
+            <a:r>
+              <a:rPr lang="en-US" sz="1400" b="1" dirty="0">
+                <a:solidFill>
+                  <a:schemeClr val="bg1"/>
+                </a:solidFill>
+              </a:rPr>
+              <a:t>Start this month: free menu photo shoot</a:t>
+            </a:r>
+            <a:endParaRPr lang="en-US" sz="1400" dirty="0"/>
+          </a:p>
+        </p:txBody>
+      </p:sp>
+      <p:sp>
+        <p:nvSpPr>
+          <p:cNvPr id="8" name="Contact details"/>
+          <p:cNvSpPr txBox="1"/>
+          <p:nvPr/>
+        </p:nvSpPr>
+        <p:spPr>
+          <a:xfrm>
+            <a:off x="548640" y="4206240"/>
+            <a:ext cx="4389120" cy="320040"/>
+          </a:xfrm>
+          <a:prstGeom prst="rect">
+            <a:avLst/>
+          </a:prstGeom>
+          <a:noFill/>
+          <a:ln/>
+        </p:spPr>
+        <p:txBody>
+          <a:bodyPr wrap="square" lIns="0" tIns="0" rIns="0" bIns="0" rtlCol="0" anchor="ctr"/>
+          <a:lstStyle/>
+          <a:p>
+            <a:pPr indent="0" marL="0">
+              <a:buNone/>
+            </a:pPr>
+            <a:r>
+              <a:rPr lang="en-US" sz="1300" dirty="0">
+                <a:solidFill>
+                  <a:schemeClr val="accent2"/>
+                </a:solidFill>
+              </a:rPr>
+              <a:t>BrandBrew Marketing   |   [Phone]   |   [Email]</a:t>
+            </a:r>
+            <a:endParaRPr lang="en-US" sz="1300" dirty="0"/>
+          </a:p>
+        </p:txBody>
+      </p:sp>
+      <p:pic>
+        <p:nvPicPr>
+          <p:cNvPr id="9" name="Next steps illustration" descr="Next steps illustration">    </p:cNvPr>
+          <p:cNvPicPr>
+            <a:picLocks noChangeAspect="1"/>
+          </p:cNvPicPr>
+          <p:nvPr/>
+        </p:nvPicPr>
+        <p:blipFill>
+          <a:blip r:embed="rId2"/>
           <a:stretch>
             <a:fillRect/>
           </a:stretch>
@@ -4863,7 +6968,7 @@
                   <a:schemeClr val="tx1"/>
                 </a:solidFill>
               </a:rPr>
-              <a:t>Regular posts, reels and stories</a:t>
+              <a:t>12 posts, 8 reels and daily stories a month</a:t>
             </a:r>
             <a:endParaRPr lang="en-US" sz="1300" dirty="0"/>
           </a:p>
@@ -4981,7 +7086,7 @@
                   <a:schemeClr val="tx1"/>
                 </a:solidFill>
               </a:rPr>
-              <a:t>Facebook and Instagram ads</a:t>
+              <a:t>Targeted Facebook and Instagram ads near the café</a:t>
             </a:r>
             <a:endParaRPr lang="en-US" sz="1300" dirty="0"/>
           </a:p>
@@ -5099,7 +7204,7 @@
                   <a:schemeClr val="tx1"/>
                 </a:solidFill>
               </a:rPr>
-              <a:t>Attractive photos and videos of products</a:t>
+              <a:t>A professional photo and video shoot every month</a:t>
             </a:r>
             <a:endParaRPr lang="en-US" sz="1300" dirty="0"/>
           </a:p>
@@ -5217,7 +7322,7 @@
                   <a:schemeClr val="tx1"/>
                 </a:solidFill>
               </a:rPr>
-              <a:t>Discounts and special deals</a:t>
+              <a:t>2 special offers a month to bring people in</a:t>
             </a:r>
             <a:endParaRPr lang="en-US" sz="1300" dirty="0"/>
           </a:p>
@@ -8702,7 +10807,7 @@
                 <a:ea typeface="Cambria" pitchFamily="34" charset="-122"/>
                 <a:cs typeface="Cambria" pitchFamily="34" charset="-120"/>
               </a:rPr>
-              <a:t>What We Aim for in Month One</a:t>
+              <a:t>Our Month-One Targets</a:t>
             </a:r>
             <a:endParaRPr lang="en-US" sz="3200" dirty="0"/>
           </a:p>
@@ -8710,18 +10815,18 @@
       </p:sp>
       <p:sp>
         <p:nvSpPr>
-          <p:cNvPr id="4" name="Result card 1"/>
+          <p:cNvPr id="4" name="Target card 1"/>
           <p:cNvSpPr/>
           <p:nvPr/>
         </p:nvSpPr>
         <p:spPr>
           <a:xfrm>
             <a:off x="457200" y="1325880"/>
-            <a:ext cx="1517904" cy="1828800"/>
+            <a:ext cx="1920240" cy="1874520"/>
           </a:xfrm>
           <a:prstGeom prst="roundRect">
             <a:avLst>
-              <a:gd name="adj" fmla="val 7229"/>
+              <a:gd name="adj" fmla="val 5854"/>
             </a:avLst>
           </a:prstGeom>
           <a:solidFill>
@@ -8732,14 +10837,14 @@
       </p:sp>
       <p:sp>
         <p:nvSpPr>
-          <p:cNvPr id="5" name="Followers circle"/>
+          <p:cNvPr id="5" name="Target 1 circle"/>
           <p:cNvSpPr/>
           <p:nvPr/>
         </p:nvSpPr>
         <p:spPr>
           <a:xfrm>
-            <a:off x="621792" y="1490472"/>
-            <a:ext cx="548640" cy="548640"/>
+            <a:off x="640080" y="1481328"/>
+            <a:ext cx="475488" cy="475488"/>
           </a:xfrm>
           <a:prstGeom prst="ellipse">
             <a:avLst/>
@@ -8752,7 +10857,7 @@
       </p:sp>
       <p:pic>
         <p:nvPicPr>
-          <p:cNvPr id="6" name="Followers icon" descr="Followers">    </p:cNvPr>
+          <p:cNvPr id="6" name="Target 1 icon" descr="Target 1">    </p:cNvPr>
           <p:cNvPicPr>
             <a:picLocks noChangeAspect="1"/>
           </p:cNvPicPr>
@@ -8766,8 +10871,8 @@
         </p:blipFill>
         <p:spPr>
           <a:xfrm>
-            <a:off x="769925" y="1638605"/>
-            <a:ext cx="252374" cy="252374"/>
+            <a:off x="768462" y="1609710"/>
+            <a:ext cx="218724" cy="218724"/>
           </a:xfrm>
           <a:prstGeom prst="rect">
             <a:avLst/>
@@ -8776,27 +10881,124 @@
       </p:pic>
       <p:sp>
         <p:nvSpPr>
-          <p:cNvPr id="7" name="Increase 1 circle"/>
+          <p:cNvPr id="7" name="Target value 1"/>
+          <p:cNvSpPr txBox="1"/>
+          <p:nvPr/>
+        </p:nvSpPr>
+        <p:spPr>
+          <a:xfrm>
+            <a:off x="640080" y="2057400"/>
+            <a:ext cx="1600200" cy="548640"/>
+          </a:xfrm>
+          <a:prstGeom prst="rect">
+            <a:avLst/>
+          </a:prstGeom>
+          <a:noFill/>
+          <a:ln/>
+        </p:spPr>
+        <p:txBody>
+          <a:bodyPr wrap="square" lIns="0" tIns="0" rIns="0" bIns="0" rtlCol="0" anchor="ctr"/>
+          <a:lstStyle/>
+          <a:p>
+            <a:pPr indent="0" marL="0">
+              <a:buNone/>
+            </a:pPr>
+            <a:r>
+              <a:rPr lang="en-US" sz="3400" b="1" dirty="0">
+                <a:solidFill>
+                  <a:schemeClr val="accent1"/>
+                </a:solidFill>
+                <a:latin typeface="Cambria" pitchFamily="34" charset="0"/>
+                <a:ea typeface="Cambria" pitchFamily="34" charset="-122"/>
+                <a:cs typeface="Cambria" pitchFamily="34" charset="-120"/>
+              </a:rPr>
+              <a:t>40K+</a:t>
+            </a:r>
+            <a:endParaRPr lang="en-US" sz="3400" dirty="0"/>
+          </a:p>
+        </p:txBody>
+      </p:sp>
+      <p:sp>
+        <p:nvSpPr>
+          <p:cNvPr id="8" name="Target label 1"/>
+          <p:cNvSpPr txBox="1"/>
+          <p:nvPr/>
+        </p:nvSpPr>
+        <p:spPr>
+          <a:xfrm>
+            <a:off x="640080" y="2633472"/>
+            <a:ext cx="1600200" cy="502920"/>
+          </a:xfrm>
+          <a:prstGeom prst="rect">
+            <a:avLst/>
+          </a:prstGeom>
+          <a:noFill/>
+          <a:ln/>
+        </p:spPr>
+        <p:txBody>
+          <a:bodyPr wrap="square" lIns="0" tIns="0" rIns="0" bIns="0" rtlCol="0" anchor="t"/>
+          <a:lstStyle/>
+          <a:p>
+            <a:pPr indent="0" marL="0">
+              <a:buNone/>
+            </a:pPr>
+            <a:r>
+              <a:rPr lang="en-US" sz="1200" dirty="0">
+                <a:solidFill>
+                  <a:schemeClr val="tx2"/>
+                </a:solidFill>
+              </a:rPr>
+              <a:t>people nearby see The Daily Cup</a:t>
+            </a:r>
+            <a:endParaRPr lang="en-US" sz="1200" dirty="0"/>
+          </a:p>
+        </p:txBody>
+      </p:sp>
+      <p:sp>
+        <p:nvSpPr>
+          <p:cNvPr id="9" name="Target card 2"/>
           <p:cNvSpPr/>
           <p:nvPr/>
         </p:nvSpPr>
         <p:spPr>
           <a:xfrm>
-            <a:off x="1426464" y="1536192"/>
-            <a:ext cx="384048" cy="384048"/>
+            <a:off x="2560320" y="1325880"/>
+            <a:ext cx="1920240" cy="1874520"/>
+          </a:xfrm>
+          <a:prstGeom prst="roundRect">
+            <a:avLst>
+              <a:gd name="adj" fmla="val 5854"/>
+            </a:avLst>
+          </a:prstGeom>
+          <a:solidFill>
+            <a:schemeClr val="bg2"/>
+          </a:solidFill>
+          <a:ln/>
+        </p:spPr>
+      </p:sp>
+      <p:sp>
+        <p:nvSpPr>
+          <p:cNvPr id="10" name="Target 2 circle"/>
+          <p:cNvSpPr/>
+          <p:nvPr/>
+        </p:nvSpPr>
+        <p:spPr>
+          <a:xfrm>
+            <a:off x="2743200" y="1481328"/>
+            <a:ext cx="475488" cy="475488"/>
           </a:xfrm>
           <a:prstGeom prst="ellipse">
             <a:avLst/>
           </a:prstGeom>
           <a:solidFill>
-            <a:schemeClr val="accent4"/>
+            <a:schemeClr val="tx2"/>
           </a:solidFill>
           <a:ln/>
         </p:spPr>
       </p:sp>
       <p:pic>
         <p:nvPicPr>
-          <p:cNvPr id="8" name="Increase 1 icon" descr="Increase 1">    </p:cNvPr>
+          <p:cNvPr id="11" name="Target 2 icon" descr="Target 2">    </p:cNvPr>
           <p:cNvPicPr>
             <a:picLocks noChangeAspect="1"/>
           </p:cNvPicPr>
@@ -8810,8 +11012,8 @@
         </p:blipFill>
         <p:spPr>
           <a:xfrm>
-            <a:off x="1530157" y="1639885"/>
-            <a:ext cx="176662" cy="176662"/>
+            <a:off x="2871582" y="1609710"/>
+            <a:ext cx="218724" cy="218724"/>
           </a:xfrm>
           <a:prstGeom prst="rect">
             <a:avLst/>
@@ -8820,14 +11022,53 @@
       </p:pic>
       <p:sp>
         <p:nvSpPr>
-          <p:cNvPr id="9" name="Result text 1"/>
+          <p:cNvPr id="12" name="Target value 2"/>
           <p:cNvSpPr txBox="1"/>
           <p:nvPr/>
         </p:nvSpPr>
         <p:spPr>
           <a:xfrm>
-            <a:off x="621792" y="2194560"/>
-            <a:ext cx="1280160" cy="868680"/>
+            <a:off x="2743200" y="2057400"/>
+            <a:ext cx="1600200" cy="548640"/>
+          </a:xfrm>
+          <a:prstGeom prst="rect">
+            <a:avLst/>
+          </a:prstGeom>
+          <a:noFill/>
+          <a:ln/>
+        </p:spPr>
+        <p:txBody>
+          <a:bodyPr wrap="square" lIns="0" tIns="0" rIns="0" bIns="0" rtlCol="0" anchor="ctr"/>
+          <a:lstStyle/>
+          <a:p>
+            <a:pPr indent="0" marL="0">
+              <a:buNone/>
+            </a:pPr>
+            <a:r>
+              <a:rPr lang="en-US" sz="3400" b="1" dirty="0">
+                <a:solidFill>
+                  <a:schemeClr val="accent1"/>
+                </a:solidFill>
+                <a:latin typeface="Cambria" pitchFamily="34" charset="0"/>
+                <a:ea typeface="Cambria" pitchFamily="34" charset="-122"/>
+                <a:cs typeface="Cambria" pitchFamily="34" charset="-120"/>
+              </a:rPr>
+              <a:t>+500</a:t>
+            </a:r>
+            <a:endParaRPr lang="en-US" sz="3400" dirty="0"/>
+          </a:p>
+        </p:txBody>
+      </p:sp>
+      <p:sp>
+        <p:nvSpPr>
+          <p:cNvPr id="13" name="Target label 2"/>
+          <p:cNvSpPr txBox="1"/>
+          <p:nvPr/>
+        </p:nvSpPr>
+        <p:spPr>
+          <a:xfrm>
+            <a:off x="2743200" y="2633472"/>
+            <a:ext cx="1600200" cy="502920"/>
           </a:xfrm>
           <a:prstGeom prst="rect">
             <a:avLst/>
@@ -8843,45 +11084,31 @@
               <a:buNone/>
             </a:pPr>
             <a:r>
-              <a:rPr lang="en-US" sz="1500" b="1" dirty="0">
+              <a:rPr lang="en-US" sz="1200" dirty="0">
                 <a:solidFill>
                   <a:schemeClr val="tx2"/>
                 </a:solidFill>
               </a:rPr>
-              <a:t>More followers</a:t>
-            </a:r>
-            <a:endParaRPr lang="en-US" sz="1500" dirty="0"/>
-          </a:p>
-          <a:p>
-            <a:pPr indent="0" marL="0">
-              <a:buNone/>
-            </a:pPr>
-            <a:r>
-              <a:rPr lang="en-US" sz="1200" dirty="0">
-                <a:solidFill>
-                  <a:schemeClr val="tx1"/>
-                </a:solidFill>
-              </a:rPr>
-              <a:t>and engagement</a:t>
-            </a:r>
-            <a:endParaRPr lang="en-US" sz="1500" dirty="0"/>
-          </a:p>
-        </p:txBody>
-      </p:sp>
-      <p:sp>
-        <p:nvSpPr>
-          <p:cNvPr id="10" name="Result card 2"/>
+              <a:t>new Instagram followers</a:t>
+            </a:r>
+            <a:endParaRPr lang="en-US" sz="1200" dirty="0"/>
+          </a:p>
+        </p:txBody>
+      </p:sp>
+      <p:sp>
+        <p:nvSpPr>
+          <p:cNvPr id="14" name="Target card 3"/>
           <p:cNvSpPr/>
           <p:nvPr/>
         </p:nvSpPr>
         <p:spPr>
           <a:xfrm>
-            <a:off x="2139696" y="1325880"/>
-            <a:ext cx="1517904" cy="1828800"/>
+            <a:off x="4663440" y="1325880"/>
+            <a:ext cx="1920240" cy="1874520"/>
           </a:xfrm>
           <a:prstGeom prst="roundRect">
             <a:avLst>
-              <a:gd name="adj" fmla="val 7229"/>
+              <a:gd name="adj" fmla="val 5854"/>
             </a:avLst>
           </a:prstGeom>
           <a:solidFill>
@@ -8892,14 +11119,14 @@
       </p:sp>
       <p:sp>
         <p:nvSpPr>
-          <p:cNvPr id="11" name="Inquiries circle"/>
+          <p:cNvPr id="15" name="Target 3 circle"/>
           <p:cNvSpPr/>
           <p:nvPr/>
         </p:nvSpPr>
         <p:spPr>
           <a:xfrm>
-            <a:off x="2304288" y="1490472"/>
-            <a:ext cx="548640" cy="548640"/>
+            <a:off x="4846320" y="1481328"/>
+            <a:ext cx="475488" cy="475488"/>
           </a:xfrm>
           <a:prstGeom prst="ellipse">
             <a:avLst/>
@@ -8912,7 +11139,7 @@
       </p:sp>
       <p:pic>
         <p:nvPicPr>
-          <p:cNvPr id="12" name="Inquiries icon" descr="Inquiries">    </p:cNvPr>
+          <p:cNvPr id="16" name="Target 3 icon" descr="Target 3">    </p:cNvPr>
           <p:cNvPicPr>
             <a:picLocks noChangeAspect="1"/>
           </p:cNvPicPr>
@@ -8926,8 +11153,8 @@
         </p:blipFill>
         <p:spPr>
           <a:xfrm>
-            <a:off x="2452421" y="1638605"/>
-            <a:ext cx="252374" cy="252374"/>
+            <a:off x="4974702" y="1609710"/>
+            <a:ext cx="218724" cy="218724"/>
           </a:xfrm>
           <a:prstGeom prst="rect">
             <a:avLst/>
@@ -8936,17 +11163,94 @@
       </p:pic>
       <p:sp>
         <p:nvSpPr>
-          <p:cNvPr id="13" name="Increase 2 circle"/>
+          <p:cNvPr id="17" name="Target value 3"/>
+          <p:cNvSpPr txBox="1"/>
+          <p:nvPr/>
+        </p:nvSpPr>
+        <p:spPr>
+          <a:xfrm>
+            <a:off x="4846320" y="2057400"/>
+            <a:ext cx="1600200" cy="548640"/>
+          </a:xfrm>
+          <a:prstGeom prst="rect">
+            <a:avLst/>
+          </a:prstGeom>
+          <a:noFill/>
+          <a:ln/>
+        </p:spPr>
+        <p:txBody>
+          <a:bodyPr wrap="square" lIns="0" tIns="0" rIns="0" bIns="0" rtlCol="0" anchor="ctr"/>
+          <a:lstStyle/>
+          <a:p>
+            <a:pPr indent="0" marL="0">
+              <a:buNone/>
+            </a:pPr>
+            <a:r>
+              <a:rPr lang="en-US" sz="3400" b="1" dirty="0">
+                <a:solidFill>
+                  <a:schemeClr val="accent1"/>
+                </a:solidFill>
+                <a:latin typeface="Cambria" pitchFamily="34" charset="0"/>
+                <a:ea typeface="Cambria" pitchFamily="34" charset="-122"/>
+                <a:cs typeface="Cambria" pitchFamily="34" charset="-120"/>
+              </a:rPr>
+              <a:t>100+</a:t>
+            </a:r>
+            <a:endParaRPr lang="en-US" sz="3400" dirty="0"/>
+          </a:p>
+        </p:txBody>
+      </p:sp>
+      <p:sp>
+        <p:nvSpPr>
+          <p:cNvPr id="18" name="Target label 3"/>
+          <p:cNvSpPr txBox="1"/>
+          <p:nvPr/>
+        </p:nvSpPr>
+        <p:spPr>
+          <a:xfrm>
+            <a:off x="4846320" y="2633472"/>
+            <a:ext cx="1600200" cy="502920"/>
+          </a:xfrm>
+          <a:prstGeom prst="rect">
+            <a:avLst/>
+          </a:prstGeom>
+          <a:noFill/>
+          <a:ln/>
+        </p:spPr>
+        <p:txBody>
+          <a:bodyPr wrap="square" lIns="0" tIns="0" rIns="0" bIns="0" rtlCol="0" anchor="t"/>
+          <a:lstStyle/>
+          <a:p>
+            <a:pPr indent="0" marL="0">
+              <a:buNone/>
+            </a:pPr>
+            <a:r>
+              <a:rPr lang="en-US" sz="1200" dirty="0">
+                <a:solidFill>
+                  <a:schemeClr val="tx2"/>
+                </a:solidFill>
+              </a:rPr>
+              <a:t>messages, calls and direction requests</a:t>
+            </a:r>
+            <a:endParaRPr lang="en-US" sz="1200" dirty="0"/>
+          </a:p>
+        </p:txBody>
+      </p:sp>
+      <p:sp>
+        <p:nvSpPr>
+          <p:cNvPr id="19" name="Target card 4"/>
           <p:cNvSpPr/>
           <p:nvPr/>
         </p:nvSpPr>
         <p:spPr>
           <a:xfrm>
-            <a:off x="3108960" y="1536192"/>
-            <a:ext cx="384048" cy="384048"/>
-          </a:xfrm>
-          <a:prstGeom prst="ellipse">
-            <a:avLst/>
+            <a:off x="6766560" y="1325880"/>
+            <a:ext cx="1920240" cy="1874520"/>
+          </a:xfrm>
+          <a:prstGeom prst="roundRect">
+            <a:avLst>
+              <a:gd name="adj" fmla="val 5854"/>
+            </a:avLst>
           </a:prstGeom>
           <a:solidFill>
             <a:schemeClr val="accent4"/>
@@ -8954,9 +11258,29 @@
           <a:ln/>
         </p:spPr>
       </p:sp>
+      <p:sp>
+        <p:nvSpPr>
+          <p:cNvPr id="20" name="Target 4 circle"/>
+          <p:cNvSpPr/>
+          <p:nvPr/>
+        </p:nvSpPr>
+        <p:spPr>
+          <a:xfrm>
+            <a:off x="6949440" y="1481328"/>
+            <a:ext cx="475488" cy="475488"/>
+          </a:xfrm>
+          <a:prstGeom prst="ellipse">
+            <a:avLst/>
+          </a:prstGeom>
+          <a:solidFill>
+            <a:schemeClr val="bg1"/>
+          </a:solidFill>
+          <a:ln/>
+        </p:spPr>
+      </p:sp>
       <p:pic>
         <p:nvPicPr>
-          <p:cNvPr id="14" name="Increase 2 icon" descr="Increase 2">    </p:cNvPr>
+          <p:cNvPr id="21" name="Target 4 icon" descr="Target 4">    </p:cNvPr>
           <p:cNvPicPr>
             <a:picLocks noChangeAspect="1"/>
           </p:cNvPicPr>
@@ -8970,8 +11294,8 @@
         </p:blipFill>
         <p:spPr>
           <a:xfrm>
-            <a:off x="3212653" y="1639885"/>
-            <a:ext cx="176662" cy="176662"/>
+            <a:off x="7077822" y="1609710"/>
+            <a:ext cx="218724" cy="218724"/>
           </a:xfrm>
           <a:prstGeom prst="rect">
             <a:avLst/>
@@ -8980,14 +11304,53 @@
       </p:pic>
       <p:sp>
         <p:nvSpPr>
-          <p:cNvPr id="15" name="Result text 2"/>
+          <p:cNvPr id="22" name="Target value 4"/>
           <p:cNvSpPr txBox="1"/>
           <p:nvPr/>
         </p:nvSpPr>
         <p:spPr>
           <a:xfrm>
-            <a:off x="2304288" y="2194560"/>
-            <a:ext cx="1280160" cy="868680"/>
+            <a:off x="6949440" y="2057400"/>
+            <a:ext cx="1600200" cy="548640"/>
+          </a:xfrm>
+          <a:prstGeom prst="rect">
+            <a:avLst/>
+          </a:prstGeom>
+          <a:noFill/>
+          <a:ln/>
+        </p:spPr>
+        <p:txBody>
+          <a:bodyPr wrap="square" lIns="0" tIns="0" rIns="0" bIns="0" rtlCol="0" anchor="ctr"/>
+          <a:lstStyle/>
+          <a:p>
+            <a:pPr indent="0" marL="0">
+              <a:buNone/>
+            </a:pPr>
+            <a:r>
+              <a:rPr lang="en-US" sz="3400" b="1" dirty="0">
+                <a:solidFill>
+                  <a:schemeClr val="bg1"/>
+                </a:solidFill>
+                <a:latin typeface="Cambria" pitchFamily="34" charset="0"/>
+                <a:ea typeface="Cambria" pitchFamily="34" charset="-122"/>
+                <a:cs typeface="Cambria" pitchFamily="34" charset="-120"/>
+              </a:rPr>
+              <a:t>+10</a:t>
+            </a:r>
+            <a:endParaRPr lang="en-US" sz="3400" dirty="0"/>
+          </a:p>
+        </p:txBody>
+      </p:sp>
+      <p:sp>
+        <p:nvSpPr>
+          <p:cNvPr id="23" name="Target label 4"/>
+          <p:cNvSpPr txBox="1"/>
+          <p:nvPr/>
+        </p:nvSpPr>
+        <p:spPr>
+          <a:xfrm>
+            <a:off x="6949440" y="2633472"/>
+            <a:ext cx="1600200" cy="502920"/>
           </a:xfrm>
           <a:prstGeom prst="rect">
             <a:avLst/>
@@ -9003,66 +11366,32 @@
               <a:buNone/>
             </a:pPr>
             <a:r>
-              <a:rPr lang="en-US" sz="1500" b="1" dirty="0">
-                <a:solidFill>
-                  <a:schemeClr val="tx2"/>
-                </a:solidFill>
-              </a:rPr>
-              <a:t>More inquiries</a:t>
-            </a:r>
-            <a:endParaRPr lang="en-US" sz="1500" dirty="0"/>
-          </a:p>
-          <a:p>
-            <a:pPr indent="0" marL="0">
-              <a:buNone/>
-            </a:pPr>
-            <a:r>
               <a:rPr lang="en-US" sz="1200" dirty="0">
                 <a:solidFill>
-                  <a:schemeClr val="tx1"/>
-                </a:solidFill>
-              </a:rPr>
-              <a:t>from customers</a:t>
-            </a:r>
-            <a:endParaRPr lang="en-US" sz="1500" dirty="0"/>
-          </a:p>
-        </p:txBody>
-      </p:sp>
-      <p:sp>
-        <p:nvSpPr>
-          <p:cNvPr id="16" name="Result card 3"/>
+                  <a:schemeClr val="bg1"/>
+                </a:solidFill>
+              </a:rPr>
+              <a:t>extra customers every day</a:t>
+            </a:r>
+            <a:endParaRPr lang="en-US" sz="1200" dirty="0"/>
+          </a:p>
+        </p:txBody>
+      </p:sp>
+      <p:sp>
+        <p:nvSpPr>
+          <p:cNvPr id="24" name="Report box"/>
           <p:cNvSpPr/>
           <p:nvPr/>
         </p:nvSpPr>
         <p:spPr>
           <a:xfrm>
-            <a:off x="3822192" y="1325880"/>
-            <a:ext cx="1517904" cy="1828800"/>
+            <a:off x="457200" y="3383280"/>
+            <a:ext cx="8229600" cy="868680"/>
           </a:xfrm>
           <a:prstGeom prst="roundRect">
             <a:avLst>
-              <a:gd name="adj" fmla="val 7229"/>
+              <a:gd name="adj" fmla="val 12632"/>
             </a:avLst>
-          </a:prstGeom>
-          <a:solidFill>
-            <a:schemeClr val="bg2"/>
-          </a:solidFill>
-          <a:ln/>
-        </p:spPr>
-      </p:sp>
-      <p:sp>
-        <p:nvSpPr>
-          <p:cNvPr id="17" name="Awareness circle"/>
-          <p:cNvSpPr/>
-          <p:nvPr/>
-        </p:nvSpPr>
-        <p:spPr>
-          <a:xfrm>
-            <a:off x="3986784" y="1490472"/>
-            <a:ext cx="548640" cy="548640"/>
-          </a:xfrm>
-          <a:prstGeom prst="ellipse">
-            <a:avLst/>
           </a:prstGeom>
           <a:solidFill>
             <a:schemeClr val="tx2"/>
@@ -9070,9 +11399,29 @@
           <a:ln/>
         </p:spPr>
       </p:sp>
+      <p:sp>
+        <p:nvSpPr>
+          <p:cNvPr id="25" name="Weekly report circle"/>
+          <p:cNvSpPr/>
+          <p:nvPr/>
+        </p:nvSpPr>
+        <p:spPr>
+          <a:xfrm>
+            <a:off x="685800" y="3538728"/>
+            <a:ext cx="548640" cy="548640"/>
+          </a:xfrm>
+          <a:prstGeom prst="ellipse">
+            <a:avLst/>
+          </a:prstGeom>
+          <a:solidFill>
+            <a:schemeClr val="accent4"/>
+          </a:solidFill>
+          <a:ln/>
+        </p:spPr>
+      </p:sp>
       <p:pic>
         <p:nvPicPr>
-          <p:cNvPr id="18" name="Awareness icon" descr="Awareness">    </p:cNvPr>
+          <p:cNvPr id="26" name="Weekly report icon" descr="Weekly report">    </p:cNvPr>
           <p:cNvPicPr>
             <a:picLocks noChangeAspect="1"/>
           </p:cNvPicPr>
@@ -9086,7 +11435,7 @@
         </p:blipFill>
         <p:spPr>
           <a:xfrm>
-            <a:off x="4134917" y="1638605"/>
+            <a:off x="833933" y="3686861"/>
             <a:ext cx="252374" cy="252374"/>
           </a:xfrm>
           <a:prstGeom prst="rect">
@@ -9096,531 +11445,87 @@
       </p:pic>
       <p:sp>
         <p:nvSpPr>
-          <p:cNvPr id="19" name="Increase 3 circle"/>
-          <p:cNvSpPr/>
-          <p:nvPr/>
-        </p:nvSpPr>
-        <p:spPr>
-          <a:xfrm>
-            <a:off x="4791456" y="1536192"/>
-            <a:ext cx="384048" cy="384048"/>
-          </a:xfrm>
-          <a:prstGeom prst="ellipse">
-            <a:avLst/>
-          </a:prstGeom>
-          <a:solidFill>
-            <a:schemeClr val="accent4"/>
-          </a:solidFill>
-          <a:ln/>
-        </p:spPr>
-      </p:sp>
-      <p:pic>
-        <p:nvPicPr>
-          <p:cNvPr id="20" name="Increase 3 icon" descr="Increase 3">    </p:cNvPr>
-          <p:cNvPicPr>
-            <a:picLocks noChangeAspect="1"/>
-          </p:cNvPicPr>
-          <p:nvPr/>
-        </p:nvPicPr>
-        <p:blipFill>
-          <a:blip r:embed="rId6"/>
-          <a:stretch>
-            <a:fillRect/>
-          </a:stretch>
-        </p:blipFill>
-        <p:spPr>
-          <a:xfrm>
-            <a:off x="4895149" y="1639885"/>
-            <a:ext cx="176662" cy="176662"/>
-          </a:xfrm>
-          <a:prstGeom prst="rect">
-            <a:avLst/>
-          </a:prstGeom>
-        </p:spPr>
-      </p:pic>
-      <p:sp>
-        <p:nvSpPr>
-          <p:cNvPr id="21" name="Result text 3"/>
+          <p:cNvPr id="27" name="Report text"/>
           <p:cNvSpPr txBox="1"/>
           <p:nvPr/>
         </p:nvSpPr>
         <p:spPr>
           <a:xfrm>
-            <a:off x="3986784" y="2194560"/>
-            <a:ext cx="1280160" cy="868680"/>
-          </a:xfrm>
-          <a:prstGeom prst="rect">
-            <a:avLst/>
-          </a:prstGeom>
-          <a:noFill/>
-          <a:ln/>
-        </p:spPr>
-        <p:txBody>
-          <a:bodyPr wrap="square" lIns="0" tIns="0" rIns="0" bIns="0" rtlCol="0" anchor="t"/>
+            <a:off x="1463040" y="3383280"/>
+            <a:ext cx="7040880" cy="868680"/>
+          </a:xfrm>
+          <a:prstGeom prst="rect">
+            <a:avLst/>
+          </a:prstGeom>
+          <a:noFill/>
+          <a:ln/>
+        </p:spPr>
+        <p:txBody>
+          <a:bodyPr wrap="square" lIns="0" tIns="0" rIns="0" bIns="0" rtlCol="0" anchor="ctr"/>
           <a:lstStyle/>
           <a:p>
             <a:pPr indent="0" marL="0">
               <a:buNone/>
             </a:pPr>
             <a:r>
-              <a:rPr lang="en-US" sz="1500" b="1" dirty="0">
-                <a:solidFill>
-                  <a:schemeClr val="tx2"/>
-                </a:solidFill>
-              </a:rPr>
-              <a:t>More awareness</a:t>
-            </a:r>
-            <a:endParaRPr lang="en-US" sz="1500" dirty="0"/>
+              <a:rPr lang="en-US" sz="1700" b="1" dirty="0">
+                <a:solidFill>
+                  <a:schemeClr val="bg1"/>
+                </a:solidFill>
+              </a:rPr>
+              <a:t>You see every number, every week</a:t>
+            </a:r>
+            <a:endParaRPr lang="en-US" sz="1700" dirty="0"/>
           </a:p>
           <a:p>
             <a:pPr indent="0" marL="0">
               <a:buNone/>
             </a:pPr>
             <a:r>
-              <a:rPr lang="en-US" sz="1200" dirty="0">
-                <a:solidFill>
-                  <a:schemeClr val="tx1"/>
-                </a:solidFill>
-              </a:rPr>
-              <a:t>of the café</a:t>
-            </a:r>
-            <a:endParaRPr lang="en-US" sz="1500" dirty="0"/>
-          </a:p>
-        </p:txBody>
-      </p:sp>
-      <p:sp>
-        <p:nvSpPr>
-          <p:cNvPr id="22" name="Result card 4"/>
-          <p:cNvSpPr/>
-          <p:nvPr/>
-        </p:nvSpPr>
-        <p:spPr>
-          <a:xfrm>
-            <a:off x="5504688" y="1325880"/>
-            <a:ext cx="1517904" cy="1828800"/>
-          </a:xfrm>
-          <a:prstGeom prst="roundRect">
-            <a:avLst>
-              <a:gd name="adj" fmla="val 7229"/>
-            </a:avLst>
-          </a:prstGeom>
-          <a:solidFill>
-            <a:schemeClr val="bg2"/>
-          </a:solidFill>
-          <a:ln/>
-        </p:spPr>
-      </p:sp>
-      <p:sp>
-        <p:nvSpPr>
-          <p:cNvPr id="23" name="Visits circle"/>
-          <p:cNvSpPr/>
-          <p:nvPr/>
-        </p:nvSpPr>
-        <p:spPr>
-          <a:xfrm>
-            <a:off x="5669280" y="1490472"/>
-            <a:ext cx="548640" cy="548640"/>
-          </a:xfrm>
-          <a:prstGeom prst="ellipse">
-            <a:avLst/>
-          </a:prstGeom>
-          <a:solidFill>
-            <a:schemeClr val="tx2"/>
-          </a:solidFill>
-          <a:ln/>
-        </p:spPr>
-      </p:sp>
-      <p:pic>
-        <p:nvPicPr>
-          <p:cNvPr id="24" name="Visits icon" descr="Visits">    </p:cNvPr>
-          <p:cNvPicPr>
-            <a:picLocks noChangeAspect="1"/>
-          </p:cNvPicPr>
-          <p:nvPr/>
-        </p:nvPicPr>
-        <p:blipFill>
-          <a:blip r:embed="rId7"/>
-          <a:stretch>
-            <a:fillRect/>
-          </a:stretch>
-        </p:blipFill>
-        <p:spPr>
-          <a:xfrm>
-            <a:off x="5817413" y="1638605"/>
-            <a:ext cx="252374" cy="252374"/>
-          </a:xfrm>
-          <a:prstGeom prst="rect">
-            <a:avLst/>
-          </a:prstGeom>
-        </p:spPr>
-      </p:pic>
-      <p:sp>
-        <p:nvSpPr>
-          <p:cNvPr id="25" name="Increase 4 circle"/>
-          <p:cNvSpPr/>
-          <p:nvPr/>
-        </p:nvSpPr>
-        <p:spPr>
-          <a:xfrm>
-            <a:off x="6473952" y="1536192"/>
-            <a:ext cx="384048" cy="384048"/>
-          </a:xfrm>
-          <a:prstGeom prst="ellipse">
-            <a:avLst/>
-          </a:prstGeom>
-          <a:solidFill>
-            <a:schemeClr val="accent4"/>
-          </a:solidFill>
-          <a:ln/>
-        </p:spPr>
-      </p:sp>
-      <p:pic>
-        <p:nvPicPr>
-          <p:cNvPr id="26" name="Increase 4 icon" descr="Increase 4">    </p:cNvPr>
-          <p:cNvPicPr>
-            <a:picLocks noChangeAspect="1"/>
-          </p:cNvPicPr>
-          <p:nvPr/>
-        </p:nvPicPr>
-        <p:blipFill>
-          <a:blip r:embed="rId8"/>
-          <a:stretch>
-            <a:fillRect/>
-          </a:stretch>
-        </p:blipFill>
-        <p:spPr>
-          <a:xfrm>
-            <a:off x="6577645" y="1639885"/>
-            <a:ext cx="176662" cy="176662"/>
-          </a:xfrm>
-          <a:prstGeom prst="rect">
-            <a:avLst/>
-          </a:prstGeom>
-        </p:spPr>
-      </p:pic>
-      <p:sp>
-        <p:nvSpPr>
-          <p:cNvPr id="27" name="Result text 4"/>
+              <a:rPr lang="en-US" sz="1300" dirty="0">
+                <a:solidFill>
+                  <a:schemeClr val="accent2"/>
+                </a:solidFill>
+              </a:rPr>
+              <a:t>A simple weekly report: reach, followers, messages, visits and sales</a:t>
+            </a:r>
+            <a:endParaRPr lang="en-US" sz="1700" dirty="0"/>
+          </a:p>
+        </p:txBody>
+      </p:sp>
+      <p:sp>
+        <p:nvSpPr>
+          <p:cNvPr id="28" name="Targets footnote"/>
           <p:cNvSpPr txBox="1"/>
           <p:nvPr/>
         </p:nvSpPr>
         <p:spPr>
           <a:xfrm>
-            <a:off x="5669280" y="2194560"/>
-            <a:ext cx="1280160" cy="868680"/>
-          </a:xfrm>
-          <a:prstGeom prst="rect">
-            <a:avLst/>
-          </a:prstGeom>
-          <a:noFill/>
-          <a:ln/>
-        </p:spPr>
-        <p:txBody>
-          <a:bodyPr wrap="square" lIns="0" tIns="0" rIns="0" bIns="0" rtlCol="0" anchor="t"/>
+            <a:off x="457200" y="4343400"/>
+            <a:ext cx="8229600" cy="274320"/>
+          </a:xfrm>
+          <a:prstGeom prst="rect">
+            <a:avLst/>
+          </a:prstGeom>
+          <a:noFill/>
+          <a:ln/>
+        </p:spPr>
+        <p:txBody>
+          <a:bodyPr wrap="square" lIns="0" tIns="0" rIns="0" bIns="0" rtlCol="0" anchor="ctr"/>
           <a:lstStyle/>
           <a:p>
             <a:pPr indent="0" marL="0">
               <a:buNone/>
             </a:pPr>
             <a:r>
-              <a:rPr lang="en-US" sz="1500" b="1" dirty="0">
-                <a:solidFill>
-                  <a:schemeClr val="tx2"/>
-                </a:solidFill>
-              </a:rPr>
-              <a:t>More visits</a:t>
-            </a:r>
-            <a:endParaRPr lang="en-US" sz="1500" dirty="0"/>
-          </a:p>
-          <a:p>
-            <a:pPr indent="0" marL="0">
-              <a:buNone/>
-            </a:pPr>
-            <a:r>
-              <a:rPr lang="en-US" sz="1200" dirty="0">
-                <a:solidFill>
-                  <a:schemeClr val="tx1"/>
-                </a:solidFill>
-              </a:rPr>
-              <a:t>from new customers</a:t>
-            </a:r>
-            <a:endParaRPr lang="en-US" sz="1500" dirty="0"/>
-          </a:p>
-        </p:txBody>
-      </p:sp>
-      <p:sp>
-        <p:nvSpPr>
-          <p:cNvPr id="28" name="Result card 5"/>
-          <p:cNvSpPr/>
-          <p:nvPr/>
-        </p:nvSpPr>
-        <p:spPr>
-          <a:xfrm>
-            <a:off x="7187184" y="1325880"/>
-            <a:ext cx="1517904" cy="1828800"/>
-          </a:xfrm>
-          <a:prstGeom prst="roundRect">
-            <a:avLst>
-              <a:gd name="adj" fmla="val 7229"/>
-            </a:avLst>
-          </a:prstGeom>
-          <a:solidFill>
-            <a:schemeClr val="bg2"/>
-          </a:solidFill>
-          <a:ln/>
-        </p:spPr>
-      </p:sp>
-      <p:sp>
-        <p:nvSpPr>
-          <p:cNvPr id="29" name="Sales circle"/>
-          <p:cNvSpPr/>
-          <p:nvPr/>
-        </p:nvSpPr>
-        <p:spPr>
-          <a:xfrm>
-            <a:off x="7351776" y="1490472"/>
-            <a:ext cx="548640" cy="548640"/>
-          </a:xfrm>
-          <a:prstGeom prst="ellipse">
-            <a:avLst/>
-          </a:prstGeom>
-          <a:solidFill>
-            <a:schemeClr val="tx2"/>
-          </a:solidFill>
-          <a:ln/>
-        </p:spPr>
-      </p:sp>
-      <p:pic>
-        <p:nvPicPr>
-          <p:cNvPr id="30" name="Sales icon" descr="Sales">    </p:cNvPr>
-          <p:cNvPicPr>
-            <a:picLocks noChangeAspect="1"/>
-          </p:cNvPicPr>
-          <p:nvPr/>
-        </p:nvPicPr>
-        <p:blipFill>
-          <a:blip r:embed="rId9"/>
-          <a:stretch>
-            <a:fillRect/>
-          </a:stretch>
-        </p:blipFill>
-        <p:spPr>
-          <a:xfrm>
-            <a:off x="7499909" y="1638605"/>
-            <a:ext cx="252374" cy="252374"/>
-          </a:xfrm>
-          <a:prstGeom prst="rect">
-            <a:avLst/>
-          </a:prstGeom>
-        </p:spPr>
-      </p:pic>
-      <p:sp>
-        <p:nvSpPr>
-          <p:cNvPr id="31" name="Increase 5 circle"/>
-          <p:cNvSpPr/>
-          <p:nvPr/>
-        </p:nvSpPr>
-        <p:spPr>
-          <a:xfrm>
-            <a:off x="8156448" y="1536192"/>
-            <a:ext cx="384048" cy="384048"/>
-          </a:xfrm>
-          <a:prstGeom prst="ellipse">
-            <a:avLst/>
-          </a:prstGeom>
-          <a:solidFill>
-            <a:schemeClr val="accent4"/>
-          </a:solidFill>
-          <a:ln/>
-        </p:spPr>
-      </p:sp>
-      <p:pic>
-        <p:nvPicPr>
-          <p:cNvPr id="32" name="Increase 5 icon" descr="Increase 5">    </p:cNvPr>
-          <p:cNvPicPr>
-            <a:picLocks noChangeAspect="1"/>
-          </p:cNvPicPr>
-          <p:nvPr/>
-        </p:nvPicPr>
-        <p:blipFill>
-          <a:blip r:embed="rId10"/>
-          <a:stretch>
-            <a:fillRect/>
-          </a:stretch>
-        </p:blipFill>
-        <p:spPr>
-          <a:xfrm>
-            <a:off x="8260141" y="1639885"/>
-            <a:ext cx="176662" cy="176662"/>
-          </a:xfrm>
-          <a:prstGeom prst="rect">
-            <a:avLst/>
-          </a:prstGeom>
-        </p:spPr>
-      </p:pic>
-      <p:sp>
-        <p:nvSpPr>
-          <p:cNvPr id="33" name="Result text 5"/>
-          <p:cNvSpPr txBox="1"/>
-          <p:nvPr/>
-        </p:nvSpPr>
-        <p:spPr>
-          <a:xfrm>
-            <a:off x="7351776" y="2194560"/>
-            <a:ext cx="1280160" cy="868680"/>
-          </a:xfrm>
-          <a:prstGeom prst="rect">
-            <a:avLst/>
-          </a:prstGeom>
-          <a:noFill/>
-          <a:ln/>
-        </p:spPr>
-        <p:txBody>
-          <a:bodyPr wrap="square" lIns="0" tIns="0" rIns="0" bIns="0" rtlCol="0" anchor="t"/>
-          <a:lstStyle/>
-          <a:p>
-            <a:pPr indent="0" marL="0">
-              <a:buNone/>
-            </a:pPr>
-            <a:r>
-              <a:rPr lang="en-US" sz="1500" b="1" dirty="0">
-                <a:solidFill>
-                  <a:schemeClr val="tx2"/>
-                </a:solidFill>
-              </a:rPr>
-              <a:t>More sales</a:t>
-            </a:r>
-            <a:endParaRPr lang="en-US" sz="1500" dirty="0"/>
-          </a:p>
-          <a:p>
-            <a:pPr indent="0" marL="0">
-              <a:buNone/>
-            </a:pPr>
-            <a:r>
-              <a:rPr lang="en-US" sz="1200" dirty="0">
-                <a:solidFill>
-                  <a:schemeClr val="tx1"/>
-                </a:solidFill>
-              </a:rPr>
-              <a:t>performance</a:t>
-            </a:r>
-            <a:endParaRPr lang="en-US" sz="1500" dirty="0"/>
-          </a:p>
-        </p:txBody>
-      </p:sp>
-      <p:sp>
-        <p:nvSpPr>
-          <p:cNvPr id="34" name="Tracking box"/>
-          <p:cNvSpPr/>
-          <p:nvPr/>
-        </p:nvSpPr>
-        <p:spPr>
-          <a:xfrm>
-            <a:off x="457200" y="3429000"/>
-            <a:ext cx="8229600" cy="1097280"/>
-          </a:xfrm>
-          <a:prstGeom prst="roundRect">
-            <a:avLst>
-              <a:gd name="adj" fmla="val 10000"/>
-            </a:avLst>
-          </a:prstGeom>
-          <a:solidFill>
-            <a:schemeClr val="tx2"/>
-          </a:solidFill>
-          <a:ln/>
-        </p:spPr>
-      </p:sp>
-      <p:sp>
-        <p:nvSpPr>
-          <p:cNvPr id="35" name="Tracking circle"/>
-          <p:cNvSpPr/>
-          <p:nvPr/>
-        </p:nvSpPr>
-        <p:spPr>
-          <a:xfrm>
-            <a:off x="731520" y="3657600"/>
-            <a:ext cx="640080" cy="640080"/>
-          </a:xfrm>
-          <a:prstGeom prst="ellipse">
-            <a:avLst/>
-          </a:prstGeom>
-          <a:solidFill>
-            <a:schemeClr val="accent4"/>
-          </a:solidFill>
-          <a:ln/>
-        </p:spPr>
-      </p:sp>
-      <p:pic>
-        <p:nvPicPr>
-          <p:cNvPr id="36" name="Tracking icon" descr="Tracking">    </p:cNvPr>
-          <p:cNvPicPr>
-            <a:picLocks noChangeAspect="1"/>
-          </p:cNvPicPr>
-          <p:nvPr/>
-        </p:nvPicPr>
-        <p:blipFill>
-          <a:blip r:embed="rId11"/>
-          <a:stretch>
-            <a:fillRect/>
-          </a:stretch>
-        </p:blipFill>
-        <p:spPr>
-          <a:xfrm>
-            <a:off x="904342" y="3830422"/>
-            <a:ext cx="294437" cy="294437"/>
-          </a:xfrm>
-          <a:prstGeom prst="rect">
-            <a:avLst/>
-          </a:prstGeom>
-        </p:spPr>
-      </p:pic>
-      <p:sp>
-        <p:nvSpPr>
-          <p:cNvPr id="37" name="Tracking text"/>
-          <p:cNvSpPr txBox="1"/>
-          <p:nvPr/>
-        </p:nvSpPr>
-        <p:spPr>
-          <a:xfrm>
-            <a:off x="1600200" y="3429000"/>
-            <a:ext cx="6858000" cy="1097280"/>
-          </a:xfrm>
-          <a:prstGeom prst="rect">
-            <a:avLst/>
-          </a:prstGeom>
-          <a:noFill/>
-          <a:ln/>
-        </p:spPr>
-        <p:txBody>
-          <a:bodyPr wrap="square" lIns="0" tIns="0" rIns="0" bIns="0" rtlCol="0" anchor="ctr"/>
-          <a:lstStyle/>
-          <a:p>
-            <a:pPr indent="0" marL="0">
-              <a:buNone/>
-            </a:pPr>
-            <a:r>
-              <a:rPr lang="en-US" sz="1800" b="1" dirty="0">
-                <a:solidFill>
-                  <a:schemeClr val="bg1"/>
-                </a:solidFill>
-              </a:rPr>
-              <a:t>We track the results</a:t>
-            </a:r>
-            <a:endParaRPr lang="en-US" sz="1800" dirty="0"/>
-          </a:p>
-          <a:p>
-            <a:pPr indent="0" marL="0">
-              <a:buNone/>
-            </a:pPr>
-            <a:r>
-              <a:rPr lang="en-US" sz="1400" dirty="0">
-                <a:solidFill>
-                  <a:schemeClr val="accent2"/>
-                </a:solidFill>
-              </a:rPr>
-              <a:t>to understand what works best</a:t>
-            </a:r>
-            <a:endParaRPr lang="en-US" sz="1800" dirty="0"/>
+              <a:rPr lang="en-US" sz="1000" dirty="0">
+                <a:solidFill>
+                  <a:schemeClr val="accent5"/>
+                </a:solidFill>
+              </a:rPr>
+              <a:t>Targets are based on a 4,000 EGP monthly ad budget and are confirmed after the week-1 review.</a:t>
+            </a:r>
+            <a:endParaRPr lang="en-US" sz="1000" dirty="0"/>
           </a:p>
         </p:txBody>
       </p:sp>

--- a/Cafe_Marketing_Proposal.pptx
+++ b/Cafe_Marketing_Proposal.pptx
@@ -119,30 +119,30 @@
   <p:extLst>
     <p:ext uri="{521415D9-36F7-43E2-AB2F-B90AF26B5E84}">
       <p14:sectionLst xmlns:p14="http://schemas.microsoft.com/office/powerpoint/2010/main">
-        <p14:section name="Introduction" id="{5bdd043f-870c-001b-56d1-4f9a39e0baaa}">
+        <p14:section name="Introduction" id="{33733bff-e9df-b0c2-3dc2-4376b8d3825b}">
           <p14:sldIdLst>
             <p14:sldId id="256"/>
             <p14:sldId id="257"/>
           </p14:sldIdLst>
         </p14:section>
-        <p14:section name="Problem" id="{057a16e2-1dc4-0da3-83e4-3b2bf742f064}">
+        <p14:section name="Problem" id="{92c6a357-9071-3fab-a54b-7fa77c1daa9e}">
           <p14:sldIdLst>
             <p14:sldId id="258"/>
           </p14:sldIdLst>
         </p14:section>
-        <p14:section name="Solution" id="{8df52afd-9d71-7ab7-b465-7a541c8ca3f4}">
+        <p14:section name="Solution" id="{579ec1d9-eeec-67e5-85e3-53d1b045bee1}">
           <p14:sldIdLst>
             <p14:sldId id="259"/>
             <p14:sldId id="260"/>
           </p14:sldIdLst>
         </p14:section>
-        <p14:section name="Budget and Timeline" id="{2856a4ab-21f2-bd0d-858c-a26653fdd40c}">
+        <p14:section name="Budget and Timeline" id="{1aaccea8-3f76-2192-f254-b5ce94dde054}">
           <p14:sldIdLst>
             <p14:sldId id="261"/>
             <p14:sldId id="262"/>
           </p14:sldIdLst>
         </p14:section>
-        <p14:section name="Results" id="{313db6e8-18c3-467d-971e-c40fbfb32d21}">
+        <p14:section name="Results" id="{2bf6baa4-62cb-c82a-1b23-212b4545c333}">
           <p14:sldIdLst>
             <p14:sldId id="263"/>
             <p14:sldId id="264"/>
@@ -150,12 +150,12 @@
             <p14:sldId id="266"/>
           </p14:sldIdLst>
         </p14:section>
-        <p14:section name="Why Us" id="{5037e329-baf9-e1bc-c8fa-db23593521ba}">
+        <p14:section name="Why Us" id="{66f9dc16-9b36-10ed-7ac9-95150426782c}">
           <p14:sldIdLst>
             <p14:sldId id="267"/>
           </p14:sldIdLst>
         </p14:section>
-        <p14:section name="Conclusion" id="{c088e8e0-617b-067e-7990-23dda1b90d8a}">
+        <p14:section name="Conclusion" id="{463fe7da-3c4c-fa5e-3a2b-8bd82a3fba89}">
           <p14:sldIdLst>
             <p14:sldId id="268"/>
           </p14:sldIdLst>
@@ -1134,7 +1134,7 @@
           <a:p>
             <a:r>
               <a:rPr lang="en-US" dirty="0"/>
-              <a:t>Introduce yourselves and BrandBrew Marketing.
+              <a:t>Introduce yourselves and Pulse Marketing.
 "Today we'll show you how we can help The Daily Cup reach more customers and grow its business."</a:t>
             </a:r>
             <a:endParaRPr lang="en-US" dirty="0"/>
@@ -2613,7 +2613,7 @@
                   <a:schemeClr val="accent5"/>
                 </a:solidFill>
               </a:rPr>
-              <a:t>BrandBrew Marketing  |  Digital Marketing Proposal for The Daily Cup</a:t>
+              <a:t>Pulse Marketing  |  Digital Marketing Proposal for The Daily Cup</a:t>
             </a:r>
             <a:endParaRPr lang="en-US" sz="1000" dirty="0"/>
           </a:p>
@@ -3045,7 +3045,7 @@
                   <a:schemeClr val="accent2"/>
                 </a:solidFill>
               </a:rPr>
-              <a:t>PRESENTED BY BRANDBREW MARKETING</a:t>
+              <a:t>PRESENTED BY PULSE MARKETING</a:t>
             </a:r>
             <a:endParaRPr lang="en-US" sz="1200" dirty="0"/>
           </a:p>
@@ -4484,7 +4484,7 @@
                 <a:ea typeface="Cambria" pitchFamily="34" charset="-122"/>
                 <a:cs typeface="Cambria" pitchFamily="34" charset="-120"/>
               </a:rPr>
-              <a:t>Why BrandBrew Marketing</a:t>
+              <a:t>Why Pulse Marketing</a:t>
             </a:r>
             <a:endParaRPr lang="en-US" sz="3200" dirty="0"/>
           </a:p>
@@ -5617,7 +5617,7 @@
                   <a:schemeClr val="accent2"/>
                 </a:solidFill>
               </a:rPr>
-              <a:t>BrandBrew Marketing   |   [Phone]   |   [Email]</a:t>
+              <a:t>Pulse Marketing   |   [Phone]   |   [Email]</a:t>
             </a:r>
             <a:endParaRPr lang="en-US" sz="1300" dirty="0"/>
           </a:p>

--- a/Cafe_Marketing_Proposal.pptx
+++ b/Cafe_Marketing_Proposal.pptx
@@ -119,30 +119,30 @@
   <p:extLst>
     <p:ext uri="{521415D9-36F7-43E2-AB2F-B90AF26B5E84}">
       <p14:sectionLst xmlns:p14="http://schemas.microsoft.com/office/powerpoint/2010/main">
-        <p14:section name="Introduction" id="{33733bff-e9df-b0c2-3dc2-4376b8d3825b}">
+        <p14:section name="Introduction" id="{d7c1ff54-7a78-1b6c-608b-45865889dd00}">
           <p14:sldIdLst>
             <p14:sldId id="256"/>
             <p14:sldId id="257"/>
           </p14:sldIdLst>
         </p14:section>
-        <p14:section name="Problem" id="{92c6a357-9071-3fab-a54b-7fa77c1daa9e}">
+        <p14:section name="Problem" id="{ccc356aa-3ae6-09fe-fc72-29573b0b6dd6}">
           <p14:sldIdLst>
             <p14:sldId id="258"/>
           </p14:sldIdLst>
         </p14:section>
-        <p14:section name="Solution" id="{579ec1d9-eeec-67e5-85e3-53d1b045bee1}">
+        <p14:section name="Solution" id="{4f24179e-7ae3-5a27-8bfd-e3a8e41d4513}">
           <p14:sldIdLst>
             <p14:sldId id="259"/>
             <p14:sldId id="260"/>
           </p14:sldIdLst>
         </p14:section>
-        <p14:section name="Budget and Timeline" id="{1aaccea8-3f76-2192-f254-b5ce94dde054}">
+        <p14:section name="Budget and Timeline" id="{29df7fb2-5b0d-cd43-c034-d9512f563e2d}">
           <p14:sldIdLst>
             <p14:sldId id="261"/>
             <p14:sldId id="262"/>
           </p14:sldIdLst>
         </p14:section>
-        <p14:section name="Results" id="{2bf6baa4-62cb-c82a-1b23-212b4545c333}">
+        <p14:section name="Results" id="{14f31e6a-5b88-9126-9644-8c745f83252d}">
           <p14:sldIdLst>
             <p14:sldId id="263"/>
             <p14:sldId id="264"/>
@@ -150,12 +150,12 @@
             <p14:sldId id="266"/>
           </p14:sldIdLst>
         </p14:section>
-        <p14:section name="Why Us" id="{66f9dc16-9b36-10ed-7ac9-95150426782c}">
+        <p14:section name="Why Us" id="{be00e101-3fb4-d1af-33b7-aa2dacaaa3c0}">
           <p14:sldIdLst>
             <p14:sldId id="267"/>
           </p14:sldIdLst>
         </p14:section>
-        <p14:section name="Conclusion" id="{463fe7da-3c4c-fa5e-3a2b-8bd82a3fba89}">
+        <p14:section name="Conclusion" id="{3c4da55e-699d-63cd-d0b4-18c39f47c786}">
           <p14:sldIdLst>
             <p14:sldId id="268"/>
           </p14:sldIdLst>
@@ -1134,8 +1134,10 @@
           <a:p>
             <a:r>
               <a:rPr lang="en-US" dirty="0"/>
-              <a:t>Introduce yourselves and Pulse Marketing.
-"Today we'll show you how we can help The Daily Cup reach more customers and grow its business."</a:t>
+              <a:t>Presenter: Rahma Khaled
+"Good morning, and thank you for meeting us today. We are the team from Pulse Marketing, and our job is to keep your brand's pulse strong.
+My name is Rahma Khaled, and with me are Aya Reda, Mahmoud Ibrahim and Abader Zarif.
+Today we'll show you a simple plan to help The Daily Cup get more customers and more sales."</a:t>
             </a:r>
             <a:endParaRPr lang="en-US" dirty="0"/>
           </a:p>
@@ -1223,7 +1225,8 @@
           <a:p>
             <a:r>
               <a:rPr lang="en-US" dirty="0"/>
-              <a:t>This is the most important slide for the owner: the plan pays for itself.
+              <a:t>Presenter: Mahmoud Ibrahim
+This is the most important slide for the owner: the plan pays for itself.
 - Each customer spends about 150 EGP. After ingredients, the café keeps about 100 EGP.
 - 13,000 EGP divided by 100 EGP = 130 customers a month, which is less than 5 extra customers a day.
 - Our target is 10 extra customers a day: 10 × 30 days × 100 EGP = about 30,000 EGP extra profit per month, more than double the cost.
@@ -1315,7 +1318,8 @@
           <a:p>
             <a:r>
               <a:rPr lang="en-US" dirty="0"/>
-              <a:t>After the first month, we plan to:
+              <a:t>Presenter: Abader Zarif
+After the first month, we plan to:
 - Work with local food influencers.
 - Launch loyalty programs for regular customers.
 - Create seasonal offers.
@@ -1408,7 +1412,8 @@
           <a:p>
             <a:r>
               <a:rPr lang="en-US" dirty="0"/>
-              <a:t>Why the owner should choose us:
+              <a:t>Presenter: Abader Zarif
+Why the owner should choose us:
 - Café specialists: we focus on cafés and restaurants, so we know what brings people in.
 - Your own team: one dedicated account manager for The Daily Cup.
 - Weekly reports: the owner sees exactly what their money does.
@@ -1503,7 +1508,8 @@
           <a:p>
             <a:r>
               <a:rPr lang="en-US" dirty="0"/>
-              <a:t>Summary: The Daily Cup gets more visibility, more customers and more sales, and the plan pays for itself with less than 5 extra customers a day.
+              <a:t>Presenter: Abader Zarif
+Summary: The Daily Cup gets more visibility, more customers and more sales, and the plan pays for itself with less than 5 extra customers a day.
 Clear next steps (shown on the right):
 1. Approve the proposal today.
 2. We do a free audit of the café's pages in week 1.
@@ -1598,7 +1604,8 @@
           <a:p>
             <a:r>
               <a:rPr lang="en-US" dirty="0"/>
-              <a:t>Our marketing agency wants to help The Daily Cup grow its business.
+              <a:t>Presenter: Rahma Khaled
+Our marketing agency wants to help The Daily Cup grow its business.
 Our goals are to:
 - Increase brand awareness.
 - Attract more customers.
@@ -1692,7 +1699,8 @@
           <a:p>
             <a:r>
               <a:rPr lang="en-US" dirty="0"/>
-              <a:t>The café may face some challenges:
+              <a:t>Presenter: Rahma Khaled
+The café may face some challenges:
 - Low brand awareness.
 - Few followers and low engagement on social media.
 - Strong competition from other cafés.
@@ -1785,7 +1793,8 @@
           <a:p>
             <a:r>
               <a:rPr lang="en-US" dirty="0"/>
-              <a:t>Our agency offers four main services:
+              <a:t>Presenter: Aya Reda
+Our agency offers four main services:
 - Social Media Management: create regular posts, reels, and stories.
 - Paid Advertising: run Facebook and Instagram ads.
 - Content Creation: take attractive photos and videos of products.
@@ -1877,7 +1886,8 @@
           <a:p>
             <a:r>
               <a:rPr lang="en-US" dirty="0"/>
-              <a:t>We will follow five simple steps:
+              <a:t>Presenter: Aya Reda
+We will follow five simple steps:
 1. Research the market and competitors.
 2. Identify the target audience.
 3. Create a monthly content plan.
@@ -1970,7 +1980,8 @@
           <a:p>
             <a:r>
               <a:rPr lang="en-US" dirty="0"/>
-              <a:t>Monthly budget:
+              <a:t>Presenter: Aya Reda
+Monthly budget:
 - Social media management: 5,000 EGP
 - Paid advertising: 4,000 EGP
 - Content creation: 3,000 EGP
@@ -2064,7 +2075,8 @@
           <a:p>
             <a:r>
               <a:rPr lang="en-US" dirty="0"/>
-              <a:t>Week 1: Research and planning.
+              <a:t>Presenter: Mahmoud Ibrahim
+Week 1: Research and planning.
 Week 2: Content creation.
 Week 3: Launch marketing campaigns.
 Week 4: Measure results and improve.</a:t>
@@ -2155,7 +2167,8 @@
           <a:p>
             <a:r>
               <a:rPr lang="en-US" dirty="0"/>
-              <a:t>Working with our agency will help the café:
+              <a:t>Presenter: Mahmoud Ibrahim
+Working with our agency will help the café:
 - Reach more people.
 - Attract new customers.
 - Build a strong brand.
@@ -2248,7 +2261,8 @@
           <a:p>
             <a:r>
               <a:rPr lang="en-US" dirty="0"/>
-              <a:t>These are our targets for the first month:
+              <a:t>Presenter: Mahmoud Ibrahim
+These are our targets for the first month:
 - 40,000+ people in the area see The Daily Cup through ads and content.
 - 500+ new Instagram followers.
 - 100+ messages, calls and direction requests.
@@ -3130,9 +3144,189 @@
           </a:p>
         </p:txBody>
       </p:sp>
+      <p:sp>
+        <p:nvSpPr>
+          <p:cNvPr id="5" name="Team label"/>
+          <p:cNvSpPr txBox="1"/>
+          <p:nvPr/>
+        </p:nvSpPr>
+        <p:spPr>
+          <a:xfrm>
+            <a:off x="548640" y="3429000"/>
+            <a:ext cx="4389120" cy="274320"/>
+          </a:xfrm>
+          <a:prstGeom prst="rect">
+            <a:avLst/>
+          </a:prstGeom>
+          <a:noFill/>
+          <a:ln/>
+        </p:spPr>
+        <p:txBody>
+          <a:bodyPr wrap="square" lIns="0" tIns="0" rIns="0" bIns="0" rtlCol="0" anchor="ctr"/>
+          <a:lstStyle/>
+          <a:p>
+            <a:pPr indent="0" marL="0">
+              <a:buNone/>
+            </a:pPr>
+            <a:r>
+              <a:rPr lang="en-US" sz="1100" b="1" spc="300" kern="0" dirty="0">
+                <a:solidFill>
+                  <a:schemeClr val="accent2"/>
+                </a:solidFill>
+              </a:rPr>
+              <a:t>OUR TEAM</a:t>
+            </a:r>
+            <a:endParaRPr lang="en-US" sz="1100" dirty="0"/>
+          </a:p>
+        </p:txBody>
+      </p:sp>
+      <p:sp>
+        <p:nvSpPr>
+          <p:cNvPr id="6" name="Team member 1"/>
+          <p:cNvSpPr txBox="1"/>
+          <p:nvPr/>
+        </p:nvSpPr>
+        <p:spPr>
+          <a:xfrm>
+            <a:off x="548640" y="3749040"/>
+            <a:ext cx="2103120" cy="320040"/>
+          </a:xfrm>
+          <a:prstGeom prst="rect">
+            <a:avLst/>
+          </a:prstGeom>
+          <a:noFill/>
+          <a:ln/>
+        </p:spPr>
+        <p:txBody>
+          <a:bodyPr wrap="square" lIns="0" tIns="0" rIns="0" bIns="0" rtlCol="0" anchor="ctr"/>
+          <a:lstStyle/>
+          <a:p>
+            <a:pPr indent="0" marL="0">
+              <a:buNone/>
+            </a:pPr>
+            <a:r>
+              <a:rPr lang="en-US" sz="1400" dirty="0">
+                <a:solidFill>
+                  <a:schemeClr val="bg1"/>
+                </a:solidFill>
+              </a:rPr>
+              <a:t>Rahma Khaled</a:t>
+            </a:r>
+            <a:endParaRPr lang="en-US" sz="1400" dirty="0"/>
+          </a:p>
+        </p:txBody>
+      </p:sp>
+      <p:sp>
+        <p:nvSpPr>
+          <p:cNvPr id="7" name="Team member 2"/>
+          <p:cNvSpPr txBox="1"/>
+          <p:nvPr/>
+        </p:nvSpPr>
+        <p:spPr>
+          <a:xfrm>
+            <a:off x="2743200" y="3749040"/>
+            <a:ext cx="2103120" cy="320040"/>
+          </a:xfrm>
+          <a:prstGeom prst="rect">
+            <a:avLst/>
+          </a:prstGeom>
+          <a:noFill/>
+          <a:ln/>
+        </p:spPr>
+        <p:txBody>
+          <a:bodyPr wrap="square" lIns="0" tIns="0" rIns="0" bIns="0" rtlCol="0" anchor="ctr"/>
+          <a:lstStyle/>
+          <a:p>
+            <a:pPr indent="0" marL="0">
+              <a:buNone/>
+            </a:pPr>
+            <a:r>
+              <a:rPr lang="en-US" sz="1400" dirty="0">
+                <a:solidFill>
+                  <a:schemeClr val="bg1"/>
+                </a:solidFill>
+              </a:rPr>
+              <a:t>Aya Reda</a:t>
+            </a:r>
+            <a:endParaRPr lang="en-US" sz="1400" dirty="0"/>
+          </a:p>
+        </p:txBody>
+      </p:sp>
+      <p:sp>
+        <p:nvSpPr>
+          <p:cNvPr id="8" name="Team member 3"/>
+          <p:cNvSpPr txBox="1"/>
+          <p:nvPr/>
+        </p:nvSpPr>
+        <p:spPr>
+          <a:xfrm>
+            <a:off x="548640" y="4114800"/>
+            <a:ext cx="2103120" cy="320040"/>
+          </a:xfrm>
+          <a:prstGeom prst="rect">
+            <a:avLst/>
+          </a:prstGeom>
+          <a:noFill/>
+          <a:ln/>
+        </p:spPr>
+        <p:txBody>
+          <a:bodyPr wrap="square" lIns="0" tIns="0" rIns="0" bIns="0" rtlCol="0" anchor="ctr"/>
+          <a:lstStyle/>
+          <a:p>
+            <a:pPr indent="0" marL="0">
+              <a:buNone/>
+            </a:pPr>
+            <a:r>
+              <a:rPr lang="en-US" sz="1400" dirty="0">
+                <a:solidFill>
+                  <a:schemeClr val="bg1"/>
+                </a:solidFill>
+              </a:rPr>
+              <a:t>Mahmoud Ibrahim</a:t>
+            </a:r>
+            <a:endParaRPr lang="en-US" sz="1400" dirty="0"/>
+          </a:p>
+        </p:txBody>
+      </p:sp>
+      <p:sp>
+        <p:nvSpPr>
+          <p:cNvPr id="9" name="Team member 4"/>
+          <p:cNvSpPr txBox="1"/>
+          <p:nvPr/>
+        </p:nvSpPr>
+        <p:spPr>
+          <a:xfrm>
+            <a:off x="2743200" y="4114800"/>
+            <a:ext cx="2103120" cy="320040"/>
+          </a:xfrm>
+          <a:prstGeom prst="rect">
+            <a:avLst/>
+          </a:prstGeom>
+          <a:noFill/>
+          <a:ln/>
+        </p:spPr>
+        <p:txBody>
+          <a:bodyPr wrap="square" lIns="0" tIns="0" rIns="0" bIns="0" rtlCol="0" anchor="ctr"/>
+          <a:lstStyle/>
+          <a:p>
+            <a:pPr indent="0" marL="0">
+              <a:buNone/>
+            </a:pPr>
+            <a:r>
+              <a:rPr lang="en-US" sz="1400" dirty="0">
+                <a:solidFill>
+                  <a:schemeClr val="bg1"/>
+                </a:solidFill>
+              </a:rPr>
+              <a:t>Abader Zarif</a:t>
+            </a:r>
+            <a:endParaRPr lang="en-US" sz="1400" dirty="0"/>
+          </a:p>
+        </p:txBody>
+      </p:sp>
       <p:pic>
         <p:nvPicPr>
-          <p:cNvPr id="5" name="Café illustration" descr="Café illustration">    </p:cNvPr>
+          <p:cNvPr id="10" name="Café illustration" descr="Café illustration">    </p:cNvPr>
           <p:cNvPicPr>
             <a:picLocks noChangeAspect="1"/>
           </p:cNvPicPr>

--- a/Cafe_Marketing_Proposal.pptx
+++ b/Cafe_Marketing_Proposal.pptx
@@ -119,30 +119,30 @@
   <p:extLst>
     <p:ext uri="{521415D9-36F7-43E2-AB2F-B90AF26B5E84}">
       <p14:sectionLst xmlns:p14="http://schemas.microsoft.com/office/powerpoint/2010/main">
-        <p14:section name="Introduction" id="{d7c1ff54-7a78-1b6c-608b-45865889dd00}">
+        <p14:section name="Introduction" id="{08a8b1f2-d5ad-2bd9-c46b-a606016f6350}">
           <p14:sldIdLst>
             <p14:sldId id="256"/>
             <p14:sldId id="257"/>
           </p14:sldIdLst>
         </p14:section>
-        <p14:section name="Problem" id="{ccc356aa-3ae6-09fe-fc72-29573b0b6dd6}">
+        <p14:section name="Problem" id="{49812344-6752-3291-0893-27d6f7c2e5f9}">
           <p14:sldIdLst>
             <p14:sldId id="258"/>
           </p14:sldIdLst>
         </p14:section>
-        <p14:section name="Solution" id="{4f24179e-7ae3-5a27-8bfd-e3a8e41d4513}">
+        <p14:section name="Solution" id="{f67508d9-6785-ef07-4fd8-46d1e64a7374}">
           <p14:sldIdLst>
             <p14:sldId id="259"/>
             <p14:sldId id="260"/>
           </p14:sldIdLst>
         </p14:section>
-        <p14:section name="Budget and Timeline" id="{29df7fb2-5b0d-cd43-c034-d9512f563e2d}">
+        <p14:section name="Budget and Timeline" id="{15b30892-75d5-aa2c-5948-54b1034b9a01}">
           <p14:sldIdLst>
             <p14:sldId id="261"/>
             <p14:sldId id="262"/>
           </p14:sldIdLst>
         </p14:section>
-        <p14:section name="Results" id="{14f31e6a-5b88-9126-9644-8c745f83252d}">
+        <p14:section name="Results" id="{8b10a6ce-e896-b47e-f866-dc11f1713591}">
           <p14:sldIdLst>
             <p14:sldId id="263"/>
             <p14:sldId id="264"/>
@@ -150,12 +150,12 @@
             <p14:sldId id="266"/>
           </p14:sldIdLst>
         </p14:section>
-        <p14:section name="Why Us" id="{be00e101-3fb4-d1af-33b7-aa2dacaaa3c0}">
+        <p14:section name="Why Us" id="{3deec604-ea42-db30-ffdb-4d6977355b59}">
           <p14:sldIdLst>
             <p14:sldId id="267"/>
           </p14:sldIdLst>
         </p14:section>
-        <p14:section name="Conclusion" id="{3c4da55e-699d-63cd-d0b4-18c39f47c786}">
+        <p14:section name="Conclusion" id="{5e7f0011-6733-d368-5483-b8c20fd57d87}">
           <p14:sldIdLst>
             <p14:sldId id="268"/>
           </p14:sldIdLst>
@@ -5783,7 +5783,7 @@
       </p:sp>
       <p:sp>
         <p:nvSpPr>
-          <p:cNvPr id="8" name="Contact details"/>
+          <p:cNvPr id="8" name="Agency name"/>
           <p:cNvSpPr txBox="1"/>
           <p:nvPr/>
         </p:nvSpPr>
@@ -5811,7 +5811,7 @@
                   <a:schemeClr val="accent2"/>
                 </a:solidFill>
               </a:rPr>
-              <a:t>Pulse Marketing   |   [Phone]   |   [Email]</a:t>
+              <a:t>Pulse Marketing</a:t>
             </a:r>
             <a:endParaRPr lang="en-US" sz="1300" dirty="0"/>
           </a:p>
